--- a/lessons/lesson02_baseline_model/theory/slides/Lecture2 - Building the First Predictive Model.pptx
+++ b/lessons/lesson02_baseline_model/theory/slides/Lecture2 - Building the First Predictive Model.pptx
@@ -12239,6 +12239,42 @@
           </a:solidFill>
           <a:ln/>
         </p:spPr>
+      </p:sp>
+      <p:sp>
+        <p:nvSpPr>
+          <p:cNvPr id="790" name="gene B label"/>
+          <p:cNvSpPr/>
+          <p:nvPr/>
+        </p:nvSpPr>
+        <p:spPr>
+          <a:xfrm rot="-5400000">
+            <a:off x="5967920" y="3794760"/>
+            <a:ext cx="1097280" cy="274320"/>
+          </a:xfrm>
+          <a:prstGeom prst="rect">
+            <a:avLst/>
+          </a:prstGeom>
+          <a:noFill/>
+          <a:ln/>
+        </p:spPr>
+        <p:txBody>
+          <a:bodyPr wrap="square" lIns="0" tIns="0" rIns="0" bIns="0" rtlCol="0" anchor="ctr"/>
+          <a:lstStyle/>
+          <a:p>
+            <a:pPr marL="0" indent="0" algn="ctr">
+              <a:buNone/>
+            </a:pPr>
+            <a:r>
+              <a:rPr lang="en-US" sz="1000" dirty="0">
+                <a:solidFill>
+                  <a:srgbClr val="5B6B70"/>
+                </a:solidFill>
+                <a:latin typeface="Calibri" pitchFamily="34" charset="0"/>
+              </a:rPr>
+              <a:t>↑ gene B</a:t>
+            </a:r>
+          </a:p>
+        </p:txBody>
       </p:sp>
       <p:sp>
         <p:nvSpPr>

--- a/lessons/lesson02_baseline_model/theory/slides/Lecture2 - Building the First Predictive Model.pptx
+++ b/lessons/lesson02_baseline_model/theory/slides/Lecture2 - Building the First Predictive Model.pptx
@@ -1948,7 +1948,7 @@
               </a:defRPr>
             </a:pPr>
             <a:r>
-              <a:rPr sz="1300" b="0" i="0" u="none" strike="noStrike">
+              <a:rPr lang="en-GB" sz="1300" b="0" i="0" u="none" strike="noStrike">
                 <a:solidFill>
                   <a:srgbClr val="12262B"/>
                 </a:solidFill>
@@ -2215,7 +2215,7 @@
               </a:defRPr>
             </a:pPr>
             <a:r>
-              <a:rPr sz="1100" b="0" i="0" u="none" strike="noStrike">
+              <a:rPr lang="en-GB" sz="1100" b="0" i="0" u="none" strike="noStrike">
                 <a:solidFill>
                   <a:srgbClr val="12262B"/>
                 </a:solidFill>
@@ -2531,7 +2531,7 @@
                   </a:defRPr>
                 </a:pPr>
                 <a:r>
-                  <a:rPr sz="900" b="0" i="0" u="none" strike="noStrike">
+                  <a:rPr lang="en-GB" sz="900" b="0" i="0" u="none" strike="noStrike">
                     <a:solidFill>
                       <a:srgbClr val="5B6B70"/>
                     </a:solidFill>
@@ -2614,7 +2614,7 @@
                   </a:defRPr>
                 </a:pPr>
                 <a:r>
-                  <a:rPr sz="900" b="0" i="0" u="none" strike="noStrike">
+                  <a:rPr lang="en-GB" sz="900" b="0" i="0" u="none" strike="noStrike">
                     <a:solidFill>
                       <a:srgbClr val="5B6B70"/>
                     </a:solidFill>
@@ -2725,7 +2725,7 @@
               </a:defRPr>
             </a:pPr>
             <a:r>
-              <a:rPr sz="1200" b="0" i="0" u="none" strike="noStrike">
+              <a:rPr lang="en-GB" sz="1200" b="0" i="0" u="none" strike="noStrike">
                 <a:solidFill>
                   <a:srgbClr val="12262B"/>
                 </a:solidFill>
@@ -10117,69 +10117,6 @@
       </p:sp>
       <p:sp>
         <p:nvSpPr>
-          <p:cNvPr id="200" name="Shape 198"/>
-          <p:cNvSpPr/>
-          <p:nvPr/>
-        </p:nvSpPr>
-        <p:spPr>
-          <a:xfrm>
-            <a:off x="9509760" y="1234440"/>
-            <a:ext cx="1097280" cy="0"/>
-          </a:xfrm>
-          <a:prstGeom prst="line">
-            <a:avLst/>
-          </a:prstGeom>
-          <a:noFill/>
-          <a:ln w="31750">
-            <a:solidFill>
-              <a:srgbClr val="14A6B0"/>
-            </a:solidFill>
-            <a:prstDash val="solid"/>
-            <a:tailEnd type="triangle"/>
-          </a:ln>
-        </p:spPr>
-      </p:sp>
-      <p:sp>
-        <p:nvSpPr>
-          <p:cNvPr id="201" name="Text 199"/>
-          <p:cNvSpPr/>
-          <p:nvPr/>
-        </p:nvSpPr>
-        <p:spPr>
-          <a:xfrm>
-            <a:off x="10607040" y="1051560"/>
-            <a:ext cx="1280160" cy="365760"/>
-          </a:xfrm>
-          <a:prstGeom prst="rect">
-            <a:avLst/>
-          </a:prstGeom>
-          <a:noFill/>
-          <a:ln/>
-        </p:spPr>
-        <p:txBody>
-          <a:bodyPr wrap="square" lIns="0" tIns="0" rIns="0" bIns="0" rtlCol="0" anchor="ctr"/>
-          <a:lstStyle/>
-          <a:p>
-            <a:pPr marL="0" indent="0">
-              <a:buNone/>
-            </a:pPr>
-            <a:r>
-              <a:rPr lang="en-US" sz="1200" i="1" dirty="0">
-                <a:solidFill>
-                  <a:srgbClr val="DCEDEE"/>
-                </a:solidFill>
-                <a:latin typeface="Calibri" pitchFamily="34" charset="0"/>
-                <a:ea typeface="Calibri" pitchFamily="34" charset="-122"/>
-                <a:cs typeface="Calibri" pitchFamily="34" charset="-120"/>
-              </a:rPr>
-              <a:t>model</a:t>
-            </a:r>
-            <a:endParaRPr lang="en-US" sz="1200" dirty="0"/>
-          </a:p>
-        </p:txBody>
-      </p:sp>
-      <p:sp>
-        <p:nvSpPr>
           <p:cNvPr id="202" name="Text 200"/>
           <p:cNvSpPr/>
           <p:nvPr/>
@@ -10633,9 +10570,8 @@
                 <a:ea typeface="Calibri" pitchFamily="34" charset="-122"/>
                 <a:cs typeface="Calibri" pitchFamily="34" charset="-120"/>
               </a:rPr>
-              <a:t>Outputs a probability of recurrence between 0 and 1, then thresholds it into a class.</a:t>
-            </a:r>
-            <a:endParaRPr lang="en-US" sz="1550" dirty="0"/>
+              <a:t>Takes linear combination of gene expression -&gt; sigmoid function</a:t>
+            </a:r>
           </a:p>
           <a:p>
             <a:pPr marL="203200" indent="-203200">
@@ -10654,9 +10590,8 @@
                 <a:ea typeface="Calibri" pitchFamily="34" charset="-122"/>
                 <a:cs typeface="Calibri" pitchFamily="34" charset="-120"/>
               </a:rPr>
-              <a:t>Draws a linear decision boundary — a weighted sum of genes.</a:t>
-            </a:r>
-            <a:endParaRPr lang="en-US" sz="1550" dirty="0"/>
+              <a:t>Outputs a probability of recurrence between 0 and 1, then thresholds it into a class.</a:t>
+            </a:r>
           </a:p>
           <a:p>
             <a:pPr marL="203200" indent="-203200">
@@ -10672,10 +10607,9 @@
                   <a:srgbClr val="12262B"/>
                 </a:solidFill>
                 <a:latin typeface="Calibri" pitchFamily="34" charset="0"/>
-                <a:ea typeface="Calibri" pitchFamily="34" charset="-122"/>
                 <a:cs typeface="Calibri" pitchFamily="34" charset="-120"/>
               </a:rPr>
-              <a:t>Each gene gets a coefficient: positive pushes toward recurrence, negative away.</a:t>
+              <a:t>The model is uncertain around zero </a:t>
             </a:r>
             <a:endParaRPr lang="en-US" sz="1550" dirty="0"/>
           </a:p>
@@ -10688,15 +10622,77 @@
               <a:buChar char="•"/>
             </a:pPr>
             <a:r>
-              <a:rPr lang="en-US" sz="1550" b="1" dirty="0">
-                <a:solidFill>
-                  <a:srgbClr val="0E7C86"/>
+              <a:rPr lang="en-US" sz="1550" dirty="0">
+                <a:solidFill>
+                  <a:srgbClr val="12262B"/>
                 </a:solidFill>
                 <a:latin typeface="Calibri" pitchFamily="34" charset="0"/>
                 <a:ea typeface="Calibri" pitchFamily="34" charset="-122"/>
                 <a:cs typeface="Calibri" pitchFamily="34" charset="-120"/>
               </a:rPr>
-              <a:t>Interpretable, fast, and — crucially in p ≫ n — hard to overfit when regularised.</a:t>
+              <a:t>Each gene gets a coefficient: positive pushes toward recurrence, negative away.</a:t>
+            </a:r>
+            <a:endParaRPr lang="en-US" sz="1550" dirty="0"/>
+          </a:p>
+          <a:p>
+            <a:pPr marL="203200" indent="-203200">
+              <a:spcAft>
+                <a:spcPts val="1300"/>
+              </a:spcAft>
+              <a:buSzPct val="100000"/>
+              <a:buChar char="•"/>
+            </a:pPr>
+            <a:r>
+              <a:rPr lang="en-US" sz="1550" b="1" dirty="0">
+                <a:solidFill>
+                  <a:srgbClr val="0E7C86"/>
+                </a:solidFill>
+                <a:latin typeface="Calibri" pitchFamily="34" charset="0"/>
+                <a:ea typeface="Calibri" pitchFamily="34" charset="-122"/>
+                <a:cs typeface="Calibri" pitchFamily="34" charset="-120"/>
+              </a:rPr>
+              <a:t>Interpretable, fast, and — crucially in p ≫ n — hard to overfit when </a:t>
+            </a:r>
+            <a:r>
+              <a:rPr lang="en-US" sz="1550" b="1" dirty="0" err="1">
+                <a:solidFill>
+                  <a:srgbClr val="0E7C86"/>
+                </a:solidFill>
+                <a:latin typeface="Calibri" pitchFamily="34" charset="0"/>
+                <a:ea typeface="Calibri" pitchFamily="34" charset="-122"/>
+                <a:cs typeface="Calibri" pitchFamily="34" charset="-120"/>
+              </a:rPr>
+              <a:t>regularised</a:t>
+            </a:r>
+            <a:r>
+              <a:rPr lang="en-US" sz="1550" b="1" dirty="0">
+                <a:solidFill>
+                  <a:srgbClr val="0E7C86"/>
+                </a:solidFill>
+                <a:latin typeface="Calibri" pitchFamily="34" charset="0"/>
+                <a:ea typeface="Calibri" pitchFamily="34" charset="-122"/>
+                <a:cs typeface="Calibri" pitchFamily="34" charset="-120"/>
+              </a:rPr>
+              <a:t>.</a:t>
+            </a:r>
+          </a:p>
+          <a:p>
+            <a:pPr marL="203200" indent="-203200">
+              <a:spcAft>
+                <a:spcPts val="1300"/>
+              </a:spcAft>
+              <a:buSzPct val="100000"/>
+              <a:buChar char="•"/>
+            </a:pPr>
+            <a:r>
+              <a:rPr lang="en-US" sz="1550" b="1" dirty="0">
+                <a:solidFill>
+                  <a:srgbClr val="0E7C86"/>
+                </a:solidFill>
+                <a:latin typeface="Calibri" pitchFamily="34" charset="0"/>
+                <a:cs typeface="Calibri" pitchFamily="34" charset="-120"/>
+              </a:rPr>
+              <a:t>Very often, more complex model just leads to overfitting</a:t>
             </a:r>
             <a:endParaRPr lang="en-US" sz="1550" dirty="0"/>
           </a:p>
@@ -10706,10 +10702,16 @@
         <p:nvGraphicFramePr>
           <p:cNvPr id="8" name="Chart 0"/>
           <p:cNvGraphicFramePr/>
-          <p:nvPr/>
+          <p:nvPr>
+            <p:extLst>
+              <p:ext uri="{D42A27DB-BD31-4B8C-83A1-F6EECF244321}">
+                <p14:modId xmlns:p14="http://schemas.microsoft.com/office/powerpoint/2010/main" val="4003309529"/>
+              </p:ext>
+            </p:extLst>
+          </p:nvPr>
         </p:nvGraphicFramePr>
         <p:xfrm>
-          <a:off x="6400800" y="2194560"/>
+          <a:off x="6400800" y="1485900"/>
           <a:ext cx="5120640" cy="3291840"/>
         </p:xfrm>
         <a:graphic>
@@ -10718,6 +10720,36 @@
           </a:graphicData>
         </a:graphic>
       </p:graphicFrame>
+      <p:pic>
+        <p:nvPicPr>
+          <p:cNvPr id="9" name="Picture 8">
+            <a:extLst>
+              <a:ext uri="{FF2B5EF4-FFF2-40B4-BE49-F238E27FC236}">
+                <a16:creationId xmlns:a16="http://schemas.microsoft.com/office/drawing/2014/main" id="{80451C51-49FC-72BF-123B-580C98C7A079}"/>
+              </a:ext>
+            </a:extLst>
+          </p:cNvPr>
+          <p:cNvPicPr>
+            <a:picLocks noChangeAspect="1"/>
+          </p:cNvPicPr>
+          <p:nvPr/>
+        </p:nvPicPr>
+        <p:blipFill>
+          <a:blip r:embed="rId4"/>
+          <a:stretch>
+            <a:fillRect/>
+          </a:stretch>
+        </p:blipFill>
+        <p:spPr>
+          <a:xfrm>
+            <a:off x="6989379" y="4907630"/>
+            <a:ext cx="4360545" cy="1703482"/>
+          </a:xfrm>
+          <a:prstGeom prst="rect">
+            <a:avLst/>
+          </a:prstGeom>
+        </p:spPr>
+      </p:pic>
     </p:spTree>
   </p:cSld>
   <p:clrMapOvr>
@@ -10988,6 +11020,45 @@
               </a:rPr>
               <a:t>The threshold (default 0.5) is a choice — we can move it to trade off the two error types.</a:t>
             </a:r>
+          </a:p>
+          <a:p>
+            <a:pPr marL="203200" indent="-203200">
+              <a:spcAft>
+                <a:spcPts val="1200"/>
+              </a:spcAft>
+              <a:buSzPct val="100000"/>
+              <a:buChar char="•"/>
+            </a:pPr>
+            <a:r>
+              <a:rPr lang="en-US" sz="1600" b="1" dirty="0">
+                <a:solidFill>
+                  <a:srgbClr val="C2772B"/>
+                </a:solidFill>
+                <a:latin typeface="Calibri" pitchFamily="34" charset="0"/>
+                <a:cs typeface="Calibri" pitchFamily="34" charset="-120"/>
+              </a:rPr>
+              <a:t>THE WAY YOU MOVE IT DEPENDS ON WHAT IS WORSE: </a:t>
+            </a:r>
+            <a:r>
+              <a:rPr lang="en-US" sz="1600" b="1" dirty="0" err="1">
+                <a:solidFill>
+                  <a:srgbClr val="C2772B"/>
+                </a:solidFill>
+                <a:latin typeface="Calibri" pitchFamily="34" charset="0"/>
+                <a:cs typeface="Calibri" pitchFamily="34" charset="-120"/>
+              </a:rPr>
+              <a:t>mislabelling</a:t>
+            </a:r>
+            <a:r>
+              <a:rPr lang="en-US" sz="1600" b="1" dirty="0">
+                <a:solidFill>
+                  <a:srgbClr val="C2772B"/>
+                </a:solidFill>
+                <a:latin typeface="Calibri" pitchFamily="34" charset="0"/>
+                <a:cs typeface="Calibri" pitchFamily="34" charset="-120"/>
+              </a:rPr>
+              <a:t> recurrence or no recurrence</a:t>
+            </a:r>
             <a:endParaRPr lang="en-US" sz="1600" dirty="0"/>
           </a:p>
         </p:txBody>
@@ -12682,7 +12753,7 @@
                 <a:ea typeface="Calibri" pitchFamily="34" charset="-122"/>
                 <a:cs typeface="Calibri" pitchFamily="34" charset="-120"/>
               </a:rPr>
-              <a:t>The baseline is the yardstick: any fancy model must beat a well-built Logistic Regression to justify itself.</a:t>
+              <a:t>The baseline is the important: any fancy model must beat a well-built Logistic Regression to justify itself.</a:t>
             </a:r>
             <a:endParaRPr lang="en-US" sz="1600" dirty="0"/>
           </a:p>
@@ -13153,7 +13224,7 @@
                 <a:ea typeface="Calibri" pitchFamily="34" charset="-122"/>
                 <a:cs typeface="Calibri" pitchFamily="34" charset="-120"/>
               </a:rPr>
-              <a:t>p ≫ n means a plain Logistic Regression can fit the training data perfectly — and generalise terribly.</a:t>
+              <a:t>p ≫ n means a plain Logistic Regression can fit the training data perfectly, and generalise terribly.</a:t>
             </a:r>
             <a:endParaRPr lang="en-US" sz="1600" dirty="0"/>
           </a:p>
@@ -13217,6 +13288,45 @@
                 <a:cs typeface="Calibri" pitchFamily="34" charset="-120"/>
               </a:rPr>
               <a:t>The single most important tool for making linear models work in transcriptomics.</a:t>
+            </a:r>
+          </a:p>
+          <a:p>
+            <a:pPr marL="203200" indent="-203200">
+              <a:spcAft>
+                <a:spcPts val="1400"/>
+              </a:spcAft>
+              <a:buSzPct val="100000"/>
+              <a:buChar char="•"/>
+            </a:pPr>
+            <a:r>
+              <a:rPr lang="en-US" sz="1600" b="1" dirty="0" err="1">
+                <a:solidFill>
+                  <a:srgbClr val="0E7C86"/>
+                </a:solidFill>
+                <a:latin typeface="Calibri" pitchFamily="34" charset="0"/>
+                <a:cs typeface="Calibri" pitchFamily="34" charset="-120"/>
+              </a:rPr>
+              <a:t>Regularisation</a:t>
+            </a:r>
+            <a:r>
+              <a:rPr lang="en-US" sz="1600" b="1" dirty="0">
+                <a:solidFill>
+                  <a:srgbClr val="0E7C86"/>
+                </a:solidFill>
+                <a:latin typeface="Calibri" pitchFamily="34" charset="0"/>
+                <a:cs typeface="Calibri" pitchFamily="34" charset="-120"/>
+              </a:rPr>
+              <a:t> makes your models perform worse: the tiny improvement of performance might just be the overfitting, the </a:t>
+            </a:r>
+            <a:r>
+              <a:rPr lang="en-US" sz="1600" b="1" dirty="0" err="1">
+                <a:solidFill>
+                  <a:srgbClr val="0E7C86"/>
+                </a:solidFill>
+                <a:latin typeface="Calibri" pitchFamily="34" charset="0"/>
+                <a:cs typeface="Calibri" pitchFamily="34" charset="-120"/>
+              </a:rPr>
+              <a:t>memorisation</a:t>
             </a:r>
             <a:endParaRPr lang="en-US" sz="1600" dirty="0"/>
           </a:p>
@@ -15107,7 +15217,7 @@
         </p:nvSpPr>
         <p:spPr>
           <a:xfrm>
-            <a:off x="11247120" y="6473952"/>
+            <a:off x="11247120" y="5468112"/>
             <a:ext cx="365760" cy="274320"/>
           </a:xfrm>
           <a:prstGeom prst="rect">
@@ -15175,7 +15285,7 @@
                 <a:ea typeface="Calibri" pitchFamily="34" charset="-122"/>
                 <a:cs typeface="Calibri" pitchFamily="34" charset="-120"/>
               </a:rPr>
-              <a:t>The LASSO penalty drives many coefficients exactly to zero — it selects a small gene panel automatically.</a:t>
+              <a:t>The LASSO penalty drives many coefficients exactly to zero: it selects a small gene panel automatically (feature extraction!)</a:t>
             </a:r>
             <a:endParaRPr lang="en-US" sz="1550" dirty="0"/>
           </a:p>
@@ -15217,7 +15327,7 @@
                 <a:ea typeface="Calibri" pitchFamily="34" charset="-122"/>
                 <a:cs typeface="Calibri" pitchFamily="34" charset="-120"/>
               </a:rPr>
-              <a:t>Caveat (Lecture 1): among correlated genes, LASSO keeps one and drops the rest — selection is unstable.</a:t>
+              <a:t>Caveat: among correlated genes, LASSO keeps one and drops the rest, thus selection is unstable.</a:t>
             </a:r>
             <a:endParaRPr lang="en-US" sz="1550" dirty="0"/>
           </a:p>
@@ -15238,7 +15348,7 @@
                 <a:ea typeface="Calibri" pitchFamily="34" charset="-122"/>
                 <a:cs typeface="Calibri" pitchFamily="34" charset="-120"/>
               </a:rPr>
-              <a:t>So a LASSO panel is a hypothesis, not a proven causal gene set.</a:t>
+              <a:t>So a LASSO panel is a hypothesis, not a proven causal gene set: DO NOT OVERINTERPRET LASSO GENES</a:t>
             </a:r>
             <a:endParaRPr lang="en-US" sz="1550" dirty="0"/>
           </a:p>
@@ -15252,7 +15362,7 @@
         </p:nvSpPr>
         <p:spPr>
           <a:xfrm>
-            <a:off x="6766560" y="2286000"/>
+            <a:off x="6766560" y="1280160"/>
             <a:ext cx="4572000" cy="3108960"/>
           </a:xfrm>
           <a:prstGeom prst="rect">
@@ -15283,7 +15393,7 @@
         </p:nvCxnSpPr>
         <p:spPr>
           <a:xfrm>
-            <a:off x="6896560" y="3902659"/>
+            <a:off x="6896560" y="2896819"/>
             <a:ext cx="4352000" cy="0"/>
           </a:xfrm>
           <a:prstGeom prst="line">
@@ -15305,7 +15415,7 @@
         </p:nvSpPr>
         <p:spPr>
           <a:xfrm>
-            <a:off x="6896560" y="2993330"/>
+            <a:off x="6896560" y="1987490"/>
             <a:ext cx="4352000" cy="909329"/>
           </a:xfrm>
           <a:custGeom>
@@ -15382,7 +15492,7 @@
         </p:nvSpPr>
         <p:spPr>
           <a:xfrm>
-            <a:off x="6896560" y="3902659"/>
+            <a:off x="6896560" y="2896819"/>
             <a:ext cx="4352000" cy="631150"/>
           </a:xfrm>
           <a:custGeom>
@@ -15459,7 +15569,7 @@
         </p:nvSpPr>
         <p:spPr>
           <a:xfrm>
-            <a:off x="6896560" y="3286662"/>
+            <a:off x="6896560" y="2280822"/>
             <a:ext cx="4352000" cy="615997"/>
           </a:xfrm>
           <a:custGeom>
@@ -15536,7 +15646,7 @@
         </p:nvSpPr>
         <p:spPr>
           <a:xfrm>
-            <a:off x="6896560" y="3902659"/>
+            <a:off x="6896560" y="2896819"/>
             <a:ext cx="4352000" cy="833118"/>
           </a:xfrm>
           <a:custGeom>
@@ -15613,7 +15723,7 @@
         </p:nvSpPr>
         <p:spPr>
           <a:xfrm>
-            <a:off x="6896560" y="3095996"/>
+            <a:off x="6896560" y="2090156"/>
             <a:ext cx="4352000" cy="806663"/>
           </a:xfrm>
           <a:custGeom>
@@ -15690,7 +15800,7 @@
         </p:nvSpPr>
         <p:spPr>
           <a:xfrm>
-            <a:off x="6896560" y="3902659"/>
+            <a:off x="6896560" y="2896819"/>
             <a:ext cx="4352000" cy="479674"/>
           </a:xfrm>
           <a:custGeom>
@@ -15767,7 +15877,7 @@
         </p:nvSpPr>
         <p:spPr>
           <a:xfrm>
-            <a:off x="6896560" y="3462661"/>
+            <a:off x="6896560" y="2456821"/>
             <a:ext cx="4352000" cy="439998"/>
           </a:xfrm>
           <a:custGeom>
@@ -15844,7 +15954,7 @@
         </p:nvSpPr>
         <p:spPr>
           <a:xfrm>
-            <a:off x="6896560" y="3902659"/>
+            <a:off x="6896560" y="2896819"/>
             <a:ext cx="4352000" cy="605904"/>
           </a:xfrm>
           <a:custGeom>
@@ -15921,7 +16031,7 @@
         </p:nvSpPr>
         <p:spPr>
           <a:xfrm>
-            <a:off x="6896560" y="3242662"/>
+            <a:off x="6896560" y="2236822"/>
             <a:ext cx="4352000" cy="659997"/>
           </a:xfrm>
           <a:custGeom>
@@ -15998,7 +16108,7 @@
         </p:nvSpPr>
         <p:spPr>
           <a:xfrm>
-            <a:off x="6896560" y="3902659"/>
+            <a:off x="6896560" y="2896819"/>
             <a:ext cx="4352000" cy="353444"/>
           </a:xfrm>
           <a:custGeom>
@@ -16075,7 +16185,7 @@
         </p:nvSpPr>
         <p:spPr>
           <a:xfrm>
-            <a:off x="6896560" y="2655998"/>
+            <a:off x="6896560" y="1650158"/>
             <a:ext cx="4352000" cy="560997"/>
           </a:xfrm>
           <a:custGeom>
@@ -16152,7 +16262,7 @@
         </p:nvSpPr>
         <p:spPr>
           <a:xfrm>
-            <a:off x="6896560" y="4402530"/>
+            <a:off x="6896560" y="3396690"/>
             <a:ext cx="4352000" cy="408985"/>
           </a:xfrm>
           <a:custGeom>
@@ -16229,7 +16339,7 @@
         </p:nvSpPr>
         <p:spPr>
           <a:xfrm>
-            <a:off x="6896560" y="3022663"/>
+            <a:off x="6896560" y="2016823"/>
             <a:ext cx="4352000" cy="395998"/>
           </a:xfrm>
           <a:custGeom>
@@ -16306,7 +16416,7 @@
         </p:nvSpPr>
         <p:spPr>
           <a:xfrm>
-            <a:off x="9038560" y="2406000"/>
+            <a:off x="9038560" y="1400160"/>
             <a:ext cx="2150000" cy="246380"/>
           </a:xfrm>
           <a:prstGeom prst="rect">
@@ -16342,7 +16452,7 @@
         </p:nvSpPr>
         <p:spPr>
           <a:xfrm>
-            <a:off x="6966560" y="5094960"/>
+            <a:off x="6966560" y="4089120"/>
             <a:ext cx="2400000" cy="246380"/>
           </a:xfrm>
           <a:prstGeom prst="rect">
@@ -16378,7 +16488,7 @@
         </p:nvSpPr>
         <p:spPr>
           <a:xfrm>
-            <a:off x="6766560" y="5468112"/>
+            <a:off x="6766560" y="4462272"/>
             <a:ext cx="4572000" cy="274320"/>
           </a:xfrm>
           <a:prstGeom prst="rect">
@@ -16423,7 +16533,7 @@
         </p:nvSpPr>
         <p:spPr>
           <a:xfrm rot="16200000">
-            <a:off x="6191531" y="3655814"/>
+            <a:off x="6191531" y="2649974"/>
             <a:ext cx="682110" cy="369332"/>
           </a:xfrm>
           <a:prstGeom prst="rect">
@@ -16441,6 +16551,148 @@
               <a:rPr lang="en-IT" dirty="0"/>
               <a:t>Coeff</a:t>
             </a:r>
+          </a:p>
+        </p:txBody>
+      </p:sp>
+      <p:pic>
+        <p:nvPicPr>
+          <p:cNvPr id="10" name="Picture 9">
+            <a:extLst>
+              <a:ext uri="{FF2B5EF4-FFF2-40B4-BE49-F238E27FC236}">
+                <a16:creationId xmlns:a16="http://schemas.microsoft.com/office/drawing/2014/main" id="{D5F6711D-4FA0-56BA-8518-C8557738C23C}"/>
+              </a:ext>
+            </a:extLst>
+          </p:cNvPr>
+          <p:cNvPicPr>
+            <a:picLocks noChangeAspect="1"/>
+          </p:cNvPicPr>
+          <p:nvPr/>
+        </p:nvPicPr>
+        <p:blipFill>
+          <a:blip r:embed="rId3"/>
+          <a:stretch>
+            <a:fillRect/>
+          </a:stretch>
+        </p:blipFill>
+        <p:spPr>
+          <a:xfrm>
+            <a:off x="5792164" y="4989461"/>
+            <a:ext cx="5000910" cy="436761"/>
+          </a:xfrm>
+          <a:prstGeom prst="rect">
+            <a:avLst/>
+          </a:prstGeom>
+        </p:spPr>
+      </p:pic>
+      <p:pic>
+        <p:nvPicPr>
+          <p:cNvPr id="11" name="Picture 10">
+            <a:extLst>
+              <a:ext uri="{FF2B5EF4-FFF2-40B4-BE49-F238E27FC236}">
+                <a16:creationId xmlns:a16="http://schemas.microsoft.com/office/drawing/2014/main" id="{CDBBB78F-AC18-4939-A748-017B4594E2D7}"/>
+              </a:ext>
+            </a:extLst>
+          </p:cNvPr>
+          <p:cNvPicPr>
+            <a:picLocks noChangeAspect="1"/>
+          </p:cNvPicPr>
+          <p:nvPr/>
+        </p:nvPicPr>
+        <p:blipFill>
+          <a:blip r:embed="rId4"/>
+          <a:stretch>
+            <a:fillRect/>
+          </a:stretch>
+        </p:blipFill>
+        <p:spPr>
+          <a:xfrm>
+            <a:off x="7513846" y="5319455"/>
+            <a:ext cx="1986456" cy="864476"/>
+          </a:xfrm>
+          <a:prstGeom prst="rect">
+            <a:avLst/>
+          </a:prstGeom>
+        </p:spPr>
+      </p:pic>
+      <p:pic>
+        <p:nvPicPr>
+          <p:cNvPr id="12" name="Picture 11">
+            <a:extLst>
+              <a:ext uri="{FF2B5EF4-FFF2-40B4-BE49-F238E27FC236}">
+                <a16:creationId xmlns:a16="http://schemas.microsoft.com/office/drawing/2014/main" id="{C2CD6A4B-FEC0-0D21-8BD1-CDCAD72869A5}"/>
+              </a:ext>
+            </a:extLst>
+          </p:cNvPr>
+          <p:cNvPicPr>
+            <a:picLocks noChangeAspect="1"/>
+          </p:cNvPicPr>
+          <p:nvPr/>
+        </p:nvPicPr>
+        <p:blipFill>
+          <a:blip r:embed="rId5"/>
+          <a:stretch>
+            <a:fillRect/>
+          </a:stretch>
+        </p:blipFill>
+        <p:spPr>
+          <a:xfrm>
+            <a:off x="5941849" y="6075812"/>
+            <a:ext cx="4701540" cy="742884"/>
+          </a:xfrm>
+          <a:prstGeom prst="rect">
+            <a:avLst/>
+          </a:prstGeom>
+        </p:spPr>
+      </p:pic>
+      <p:sp>
+        <p:nvSpPr>
+          <p:cNvPr id="13" name="Rectangle 12">
+            <a:extLst>
+              <a:ext uri="{FF2B5EF4-FFF2-40B4-BE49-F238E27FC236}">
+                <a16:creationId xmlns:a16="http://schemas.microsoft.com/office/drawing/2014/main" id="{9152E74B-11B8-9D92-6A38-FD650ACECAE8}"/>
+              </a:ext>
+            </a:extLst>
+          </p:cNvPr>
+          <p:cNvSpPr/>
+          <p:nvPr/>
+        </p:nvSpPr>
+        <p:spPr>
+          <a:xfrm>
+            <a:off x="9774621" y="5948855"/>
+            <a:ext cx="868768" cy="909145"/>
+          </a:xfrm>
+          <a:prstGeom prst="rect">
+            <a:avLst/>
+          </a:prstGeom>
+          <a:noFill/>
+          <a:ln>
+            <a:solidFill>
+              <a:srgbClr val="FF0000"/>
+            </a:solidFill>
+          </a:ln>
+        </p:spPr>
+        <p:style>
+          <a:lnRef idx="2">
+            <a:schemeClr val="accent1">
+              <a:shade val="15000"/>
+            </a:schemeClr>
+          </a:lnRef>
+          <a:fillRef idx="1">
+            <a:schemeClr val="accent1"/>
+          </a:fillRef>
+          <a:effectRef idx="0">
+            <a:schemeClr val="accent1"/>
+          </a:effectRef>
+          <a:fontRef idx="minor">
+            <a:schemeClr val="lt1"/>
+          </a:fontRef>
+        </p:style>
+        <p:txBody>
+          <a:bodyPr rtlCol="0" anchor="ctr"/>
+          <a:lstStyle/>
+          <a:p>
+            <a:pPr algn="ctr"/>
+            <a:endParaRPr lang="en-IT"/>
           </a:p>
         </p:txBody>
       </p:sp>
@@ -16747,7 +16999,7 @@
         </p:nvSpPr>
         <p:spPr>
           <a:xfrm>
-            <a:off x="6858000" y="2377440"/>
+            <a:off x="6710856" y="1536192"/>
             <a:ext cx="2286000" cy="2468880"/>
           </a:xfrm>
           <a:prstGeom prst="rect">
@@ -16772,7 +17024,7 @@
         </p:nvSpPr>
         <p:spPr>
           <a:xfrm>
-            <a:off x="6858000" y="4892040"/>
+            <a:off x="6710856" y="4050792"/>
             <a:ext cx="2286000" cy="274320"/>
           </a:xfrm>
           <a:prstGeom prst="rect">
@@ -16811,7 +17063,7 @@
         </p:nvSpPr>
         <p:spPr>
           <a:xfrm>
-            <a:off x="8631936" y="3465576"/>
+            <a:off x="8484792" y="2624328"/>
             <a:ext cx="292608" cy="292608"/>
           </a:xfrm>
           <a:prstGeom prst="ellipse">
@@ -16836,7 +17088,7 @@
         </p:nvSpPr>
         <p:spPr>
           <a:xfrm>
-            <a:off x="8094876" y="4204775"/>
+            <a:off x="7947732" y="3363527"/>
             <a:ext cx="292608" cy="292608"/>
           </a:xfrm>
           <a:prstGeom prst="ellipse">
@@ -16861,7 +17113,7 @@
         </p:nvSpPr>
         <p:spPr>
           <a:xfrm>
-            <a:off x="7225896" y="3922426"/>
+            <a:off x="7078752" y="3081178"/>
             <a:ext cx="292608" cy="292608"/>
           </a:xfrm>
           <a:prstGeom prst="ellipse">
@@ -16886,7 +17138,7 @@
         </p:nvSpPr>
         <p:spPr>
           <a:xfrm>
-            <a:off x="7225896" y="3008726"/>
+            <a:off x="7078752" y="2167478"/>
             <a:ext cx="292608" cy="292608"/>
           </a:xfrm>
           <a:prstGeom prst="ellipse">
@@ -16911,7 +17163,7 @@
         </p:nvSpPr>
         <p:spPr>
           <a:xfrm>
-            <a:off x="8094876" y="2726377"/>
+            <a:off x="7947732" y="1885129"/>
             <a:ext cx="292608" cy="292608"/>
           </a:xfrm>
           <a:prstGeom prst="ellipse">
@@ -16936,7 +17188,7 @@
         </p:nvSpPr>
         <p:spPr>
           <a:xfrm>
-            <a:off x="6858000" y="2121408"/>
+            <a:off x="6710856" y="1280160"/>
             <a:ext cx="2286000" cy="228600"/>
           </a:xfrm>
           <a:prstGeom prst="rect">
@@ -16975,7 +17227,7 @@
         </p:nvSpPr>
         <p:spPr>
           <a:xfrm>
-            <a:off x="9326880" y="2377440"/>
+            <a:off x="9179736" y="1536192"/>
             <a:ext cx="2286000" cy="2468880"/>
           </a:xfrm>
           <a:prstGeom prst="rect">
@@ -17000,7 +17252,7 @@
         </p:nvSpPr>
         <p:spPr>
           <a:xfrm>
-            <a:off x="9326880" y="4892040"/>
+            <a:off x="9179736" y="4050792"/>
             <a:ext cx="2286000" cy="274320"/>
           </a:xfrm>
           <a:prstGeom prst="rect">
@@ -17039,7 +17291,7 @@
         </p:nvSpPr>
         <p:spPr>
           <a:xfrm>
-            <a:off x="11100816" y="3465576"/>
+            <a:off x="10953672" y="2624328"/>
             <a:ext cx="292608" cy="292608"/>
           </a:xfrm>
           <a:prstGeom prst="ellipse">
@@ -17064,7 +17316,7 @@
         </p:nvSpPr>
         <p:spPr>
           <a:xfrm>
-            <a:off x="10563756" y="4204775"/>
+            <a:off x="10416612" y="3363527"/>
             <a:ext cx="292608" cy="292608"/>
           </a:xfrm>
           <a:prstGeom prst="ellipse">
@@ -17089,7 +17341,7 @@
         </p:nvSpPr>
         <p:spPr>
           <a:xfrm>
-            <a:off x="9694776" y="3922426"/>
+            <a:off x="9547632" y="3081178"/>
             <a:ext cx="292608" cy="292608"/>
           </a:xfrm>
           <a:prstGeom prst="ellipse">
@@ -17114,7 +17366,7 @@
         </p:nvSpPr>
         <p:spPr>
           <a:xfrm>
-            <a:off x="9694776" y="3008726"/>
+            <a:off x="9547632" y="2167478"/>
             <a:ext cx="292608" cy="292608"/>
           </a:xfrm>
           <a:prstGeom prst="ellipse">
@@ -17139,7 +17391,7 @@
         </p:nvSpPr>
         <p:spPr>
           <a:xfrm>
-            <a:off x="10563756" y="2726377"/>
+            <a:off x="10416612" y="1885129"/>
             <a:ext cx="292608" cy="292608"/>
           </a:xfrm>
           <a:prstGeom prst="ellipse">
@@ -17164,7 +17416,7 @@
         </p:nvSpPr>
         <p:spPr>
           <a:xfrm>
-            <a:off x="9326880" y="2121408"/>
+            <a:off x="9179736" y="1280160"/>
             <a:ext cx="2286000" cy="228600"/>
           </a:xfrm>
           <a:prstGeom prst="rect">
@@ -17192,6 +17444,148 @@
               <a:t>correlated gene cluster</a:t>
             </a:r>
             <a:endParaRPr lang="en-US" sz="900" dirty="0"/>
+          </a:p>
+        </p:txBody>
+      </p:sp>
+      <p:pic>
+        <p:nvPicPr>
+          <p:cNvPr id="25" name="Picture 24">
+            <a:extLst>
+              <a:ext uri="{FF2B5EF4-FFF2-40B4-BE49-F238E27FC236}">
+                <a16:creationId xmlns:a16="http://schemas.microsoft.com/office/drawing/2014/main" id="{DD4D7FC9-BD46-28B2-447A-93BE41DB33FE}"/>
+              </a:ext>
+            </a:extLst>
+          </p:cNvPr>
+          <p:cNvPicPr>
+            <a:picLocks noChangeAspect="1"/>
+          </p:cNvPicPr>
+          <p:nvPr/>
+        </p:nvPicPr>
+        <p:blipFill>
+          <a:blip r:embed="rId3"/>
+          <a:stretch>
+            <a:fillRect/>
+          </a:stretch>
+        </p:blipFill>
+        <p:spPr>
+          <a:xfrm>
+            <a:off x="6464826" y="4559576"/>
+            <a:ext cx="5000910" cy="436761"/>
+          </a:xfrm>
+          <a:prstGeom prst="rect">
+            <a:avLst/>
+          </a:prstGeom>
+        </p:spPr>
+      </p:pic>
+      <p:pic>
+        <p:nvPicPr>
+          <p:cNvPr id="26" name="Picture 25">
+            <a:extLst>
+              <a:ext uri="{FF2B5EF4-FFF2-40B4-BE49-F238E27FC236}">
+                <a16:creationId xmlns:a16="http://schemas.microsoft.com/office/drawing/2014/main" id="{F5AE3C37-D64B-7D32-DE63-3486B7A463DA}"/>
+              </a:ext>
+            </a:extLst>
+          </p:cNvPr>
+          <p:cNvPicPr>
+            <a:picLocks noChangeAspect="1"/>
+          </p:cNvPicPr>
+          <p:nvPr/>
+        </p:nvPicPr>
+        <p:blipFill>
+          <a:blip r:embed="rId4"/>
+          <a:stretch>
+            <a:fillRect/>
+          </a:stretch>
+        </p:blipFill>
+        <p:spPr>
+          <a:xfrm>
+            <a:off x="8186508" y="4889570"/>
+            <a:ext cx="1986456" cy="864476"/>
+          </a:xfrm>
+          <a:prstGeom prst="rect">
+            <a:avLst/>
+          </a:prstGeom>
+        </p:spPr>
+      </p:pic>
+      <p:pic>
+        <p:nvPicPr>
+          <p:cNvPr id="27" name="Picture 26">
+            <a:extLst>
+              <a:ext uri="{FF2B5EF4-FFF2-40B4-BE49-F238E27FC236}">
+                <a16:creationId xmlns:a16="http://schemas.microsoft.com/office/drawing/2014/main" id="{0611C0BB-3871-511E-43DB-A92E7B9334B8}"/>
+              </a:ext>
+            </a:extLst>
+          </p:cNvPr>
+          <p:cNvPicPr>
+            <a:picLocks noChangeAspect="1"/>
+          </p:cNvPicPr>
+          <p:nvPr/>
+        </p:nvPicPr>
+        <p:blipFill>
+          <a:blip r:embed="rId5"/>
+          <a:stretch>
+            <a:fillRect/>
+          </a:stretch>
+        </p:blipFill>
+        <p:spPr>
+          <a:xfrm>
+            <a:off x="5567680" y="5699565"/>
+            <a:ext cx="6045200" cy="850900"/>
+          </a:xfrm>
+          <a:prstGeom prst="rect">
+            <a:avLst/>
+          </a:prstGeom>
+        </p:spPr>
+      </p:pic>
+      <p:sp>
+        <p:nvSpPr>
+          <p:cNvPr id="28" name="Rectangle 27">
+            <a:extLst>
+              <a:ext uri="{FF2B5EF4-FFF2-40B4-BE49-F238E27FC236}">
+                <a16:creationId xmlns:a16="http://schemas.microsoft.com/office/drawing/2014/main" id="{A2BDD64B-D3B8-AAF9-564D-3C49F6466A27}"/>
+              </a:ext>
+            </a:extLst>
+          </p:cNvPr>
+          <p:cNvSpPr/>
+          <p:nvPr/>
+        </p:nvSpPr>
+        <p:spPr>
+          <a:xfrm>
+            <a:off x="9694148" y="5723458"/>
+            <a:ext cx="1918732" cy="909145"/>
+          </a:xfrm>
+          <a:prstGeom prst="rect">
+            <a:avLst/>
+          </a:prstGeom>
+          <a:noFill/>
+          <a:ln>
+            <a:solidFill>
+              <a:srgbClr val="FF0000"/>
+            </a:solidFill>
+          </a:ln>
+        </p:spPr>
+        <p:style>
+          <a:lnRef idx="2">
+            <a:schemeClr val="accent1">
+              <a:shade val="15000"/>
+            </a:schemeClr>
+          </a:lnRef>
+          <a:fillRef idx="1">
+            <a:schemeClr val="accent1"/>
+          </a:fillRef>
+          <a:effectRef idx="0">
+            <a:schemeClr val="accent1"/>
+          </a:effectRef>
+          <a:fontRef idx="minor">
+            <a:schemeClr val="lt1"/>
+          </a:fontRef>
+        </p:style>
+        <p:txBody>
+          <a:bodyPr rtlCol="0" anchor="ctr"/>
+          <a:lstStyle/>
+          <a:p>
+            <a:pPr algn="ctr"/>
+            <a:endParaRPr lang="en-IT"/>
           </a:p>
         </p:txBody>
       </p:sp>
@@ -17300,7 +17694,7 @@
                 <a:ea typeface="Cambria" pitchFamily="34" charset="-122"/>
                 <a:cs typeface="Cambria" pitchFamily="34" charset="-120"/>
               </a:rPr>
-              <a:t>Evaluating a classifier — accuracy is not enough</a:t>
+              <a:t>Evaluating a classifier: accuracy is not enough</a:t>
             </a:r>
             <a:endParaRPr lang="en-US" sz="3000" dirty="0"/>
           </a:p>
@@ -17421,7 +17815,7 @@
                 <a:ea typeface="Calibri" pitchFamily="34" charset="-122"/>
                 <a:cs typeface="Calibri" pitchFamily="34" charset="-120"/>
               </a:rPr>
-              <a:t>Recurrence is a minority class (Lecture 1) — accuracy is misleading.</a:t>
+              <a:t>Recurrence is a minority class: accuracy is misleading.</a:t>
             </a:r>
             <a:endParaRPr lang="en-US" sz="1600" dirty="0"/>
           </a:p>
@@ -17774,7 +18168,65 @@
                 <a:ea typeface="Calibri" pitchFamily="34" charset="-122"/>
                 <a:cs typeface="Calibri" pitchFamily="34" charset="-120"/>
               </a:rPr>
-              <a:t>Which to prioritise depends on the clinical cost asymmetry from Lecture 1.</a:t>
+              <a:t>Which to prioritise depends on the clinical cost asymmetry.</a:t>
+            </a:r>
+          </a:p>
+          <a:p>
+            <a:pPr marL="203200" indent="-203200">
+              <a:spcAft>
+                <a:spcPts val="1300"/>
+              </a:spcAft>
+              <a:buSzPct val="100000"/>
+              <a:buChar char="•"/>
+            </a:pPr>
+            <a:r>
+              <a:rPr lang="en-US" sz="1550" b="1" dirty="0">
+                <a:solidFill>
+                  <a:srgbClr val="0E7C86"/>
+                </a:solidFill>
+                <a:latin typeface="Calibri" pitchFamily="34" charset="0"/>
+                <a:cs typeface="Calibri" pitchFamily="34" charset="-120"/>
+              </a:rPr>
+              <a:t>If you want to minimize the missed recurrence, </a:t>
+            </a:r>
+            <a:r>
+              <a:rPr lang="en-US" sz="1550" b="1" dirty="0" err="1">
+                <a:solidFill>
+                  <a:srgbClr val="0E7C86"/>
+                </a:solidFill>
+                <a:latin typeface="Calibri" pitchFamily="34" charset="0"/>
+                <a:cs typeface="Calibri" pitchFamily="34" charset="-120"/>
+              </a:rPr>
+              <a:t>maximise</a:t>
+            </a:r>
+            <a:r>
+              <a:rPr lang="en-US" sz="1550" b="1" dirty="0">
+                <a:solidFill>
+                  <a:srgbClr val="0E7C86"/>
+                </a:solidFill>
+                <a:latin typeface="Calibri" pitchFamily="34" charset="0"/>
+                <a:cs typeface="Calibri" pitchFamily="34" charset="-120"/>
+              </a:rPr>
+              <a:t> recall.</a:t>
+            </a:r>
+          </a:p>
+          <a:p>
+            <a:pPr marL="203200" indent="-203200">
+              <a:spcAft>
+                <a:spcPts val="1300"/>
+              </a:spcAft>
+              <a:buSzPct val="100000"/>
+              <a:buChar char="•"/>
+            </a:pPr>
+            <a:r>
+              <a:rPr lang="en-US" sz="1550" b="1" dirty="0">
+                <a:solidFill>
+                  <a:srgbClr val="0E7C86"/>
+                </a:solidFill>
+                <a:latin typeface="Calibri" pitchFamily="34" charset="0"/>
+                <a:cs typeface="Calibri" pitchFamily="34" charset="-120"/>
+              </a:rPr>
+              <a:t>If you want to minimize over treatment, maximize precision</a:t>
             </a:r>
             <a:endParaRPr lang="en-US" sz="1550" dirty="0"/>
           </a:p>
@@ -18270,6 +18722,96 @@
           </a:p>
         </p:txBody>
       </p:sp>
+      <p:pic>
+        <p:nvPicPr>
+          <p:cNvPr id="6" name="Image 0" descr="precision.png">
+            <a:extLst>
+              <a:ext uri="{FF2B5EF4-FFF2-40B4-BE49-F238E27FC236}">
+                <a16:creationId xmlns:a16="http://schemas.microsoft.com/office/drawing/2014/main" id="{016EC64B-4B19-FE6E-7675-056F26AA30B5}"/>
+              </a:ext>
+            </a:extLst>
+          </p:cNvPr>
+          <p:cNvPicPr>
+            <a:picLocks noChangeAspect="1"/>
+          </p:cNvPicPr>
+          <p:nvPr/>
+        </p:nvPicPr>
+        <p:blipFill>
+          <a:blip r:embed="rId3"/>
+          <a:stretch>
+            <a:fillRect/>
+          </a:stretch>
+        </p:blipFill>
+        <p:spPr>
+          <a:xfrm>
+            <a:off x="3566160" y="4733490"/>
+            <a:ext cx="2286000" cy="509118"/>
+          </a:xfrm>
+          <a:prstGeom prst="rect">
+            <a:avLst/>
+          </a:prstGeom>
+        </p:spPr>
+      </p:pic>
+      <p:pic>
+        <p:nvPicPr>
+          <p:cNvPr id="22" name="Image 1" descr="recall.png">
+            <a:extLst>
+              <a:ext uri="{FF2B5EF4-FFF2-40B4-BE49-F238E27FC236}">
+                <a16:creationId xmlns:a16="http://schemas.microsoft.com/office/drawing/2014/main" id="{C32A9B48-C829-D517-0745-A508950224F7}"/>
+              </a:ext>
+            </a:extLst>
+          </p:cNvPr>
+          <p:cNvPicPr>
+            <a:picLocks noChangeAspect="1"/>
+          </p:cNvPicPr>
+          <p:nvPr/>
+        </p:nvPicPr>
+        <p:blipFill>
+          <a:blip r:embed="rId4"/>
+          <a:stretch>
+            <a:fillRect/>
+          </a:stretch>
+        </p:blipFill>
+        <p:spPr>
+          <a:xfrm>
+            <a:off x="3566160" y="5419290"/>
+            <a:ext cx="2057400" cy="524720"/>
+          </a:xfrm>
+          <a:prstGeom prst="rect">
+            <a:avLst/>
+          </a:prstGeom>
+        </p:spPr>
+      </p:pic>
+      <p:pic>
+        <p:nvPicPr>
+          <p:cNvPr id="23" name="Image 2" descr="f1.png">
+            <a:extLst>
+              <a:ext uri="{FF2B5EF4-FFF2-40B4-BE49-F238E27FC236}">
+                <a16:creationId xmlns:a16="http://schemas.microsoft.com/office/drawing/2014/main" id="{77C28FFF-963B-31BC-EA2D-CAC2014126D5}"/>
+              </a:ext>
+            </a:extLst>
+          </p:cNvPr>
+          <p:cNvPicPr>
+            <a:picLocks noChangeAspect="1"/>
+          </p:cNvPicPr>
+          <p:nvPr/>
+        </p:nvPicPr>
+        <p:blipFill>
+          <a:blip r:embed="rId5"/>
+          <a:stretch>
+            <a:fillRect/>
+          </a:stretch>
+        </p:blipFill>
+        <p:spPr>
+          <a:xfrm>
+            <a:off x="3566160" y="6105090"/>
+            <a:ext cx="3017520" cy="573133"/>
+          </a:xfrm>
+          <a:prstGeom prst="rect">
+            <a:avLst/>
+          </a:prstGeom>
+        </p:spPr>
+      </p:pic>
     </p:spTree>
   </p:cSld>
   <p:clrMapOvr>
@@ -18496,7 +19038,7 @@
                 <a:ea typeface="Calibri" pitchFamily="34" charset="-122"/>
                 <a:cs typeface="Calibri" pitchFamily="34" charset="-120"/>
               </a:rPr>
-              <a:t>ROC-AUC: ranking quality across thresholds; 0.5 chance, 1.0 perfect — but optimistic under imbalance.</a:t>
+              <a:t>ROC-AUC: ranking quality across thresholds; 0.5 chance, 1.0 perfect: but it is optimistic under imbalance.</a:t>
             </a:r>
             <a:endParaRPr lang="en-US" sz="1500" dirty="0"/>
           </a:p>
@@ -18802,7 +19344,7 @@
                 <a:ea typeface="Calibri" pitchFamily="34" charset="-122"/>
                 <a:cs typeface="Calibri" pitchFamily="34" charset="-120"/>
               </a:rPr>
-              <a:t>A single train/validation split in a small cohort gives a noisy estimate — it depends on who landed where.</a:t>
+              <a:t>A single train/validation split in a small cohort gives a noisy estimate: it depends on who landed where.</a:t>
             </a:r>
             <a:endParaRPr lang="en-US" sz="1550" dirty="0"/>
           </a:p>
@@ -18865,7 +19407,26 @@
                 <a:ea typeface="Calibri" pitchFamily="34" charset="-122"/>
                 <a:cs typeface="Calibri" pitchFamily="34" charset="-120"/>
               </a:rPr>
-              <a:t>Still bound by Lecture 1’s rules: preprocessing and feature selection go inside each fold.</a:t>
+              <a:t>Remember: preprocessing and feature selection go inside each fold.</a:t>
+            </a:r>
+          </a:p>
+          <a:p>
+            <a:pPr marL="203200" indent="-203200">
+              <a:spcAft>
+                <a:spcPts val="1300"/>
+              </a:spcAft>
+              <a:buSzPct val="100000"/>
+              <a:buChar char="•"/>
+            </a:pPr>
+            <a:r>
+              <a:rPr lang="en-US" sz="1550" b="1" dirty="0">
+                <a:solidFill>
+                  <a:srgbClr val="0E7C86"/>
+                </a:solidFill>
+                <a:latin typeface="Calibri" pitchFamily="34" charset="0"/>
+                <a:cs typeface="Calibri" pitchFamily="34" charset="-120"/>
+              </a:rPr>
+              <a:t>Cross validation does not prevent overfitting: regularization does!</a:t>
             </a:r>
             <a:endParaRPr lang="en-US" sz="1550" dirty="0"/>
           </a:p>
@@ -20939,7 +21500,7 @@
                 <a:ea typeface="Calibri" pitchFamily="34" charset="-122"/>
                 <a:cs typeface="Calibri" pitchFamily="34" charset="-120"/>
               </a:rPr>
-              <a:t>The classic mistake: select genes on all data, then cross-validate — the CV score is already leaked.</a:t>
+              <a:t>The classic mistake: select genes on all data, then cross-validate: the CV score is already leaked.</a:t>
             </a:r>
             <a:endParaRPr lang="en-US" sz="1550" dirty="0"/>
           </a:p>
@@ -21327,7 +21888,7 @@
                 <a:ea typeface="Cambria" pitchFamily="34" charset="-122"/>
                 <a:cs typeface="Cambria" pitchFamily="34" charset="-120"/>
               </a:rPr>
-              <a:t>Overfitting — the core danger</a:t>
+              <a:t>Overfitting: the core danger</a:t>
             </a:r>
             <a:endParaRPr lang="en-US" sz="3000" dirty="0"/>
           </a:p>
@@ -21469,7 +22030,29 @@
                 <a:ea typeface="Calibri" pitchFamily="34" charset="-122"/>
                 <a:cs typeface="Calibri" pitchFamily="34" charset="-120"/>
               </a:rPr>
-              <a:t>In p ≫ n it is the default, not the exception — regularisation and honest validation are our defences.</a:t>
+              <a:t>In p ≫ n it is the default, not the exception: </a:t>
+            </a:r>
+            <a:r>
+              <a:rPr lang="en-US" sz="1600" dirty="0" err="1">
+                <a:solidFill>
+                  <a:srgbClr val="12262B"/>
+                </a:solidFill>
+                <a:latin typeface="Calibri" pitchFamily="34" charset="0"/>
+                <a:ea typeface="Calibri" pitchFamily="34" charset="-122"/>
+                <a:cs typeface="Calibri" pitchFamily="34" charset="-120"/>
+              </a:rPr>
+              <a:t>regularisation</a:t>
+            </a:r>
+            <a:r>
+              <a:rPr lang="en-US" sz="1600" dirty="0">
+                <a:solidFill>
+                  <a:srgbClr val="12262B"/>
+                </a:solidFill>
+                <a:latin typeface="Calibri" pitchFamily="34" charset="0"/>
+                <a:ea typeface="Calibri" pitchFamily="34" charset="-122"/>
+                <a:cs typeface="Calibri" pitchFamily="34" charset="-120"/>
+              </a:rPr>
+              <a:t> and honest validation are our defences.</a:t>
             </a:r>
             <a:endParaRPr lang="en-US" sz="1600" dirty="0"/>
           </a:p>
@@ -22028,7 +22611,7 @@
                 <a:ea typeface="Calibri" pitchFamily="34" charset="-122"/>
                 <a:cs typeface="Calibri" pitchFamily="34" charset="-120"/>
               </a:rPr>
-              <a:t>Coefficients rank genes by contribution — a starting point for biology.</a:t>
+              <a:t>Coefficients rank genes by contribution: a starting point for biology.</a:t>
             </a:r>
             <a:endParaRPr lang="en-US" sz="1550" dirty="0"/>
           </a:p>
@@ -24693,7 +25276,7 @@
               <a:buNone/>
             </a:pPr>
             <a:r>
-              <a:rPr lang="en-US" sz="1300" dirty="0">
+              <a:rPr lang="en-US" sz="1300" dirty="0" err="1">
                 <a:solidFill>
                   <a:srgbClr val="12262B"/>
                 </a:solidFill>
@@ -24701,7 +25284,18 @@
                 <a:ea typeface="Calibri" pitchFamily="34" charset="-122"/>
                 <a:cs typeface="Calibri" pitchFamily="34" charset="-120"/>
               </a:rPr>
-              <a:t>Recognise overfitting — the default in p ≫ n</a:t>
+              <a:t>Recognise</a:t>
+            </a:r>
+            <a:r>
+              <a:rPr lang="en-US" sz="1300" dirty="0">
+                <a:solidFill>
+                  <a:srgbClr val="12262B"/>
+                </a:solidFill>
+                <a:latin typeface="Calibri" pitchFamily="34" charset="0"/>
+                <a:ea typeface="Calibri" pitchFamily="34" charset="-122"/>
+                <a:cs typeface="Calibri" pitchFamily="34" charset="-120"/>
+              </a:rPr>
+              <a:t> overfitting: the default in p ≫ n</a:t>
             </a:r>
             <a:endParaRPr lang="en-US" sz="1300" dirty="0"/>
           </a:p>
@@ -25600,7 +26194,7 @@
                 <a:ea typeface="Calibri" pitchFamily="34" charset="-122"/>
                 <a:cs typeface="Calibri" pitchFamily="34" charset="-120"/>
               </a:rPr>
-              <a:t>The split from Lecture 1 wraps the whole thing: preprocessing and fitting are train-only.</a:t>
+              <a:t>Preprocessing and fitting must happen within train-only.</a:t>
             </a:r>
             <a:endParaRPr lang="en-US" sz="1500" dirty="0"/>
           </a:p>
@@ -25918,8 +26512,50 @@
               </a:rPr>
               <a:t>The recurring danger: a function flexible enough to memorise training patients.</a:t>
             </a:r>
+          </a:p>
+          <a:p>
+            <a:pPr marL="203200" indent="-203200">
+              <a:spcAft>
+                <a:spcPts val="1400"/>
+              </a:spcAft>
+              <a:buSzPct val="100000"/>
+              <a:buFontTx/>
+              <a:buChar char="•"/>
+            </a:pPr>
+            <a:r>
+              <a:rPr lang="en-US" sz="1600" b="1" dirty="0">
+                <a:solidFill>
+                  <a:srgbClr val="0E7C86"/>
+                </a:solidFill>
+                <a:latin typeface="Calibri" pitchFamily="34" charset="0"/>
+                <a:ea typeface="Calibri" pitchFamily="34" charset="-122"/>
+                <a:cs typeface="Calibri" pitchFamily="34" charset="-120"/>
+              </a:rPr>
+              <a:t>How to prevent overfitting: simple function, validation, </a:t>
+            </a:r>
+            <a:r>
+              <a:rPr lang="en-US" sz="1600" b="1" dirty="0" err="1">
+                <a:solidFill>
+                  <a:srgbClr val="0E7C86"/>
+                </a:solidFill>
+                <a:latin typeface="Calibri" pitchFamily="34" charset="0"/>
+                <a:ea typeface="Calibri" pitchFamily="34" charset="-122"/>
+                <a:cs typeface="Calibri" pitchFamily="34" charset="-120"/>
+              </a:rPr>
+              <a:t>regularisation</a:t>
+            </a:r>
             <a:endParaRPr lang="en-US" sz="1600" dirty="0"/>
           </a:p>
+          <a:p>
+            <a:pPr marL="203200" indent="-203200">
+              <a:spcAft>
+                <a:spcPts val="1400"/>
+              </a:spcAft>
+              <a:buSzPct val="100000"/>
+              <a:buChar char="•"/>
+            </a:pPr>
+            <a:endParaRPr lang="en-US" sz="1600" dirty="0"/>
+          </a:p>
         </p:txBody>
       </p:sp>
       <p:sp>
@@ -25930,7 +26566,7 @@
         </p:nvSpPr>
         <p:spPr>
           <a:xfrm>
-            <a:off x="6675120" y="2743200"/>
+            <a:off x="6711381" y="2204019"/>
             <a:ext cx="1554480" cy="1097280"/>
           </a:xfrm>
           <a:prstGeom prst="roundRect">
@@ -25959,7 +26595,7 @@
         </p:nvSpPr>
         <p:spPr>
           <a:xfrm>
-            <a:off x="6675120" y="2743200"/>
+            <a:off x="6711381" y="2204019"/>
             <a:ext cx="1554480" cy="1097280"/>
           </a:xfrm>
           <a:prstGeom prst="rect">
@@ -26015,7 +26651,7 @@
         </p:nvSpPr>
         <p:spPr>
           <a:xfrm>
-            <a:off x="8275320" y="3291840"/>
+            <a:off x="8311581" y="2752659"/>
             <a:ext cx="548640" cy="0"/>
           </a:xfrm>
           <a:prstGeom prst="line">
@@ -26039,7 +26675,7 @@
         </p:nvSpPr>
         <p:spPr>
           <a:xfrm>
-            <a:off x="8869680" y="2743200"/>
+            <a:off x="8905941" y="2204019"/>
             <a:ext cx="1280160" cy="1097280"/>
           </a:xfrm>
           <a:prstGeom prst="roundRect">
@@ -26068,7 +26704,7 @@
         </p:nvSpPr>
         <p:spPr>
           <a:xfrm>
-            <a:off x="8869680" y="2743200"/>
+            <a:off x="8905941" y="2204019"/>
             <a:ext cx="1280160" cy="1097280"/>
           </a:xfrm>
           <a:prstGeom prst="rect">
@@ -26107,7 +26743,7 @@
         </p:nvSpPr>
         <p:spPr>
           <a:xfrm>
-            <a:off x="10195560" y="3291840"/>
+            <a:off x="10231821" y="2752659"/>
             <a:ext cx="457200" cy="0"/>
           </a:xfrm>
           <a:prstGeom prst="line">
@@ -26131,7 +26767,7 @@
         </p:nvSpPr>
         <p:spPr>
           <a:xfrm>
-            <a:off x="10058400" y="3931920"/>
+            <a:off x="10454640" y="2507768"/>
             <a:ext cx="1737360" cy="457200"/>
           </a:xfrm>
           <a:prstGeom prst="rect">
@@ -26170,7 +26806,7 @@
         </p:nvSpPr>
         <p:spPr>
           <a:xfrm>
-            <a:off x="6675120" y="2331720"/>
+            <a:off x="6711381" y="1792539"/>
             <a:ext cx="3474720" cy="274320"/>
           </a:xfrm>
           <a:prstGeom prst="rect">
@@ -26576,7 +27212,7 @@
                 <a:ea typeface="Calibri" pitchFamily="34" charset="-122"/>
                 <a:cs typeface="Calibri" pitchFamily="34" charset="-120"/>
               </a:rPr>
-              <a:t>This binary label is a deliberate simplification of time-to-event data. It discards timing (an 11-month and a 110-month relapse look identical) and forces censoring decisions. That is fine for learning to build a baseline — we pay the debt back in Section 5 (research-grade ML) with a survival model that keeps the time axis.</a:t>
+              <a:t>This binary label is a deliberate simplification of time-to-event data. It discards timing (an 11-month and a 110-month relapse look identical) and forces censoring decisions. </a:t>
             </a:r>
             <a:endParaRPr lang="en-US" sz="1400" dirty="0"/>
           </a:p>
@@ -26808,7 +27444,7 @@
                 <a:ea typeface="Calibri" pitchFamily="34" charset="-122"/>
                 <a:cs typeface="Calibri" pitchFamily="34" charset="-120"/>
               </a:rPr>
-              <a:t>Raw expression isn’t model-ready: genes live on different scales; arrays carry technical variation.</a:t>
+              <a:t>Raw expression isn’t model-ready: genes live on different scales.</a:t>
             </a:r>
             <a:endParaRPr lang="en-US" sz="1600" dirty="0"/>
           </a:p>
@@ -26829,9 +27465,8 @@
                 <a:ea typeface="Calibri" pitchFamily="34" charset="-122"/>
                 <a:cs typeface="Calibri" pitchFamily="34" charset="-120"/>
               </a:rPr>
-              <a:t>A model can be misled by scale alone — a high-variance gene can dominate for non-biological reasons.</a:t>
-            </a:r>
-            <a:endParaRPr lang="en-US" sz="1600" dirty="0"/>
+              <a:t>A model can be misled by scale alone: a high-variance gene can dominate model optimization for no biological reason.</a:t>
+            </a:r>
           </a:p>
           <a:p>
             <a:pPr marL="203200" indent="-203200">
@@ -26850,9 +27485,8 @@
                 <a:ea typeface="Calibri" pitchFamily="34" charset="-122"/>
                 <a:cs typeface="Calibri" pitchFamily="34" charset="-120"/>
               </a:rPr>
-              <a:t>Preprocessing makes features comparable and well-behaved, without injecting outcome information.</a:t>
-            </a:r>
-            <a:endParaRPr lang="en-US" sz="1600" dirty="0"/>
+              <a:t>Different batches carry technical variation</a:t>
+            </a:r>
           </a:p>
           <a:p>
             <a:pPr marL="203200" indent="-203200">
@@ -26863,15 +27497,56 @@
               <a:buChar char="•"/>
             </a:pPr>
             <a:r>
-              <a:rPr lang="en-US" sz="1600" b="1" dirty="0">
-                <a:solidFill>
-                  <a:srgbClr val="0E7C86"/>
+              <a:rPr lang="en-US" sz="1600" dirty="0">
+                <a:solidFill>
+                  <a:srgbClr val="12262B"/>
+                </a:solidFill>
+                <a:latin typeface="Calibri" pitchFamily="34" charset="0"/>
+                <a:cs typeface="Calibri" pitchFamily="34" charset="-120"/>
+              </a:rPr>
+              <a:t>Missing values</a:t>
+            </a:r>
+            <a:endParaRPr lang="en-US" sz="1600" dirty="0"/>
+          </a:p>
+          <a:p>
+            <a:pPr marL="203200" indent="-203200">
+              <a:spcAft>
+                <a:spcPts val="1400"/>
+              </a:spcAft>
+              <a:buSzPct val="100000"/>
+              <a:buChar char="•"/>
+            </a:pPr>
+            <a:r>
+              <a:rPr lang="en-US" sz="1600" dirty="0">
+                <a:solidFill>
+                  <a:srgbClr val="12262B"/>
                 </a:solidFill>
                 <a:latin typeface="Calibri" pitchFamily="34" charset="0"/>
                 <a:ea typeface="Calibri" pitchFamily="34" charset="-122"/>
                 <a:cs typeface="Calibri" pitchFamily="34" charset="-120"/>
               </a:rPr>
-              <a:t>Golden rule (Lecture 1): every preprocessing statistic is learned on training data only.</a:t>
+              <a:t>Preprocessing makes features comparable and well-behaved, without injecting outcome information.</a:t>
+            </a:r>
+            <a:endParaRPr lang="en-US" sz="1600" dirty="0"/>
+          </a:p>
+          <a:p>
+            <a:pPr marL="203200" indent="-203200">
+              <a:spcAft>
+                <a:spcPts val="1400"/>
+              </a:spcAft>
+              <a:buSzPct val="100000"/>
+              <a:buChar char="•"/>
+            </a:pPr>
+            <a:r>
+              <a:rPr lang="en-US" sz="1600" b="1" dirty="0">
+                <a:solidFill>
+                  <a:srgbClr val="0E7C86"/>
+                </a:solidFill>
+                <a:latin typeface="Calibri" pitchFamily="34" charset="0"/>
+                <a:ea typeface="Calibri" pitchFamily="34" charset="-122"/>
+                <a:cs typeface="Calibri" pitchFamily="34" charset="-120"/>
+              </a:rPr>
+              <a:t>Every preprocessing statistic must be learned on training data only.</a:t>
             </a:r>
             <a:endParaRPr lang="en-US" sz="1600" dirty="0"/>
           </a:p>
@@ -27555,7 +28230,7 @@
                 <a:ea typeface="Cambria" pitchFamily="34" charset="-122"/>
                 <a:cs typeface="Cambria" pitchFamily="34" charset="-120"/>
               </a:rPr>
-              <a:t>Log transformation</a:t>
+              <a:t>Log transformation (or VST norm)</a:t>
             </a:r>
             <a:endParaRPr lang="en-US" sz="1500" dirty="0"/>
           </a:p>
@@ -27594,7 +28269,7 @@
                 <a:ea typeface="Calibri" pitchFamily="34" charset="-122"/>
                 <a:cs typeface="Calibri" pitchFamily="34" charset="-120"/>
               </a:rPr>
-              <a:t>Microarray intensities span orders of magnitude; log compresses the range and stabilises variance. Often already applied — check first.</a:t>
+              <a:t>Microarray intensities span orders of magnitude; log compresses the range and stabilises variance. REMEMBER: often already applied, check first.</a:t>
             </a:r>
             <a:endParaRPr lang="en-US" sz="1250" dirty="0"/>
           </a:p>
@@ -27765,7 +28440,7 @@
                 <a:ea typeface="Calibri" pitchFamily="34" charset="-122"/>
                 <a:cs typeface="Calibri" pitchFamily="34" charset="-120"/>
               </a:rPr>
-              <a:t>Centre and scale each gene so coefficients and penalties are comparable across genes.</a:t>
+              <a:t>Centre and scale each gene so coefficients and penalties are comparable across genes. WARNING: you lose relative information</a:t>
             </a:r>
             <a:endParaRPr lang="en-US" sz="1250" dirty="0"/>
           </a:p>
@@ -28404,7 +29079,26 @@
               </a:rPr>
               <a:t>A “pipeline” object enforces this for you — a habit, not an afterthought.</a:t>
             </a:r>
-            <a:endParaRPr lang="en-US" sz="1600" dirty="0"/>
+          </a:p>
+          <a:p>
+            <a:pPr marL="203200" indent="-203200">
+              <a:spcAft>
+                <a:spcPts val="1400"/>
+              </a:spcAft>
+              <a:buSzPct val="100000"/>
+              <a:buChar char="•"/>
+            </a:pPr>
+            <a:r>
+              <a:rPr lang="en-US" sz="1600" b="1" dirty="0">
+                <a:solidFill>
+                  <a:srgbClr val="0E7C86"/>
+                </a:solidFill>
+                <a:latin typeface="Calibri" pitchFamily="34" charset="0"/>
+                <a:ea typeface="Calibri" pitchFamily="34" charset="-122"/>
+                <a:cs typeface="Calibri" pitchFamily="34" charset="-120"/>
+              </a:rPr>
+              <a:t>Preprocessing steps that feels innocent, but contains data leakage: quantile normalization, filter low variance genes using all the samples!</a:t>
+            </a:r>
           </a:p>
         </p:txBody>
       </p:sp>

--- a/lessons/lesson02_baseline_model/theory/slides/Lecture2 - Building the First Predictive Model.pptx
+++ b/lessons/lesson02_baseline_model/theory/slides/Lecture2 - Building the First Predictive Model.pptx
@@ -3128,7 +3128,7 @@
           <a:p>
             <a:r>
               <a:rPr lang="en-US" dirty="0"/>
-              <a:t>1 min. Last lecture we refused to build a model; today we earn it. Warn them: the model takes ~10 minutes, the other 80 are about doing it trustworthily.</a:t>
+              <a:t>Goal: build first model; why baseline is important (good vs bad)</a:t>
             </a:r>
           </a:p>
         </p:txBody>
@@ -3215,7 +3215,15 @@
           <a:p>
             <a:r>
               <a:rPr lang="en-US" dirty="0"/>
-              <a:t>5 min. Outputs a probability 0-1, then thresholds. Linear boundary = weighted sum of genes. Coefficients: positive→recurrence, negative→no. Interpretable, fast, hard to overfit WHEN regularised. Show the curve, no equation.</a:t>
+              <a:t>Finally our first model -&gt; logistic regression, simplest and linear -&gt; 1 (describe sum -&gt; produce score -&gt; </a:t>
+            </a:r>
+            <a:r>
+              <a:rPr lang="en-US" dirty="0" err="1"/>
+              <a:t>simoid</a:t>
+            </a:r>
+            <a:r>
+              <a:rPr lang="en-US" dirty="0"/>
+              <a:t> function -&gt; probability) -&gt; 2 -&gt; 3 (describe high score, low score and close to zero) -&gt; 4 -&gt; 5 -&gt;6</a:t>
             </a:r>
           </a:p>
         </p:txBody>
@@ -3302,7 +3310,7 @@
           <a:p>
             <a:r>
               <a:rPr lang="en-US" dirty="0"/>
-              <a:t>4 min. Two genes -&gt; a line; thousands -&gt; a hyperplane we reason about. One side predicts recurrence, the other not; near the line, unsure. The 0.5 threshold is a CHOICE we can move (Part 5).</a:t>
+              <a:t>Geometrically logistic regression -&gt; 1 -&gt; describe plot -&gt; 2 -&gt; 3 -&gt; 4</a:t>
             </a:r>
           </a:p>
         </p:txBody>
@@ -3389,7 +3397,7 @@
           <a:p>
             <a:r>
               <a:rPr lang="en-US" dirty="0"/>
-              <a:t>4 min. Interpretable (coefficients map to genes), stable, fast, often competitive in p&gt;&gt;n. The baseline is the yardstick: a fancy model must beat a well-built LR to justify itself.</a:t>
+              <a:t>Title -&gt; 1 ( vs 1M params in deep learning or the trees) -&gt; 2 ( fast = lots of cross validation we can do easily, you will see) -&gt; 3 -&gt; 4</a:t>
             </a:r>
           </a:p>
         </p:txBody>
@@ -3476,7 +3484,15 @@
           <a:p>
             <a:r>
               <a:rPr lang="en-US" dirty="0"/>
-              <a:t>4 min. p&gt;&gt;n means plain LR can fit training perfectly and generalise terribly. Regularisation penalises large/numerous coefficients — reins in freedom. Intuition: simplest explanation consistent with the data.</a:t>
+              <a:t>What is regularization -&gt; title -&gt; 1 (in 20k dimension an hyperplane can look like a </a:t>
+            </a:r>
+            <a:r>
+              <a:rPr lang="en-US" dirty="0" err="1"/>
+              <a:t>squeeshy</a:t>
+            </a:r>
+            <a:r>
+              <a:rPr lang="en-US" dirty="0"/>
+              <a:t> line) -&gt; 2  -&gt; 3  -&gt; 4 -&gt; 5 (worse is exactly the point, tradeoff between tiny gain in train, but lack of generalizability)</a:t>
             </a:r>
           </a:p>
         </p:txBody>
@@ -3567,7 +3583,7 @@
             </a:pPr>
             <a:r>
               <a:rPr lang="en-US" dirty="0"/>
-              <a:t>(~4 min) First flavour: LASSO.</a:t>
+              <a:t>First is lasso regularization. It is also called a feature extraction method and we will see why briefly now and recall it tomorrow. </a:t>
             </a:r>
           </a:p>
           <a:p>
@@ -3577,71 +3593,7 @@
             </a:pPr>
             <a:r>
               <a:rPr lang="en-US" dirty="0"/>
-              <a:t>By what it does (not maths): as the penalty grows, many coefficients go to EXACTLY zero.</a:t>
-            </a:r>
-          </a:p>
-          <a:p>
-            <a:pPr marL="571500" lvl="1" indent="-285750">
-              <a:buFont typeface="Arial"/>
-              <a:buChar char="–"/>
-            </a:pPr>
-            <a:r>
-              <a:rPr lang="en-US" dirty="0"/>
-              <a:t>Read the figure: genes collapse onto the zero line and drop out → a small surviving panel.</a:t>
-            </a:r>
-          </a:p>
-          <a:p>
-            <a:pPr marL="285750" lvl="0" indent="-285750">
-              <a:buFont typeface="Arial"/>
-              <a:buChar char="•"/>
-            </a:pPr>
-            <a:r>
-              <a:rPr lang="en-US" dirty="0"/>
-              <a:t>So LASSO = automatic feature selection → a sparse, compact, interpretable gene list. Attractive for biomarker hunting.</a:t>
-            </a:r>
-          </a:p>
-          <a:p>
-            <a:pPr marL="285750" lvl="0" indent="-285750">
-              <a:buFont typeface="Arial"/>
-              <a:buChar char="•"/>
-            </a:pPr>
-            <a:r>
-              <a:rPr lang="en-US" dirty="0"/>
-              <a:t>Caveat (ties to 'signatures aren't unique'): with correlated genes it keeps ONE arbitrarily, zeros the rest → unstable panel under resampling.</a:t>
-            </a:r>
-          </a:p>
-          <a:p>
-            <a:pPr marL="285750" lvl="0" indent="-285750">
-              <a:buFont typeface="Arial"/>
-              <a:buChar char="•"/>
-            </a:pPr>
-            <a:r>
-              <a:rPr lang="en-US" b="1" dirty="0"/>
-              <a:t>Q: If LASSO gives a different 12-gene panel each resample, is it broken?</a:t>
-            </a:r>
-          </a:p>
-          <a:p>
-            <a:pPr marL="285750" lvl="0" indent="-285750">
-              <a:buFont typeface="Arial"/>
-              <a:buChar char="–"/>
-            </a:pPr>
-            <a:r>
-              <a:rPr lang="en-US" i="1" dirty="0">
-                <a:solidFill>
-                  <a:srgbClr val="C00000"/>
-                </a:solidFill>
-              </a:rPr>
-              <a:t>A: No — it's the p ≫ n non-uniqueness again. A property of the data, not a flaw. But: don't over-interpret the list.</a:t>
-            </a:r>
-          </a:p>
-          <a:p>
-            <a:pPr marL="285750" lvl="0" indent="-285750">
-              <a:buFont typeface="Arial"/>
-              <a:buChar char="•"/>
-            </a:pPr>
-            <a:r>
-              <a:rPr lang="en-US" dirty="0"/>
-              <a:t>Myth: LASSO's selected genes are 'the important genes'. No — they're A sufficient predictive set in this sample.</a:t>
+              <a:t>Describe the formula -&gt; 1 -&gt; plot -&gt; 2 -&gt; 3 -&gt; 4</a:t>
             </a:r>
           </a:p>
         </p:txBody>
@@ -3728,8 +3680,37 @@
           <a:p>
             <a:r>
               <a:rPr lang="en-US" dirty="0"/>
-              <a:t>4 min. Genes are correlated (pathways) — exactly LASSO's weak spot. Elastic Net keeps groups together → more stable signatures, answering 'signatures are not unique'. Default baseline: LR + Elastic Net.</a:t>
-            </a:r>
+              <a:t>How to deal with correlated genes? 1 -&gt; 2 -&gt; describe formula -&gt; 3 -&gt; 4 </a:t>
+            </a:r>
+          </a:p>
+          <a:p>
+            <a:endParaRPr lang="en-US" dirty="0"/>
+          </a:p>
+          <a:p>
+            <a:r>
+              <a:rPr lang="en-US" dirty="0"/>
+              <a:t>Why it keeps all genes? Because derivative of w^2 is w, meaning that when we are close to zero, lambda2 becomes negligible.</a:t>
+            </a:r>
+          </a:p>
+          <a:p>
+            <a:endParaRPr lang="en-US" dirty="0"/>
+          </a:p>
+          <a:p>
+            <a:r>
+              <a:rPr lang="en-US" dirty="0"/>
+              <a:t>Example: proliferation score is made of 5 genes -&gt; lasso keeps 1 -&gt; elastic net can keep all five. The drawback is that the </a:t>
+            </a:r>
+            <a:r>
+              <a:rPr lang="en-US" dirty="0" err="1"/>
+              <a:t>importancy</a:t>
+            </a:r>
+            <a:r>
+              <a:rPr lang="en-US" dirty="0"/>
+              <a:t> is split across genes.</a:t>
+            </a:r>
+          </a:p>
+          <a:p>
+            <a:endParaRPr lang="en-US" dirty="0"/>
           </a:p>
         </p:txBody>
       </p:sp>
@@ -3815,7 +3796,7 @@
           <a:p>
             <a:r>
               <a:rPr lang="en-US" dirty="0"/>
-              <a:t>4 min. Recurrence is a minority class; accuracy misleads. 'Always predict no-recurrence' scores high accuracy, zero recall. We need metrics that respect WHICH errors we make.</a:t>
+              <a:t>Evaluation: this is critical -&gt; it tells us when model is good or bad -&gt;title -&gt; describe accuracy -&gt; 1 -&gt; 2 -&gt; plot -&gt; 3</a:t>
             </a:r>
           </a:p>
         </p:txBody>
@@ -3902,7 +3883,7 @@
           <a:p>
             <a:r>
               <a:rPr lang="en-US" dirty="0"/>
-              <a:t>5 min. Precision = of predicted recurrences, how many real. Recall = of real recurrences, how many caught. F1 balances. Map to clinic: recall = not missing a relapser; precision = not over-flagging.</a:t>
+              <a:t>Solution -&gt; confusion matrix -&gt; describe the plot -&gt; 1 -&gt; 2 -&gt; 3 -&gt; 4 -&gt; 5 -&gt;6 -&gt; 7</a:t>
             </a:r>
           </a:p>
         </p:txBody>
@@ -3989,8 +3970,30 @@
           <a:p>
             <a:r>
               <a:rPr lang="en-US" dirty="0"/>
-              <a:t>5 min. ROC-AUC = ranking quality across thresholds, optimistic under imbalance. PR-AUC = precision vs recall, more informative when positives rare. ROC alone insufficient: can look fine while precision on the rare class is poor. Report both.</a:t>
-            </a:r>
+              <a:t>Two other metrics that are very used -&gt; it’s threshold independent. -&gt; 1 ROC (receiver operating characteristic). -&gt; probability of </a:t>
+            </a:r>
+            <a:r>
+              <a:rPr lang="en-US" dirty="0" err="1"/>
+              <a:t>recurrer</a:t>
+            </a:r>
+            <a:r>
+              <a:rPr lang="en-US" dirty="0"/>
+              <a:t> above not-</a:t>
+            </a:r>
+            <a:r>
+              <a:rPr lang="en-US" dirty="0" err="1"/>
+              <a:t>recurrer</a:t>
+            </a:r>
+            <a:r>
+              <a:rPr lang="en-US" dirty="0"/>
+              <a:t> -&gt; since it does not account for false negatives, it might be optimistic for imbalanced dataset (high rewards for getting real negative which is high abundant (it’s like accuracy) -&gt; 2. Since it depends both on false positive and false negative as you can see from formula -&gt; no bias for optimistic eval.</a:t>
+            </a:r>
+          </a:p>
+          <a:p>
+            <a:endParaRPr lang="en-US" dirty="0"/>
+          </a:p>
+          <a:p>
+            <a:endParaRPr lang="en-US" dirty="0"/>
           </a:p>
         </p:txBody>
       </p:sp>
@@ -4076,7 +4079,7 @@
           <a:p>
             <a:r>
               <a:rPr lang="en-US" dirty="0"/>
-              <a:t>4 min. A single split in a small cohort is a noisy ruler. CV rotates the held-out fold and averages → stable estimate + variability. Still bound by Lecture 1: preprocessing &amp; selection inside each fold.</a:t>
+              <a:t>Evaluation happens in the validation or test -&gt; 1 -&gt; 2 -&gt; describe the figure -&gt; 3 -&gt; 4 -&gt; 5</a:t>
             </a:r>
           </a:p>
         </p:txBody>
@@ -4163,7 +4166,7 @@
           <a:p>
             <a:r>
               <a:rPr lang="en-US" dirty="0"/>
-              <a:t>2 min. We have a clean, split, leak-aware METABRIC dataset with a binary recurrence label, known imbalance, discovered batch. We chose not to model last week. Now we do — every Lecture 1 safeguard still in force.</a:t>
+              <a:t>Describe 1.  2, 3 (using the workflow briefly described yesterday). 4</a:t>
             </a:r>
           </a:p>
         </p:txBody>
@@ -4250,7 +4253,7 @@
           <a:p>
             <a:r>
               <a:rPr lang="en-US" dirty="0"/>
-              <a:t>4 min. Classic mistake: select genes on all data, THEN cross-validate — CV score already leaked. Correct: whole pipeline refits inside each fold. Stratified folds; patient-level folds (Lecture 1).</a:t>
+              <a:t>Again we have this because p&gt;&gt;n; 1 -&gt; 2 -&gt; 3 -&gt; 4 -&gt; figure</a:t>
             </a:r>
           </a:p>
         </p:txBody>
@@ -4337,7 +4340,7 @@
           <a:p>
             <a:r>
               <a:rPr lang="en-US" dirty="0"/>
-              <a:t>5 min. Great on training, poor on new data — memorising patients, not biology. In p&gt;&gt;n it's the DEFAULT. Diagnose by comparing train vs val/test: a large gap is the signature.</a:t>
+              <a:t>Cross validation allows you to see overfitting. 1 -&gt; 2 -&gt; 3 -&gt; plot</a:t>
             </a:r>
           </a:p>
         </p:txBody>
@@ -4424,7 +4427,23 @@
           <a:p>
             <a:r>
               <a:rPr lang="en-US" dirty="0"/>
-              <a:t>4 min. Weaken regularisation: training rises monotonically; validation rises, peaks, then falls. The peak is the sweet spot; beyond it the model fits noise. The practical reproduces this on METABRIC.</a:t>
+              <a:t>Another way to see overfitting: performance metrics in </a:t>
+            </a:r>
+            <a:r>
+              <a:rPr lang="en-US" dirty="0" err="1"/>
+              <a:t>tran</a:t>
+            </a:r>
+            <a:r>
+              <a:rPr lang="en-US" dirty="0"/>
+              <a:t> and </a:t>
+            </a:r>
+            <a:r>
+              <a:rPr lang="en-US" dirty="0" err="1"/>
+              <a:t>val</a:t>
+            </a:r>
+            <a:r>
+              <a:rPr lang="en-US" dirty="0"/>
+              <a:t> when changing model complexity or regularization strength. 1 -&gt; 2 -&gt; figure -&gt; left underfit-&gt; right overfit-&gt; bias variance trade off</a:t>
             </a:r>
           </a:p>
         </p:txBody>
@@ -4511,7 +4530,15 @@
           <a:p>
             <a:r>
               <a:rPr lang="en-US" dirty="0"/>
-              <a:t>4 min. Coefficients rank genes — a starting point. But predictive ≠ causal; regularised coefficients are selected; read as hypotheses. Check plausibility &amp; stability across folds.</a:t>
+              <a:t>Now once you have the model, which is a </a:t>
+            </a:r>
+            <a:r>
+              <a:rPr lang="en-US" dirty="0" err="1"/>
+              <a:t>logistric</a:t>
+            </a:r>
+            <a:r>
+              <a:rPr lang="en-US" dirty="0"/>
+              <a:t> regression with regularization -&gt; interpretation -&gt; 1 -&gt; figure -&gt; starting point -&gt; 2 -&gt; 3 -&gt; 4 -&gt; if we do not account for the model biases such as random picking of correlated features, importance distribution etc..</a:t>
             </a:r>
           </a:p>
         </p:txBody>
@@ -4598,7 +4625,7 @@
           <a:p>
             <a:r>
               <a:rPr lang="en-US" dirty="0"/>
-              <a:t>3 min. A baseline is the standard later models are judged against; it exposes data problems early; if a simple validated model works, that's a result, not a disappointment.</a:t>
+              <a:t>The baseline model why is it important. -&gt; 1 -&gt; 2 -&gt; 3 -&gt; graph</a:t>
             </a:r>
           </a:p>
         </p:txBody>
@@ -4685,7 +4712,7 @@
           <a:p>
             <a:r>
               <a:rPr lang="en-US" dirty="0"/>
-              <a:t>2 min. Deliver the thesis. The pipeline, honest evaluation, and overfitting vigilance are what make the model trustworthy.</a:t>
+              <a:t>Main message -&gt; what makes it a good model </a:t>
             </a:r>
           </a:p>
         </p:txBody>
@@ -4772,8 +4799,13 @@
           <a:p>
             <a:r>
               <a:rPr lang="en-US" dirty="0"/>
-              <a:t>2 min. Tick objectives. Practical: load prepared METABRIC, preprocess in a pipeline, train regularised LR, evaluate with the right metrics, cross-validate honestly, compare train vs test, interpret coefficients. Next: feature engineering — smarter features, not a fancier model.</a:t>
-            </a:r>
+              <a:t>Recap and in </a:t>
+            </a:r>
+            <a:r>
+              <a:rPr lang="en-US"/>
+              <a:t>the practical</a:t>
+            </a:r>
+            <a:endParaRPr lang="en-US" dirty="0"/>
           </a:p>
         </p:txBody>
       </p:sp>
@@ -4859,7 +4891,7 @@
           <a:p>
             <a:r>
               <a:rPr lang="en-US" dirty="0"/>
-              <a:t>2 min. Checklist ticked as we go. Honest cross-validation and recognising overfitting are the items that separate a defensible baseline from a misleading one.</a:t>
+              <a:t>Describe the objectives. Which is the most difficult here in your opinion and the most critical part?</a:t>
             </a:r>
           </a:p>
         </p:txBody>
@@ -4946,7 +4978,7 @@
           <a:p>
             <a:r>
               <a:rPr lang="en-US" dirty="0"/>
-              <a:t>4 min. The model is one of five stages. Most attention goes to the model; most failures happen in preprocessing, evaluation, or the split. The Lecture 1 wall wraps the whole pipeline.</a:t>
+              <a:t>Title -&gt; description of the pipeline quickly -&gt; describe now the 4 points</a:t>
             </a:r>
           </a:p>
         </p:txBody>
@@ -5033,7 +5065,13 @@
           <a:p>
             <a:r>
               <a:rPr lang="en-US" dirty="0"/>
-              <a:t>3 min. A model is a function from features to a predicted probability; training chooses its parameters to fit the training data; prediction freezes it and applies to new patients. Danger: flexible enough to memorise.</a:t>
+              <a:t>Let’s start with training. Title -&gt; 1 -&gt; 2 -&gt; 3 -&gt; 4 -&gt;5 (we will cover these in this lecture)</a:t>
+            </a:r>
+          </a:p>
+          <a:p>
+            <a:r>
+              <a:rPr lang="en-US" dirty="0"/>
+              <a:t>Remember training does not mean finding the true function, it means finding a proxy that fits this particular sample. Whether it captures biology, we do not know until we interpret it and validate it using causal inference methods.</a:t>
             </a:r>
           </a:p>
         </p:txBody>
@@ -5120,8 +5158,13 @@
           <a:p>
             <a:r>
               <a:rPr lang="en-US" dirty="0"/>
-              <a:t>3 min. Input expression, output P(recurrence). Split discipline holds. Callback to Lecture 1: the binary label is a deliberate simplification of time-to-event data — fine for a baseline; revisit cost in Section 5. One line; don't teach survival analysis.</a:t>
-            </a:r>
+              <a:t>Title -&gt; 1 -&gt;2 -&gt;3 </a:t>
+            </a:r>
+            <a:r>
+              <a:rPr lang="en-US"/>
+              <a:t>-&gt; box</a:t>
+            </a:r>
+            <a:endParaRPr lang="en-US" dirty="0"/>
           </a:p>
         </p:txBody>
       </p:sp>
@@ -5207,7 +5250,7 @@
           <a:p>
             <a:r>
               <a:rPr lang="en-US" dirty="0"/>
-              <a:t>4 min. Genes live on different scales; arrays carry technical variation. A regularised linear model can be misled by scale alone. Preprocessing makes features comparable &amp; well-behaved. Golden rule: statistics learned on train only.</a:t>
+              <a:t>The very first step is data exploration which include preprocessing -&gt; title -&gt;  why not raw expression -&gt; 1 -&gt; 2 -&gt; 3 -&gt; 4 (e.g. different panels, different technologies, different version of gene annotation used for quantification) -&gt; 5 -&gt; comment the figure -&gt; 6</a:t>
             </a:r>
           </a:p>
         </p:txBody>
@@ -5294,8 +5337,39 @@
           <a:p>
             <a:r>
               <a:rPr lang="en-US" dirty="0"/>
-              <a:t>5 min. Log transform compresses dynamic range (often already applied — check). Per-gene z-score makes coefficients comparable. Scaling interacts with regularisation. Missing values imputed inside the split.</a:t>
-            </a:r>
+              <a:t>1</a:t>
+            </a:r>
+            <a:r>
+              <a:rPr lang="en-US" dirty="0">
+                <a:sym typeface="Wingdings" pitchFamily="2" charset="2"/>
+              </a:rPr>
+              <a:t> log makes </a:t>
+            </a:r>
+            <a:r>
+              <a:rPr lang="en-US" dirty="0" err="1">
+                <a:sym typeface="Wingdings" pitchFamily="2" charset="2"/>
+              </a:rPr>
+              <a:t>standisation</a:t>
+            </a:r>
+            <a:r>
+              <a:rPr lang="en-US" dirty="0">
+                <a:sym typeface="Wingdings" pitchFamily="2" charset="2"/>
+              </a:rPr>
+              <a:t> better if dynamic range is very wild -&gt; 2 -&gt; 3 (we will see this) -&gt; missing value imputation (because of different panels, for </a:t>
+            </a:r>
+            <a:r>
+              <a:rPr lang="en-US" dirty="0" err="1">
+                <a:sym typeface="Wingdings" pitchFamily="2" charset="2"/>
+              </a:rPr>
+              <a:t>RNAseq</a:t>
+            </a:r>
+            <a:r>
+              <a:rPr lang="en-US" dirty="0">
+                <a:sym typeface="Wingdings" pitchFamily="2" charset="2"/>
+              </a:rPr>
+              <a:t>, this can come from different gene annotation version)</a:t>
+            </a:r>
+            <a:endParaRPr lang="en-US" dirty="0"/>
           </a:p>
         </p:txBody>
       </p:sp>
@@ -5381,7 +5455,23 @@
           <a:p>
             <a:r>
               <a:rPr lang="en-US" dirty="0"/>
-              <a:t>4 min. Standardising the whole matrix pre-split = normalisation leakage. Global-mean imputation leaks. Selecting genes on all samples leaks. Fix: fit on train, apply to val/test. A pipeline object enforces this.</a:t>
+              <a:t>I keep repeating -&gt; title -&gt; 1 -&gt; 2 -&gt;3 -&gt; </a:t>
+            </a:r>
+            <a:r>
+              <a:rPr lang="en-US" dirty="0" err="1"/>
+              <a:t>sklearn</a:t>
+            </a:r>
+            <a:r>
+              <a:rPr lang="en-US" dirty="0"/>
+              <a:t> pipeline or </a:t>
+            </a:r>
+            <a:r>
+              <a:rPr lang="en-US" dirty="0" err="1"/>
+              <a:t>optuna</a:t>
+            </a:r>
+            <a:r>
+              <a:rPr lang="en-US" dirty="0"/>
+              <a:t> -&gt; 5 -&gt; box</a:t>
             </a:r>
           </a:p>
         </p:txBody>
@@ -5780,6 +5870,13 @@
           </a:solidFill>
           <a:ln/>
         </p:spPr>
+        <p:txBody>
+          <a:bodyPr/>
+          <a:lstStyle/>
+          <a:p>
+            <a:endParaRPr lang="en-IT"/>
+          </a:p>
+        </p:txBody>
       </p:sp>
       <p:sp>
         <p:nvSpPr>
@@ -5802,6 +5899,13 @@
           </a:solidFill>
           <a:ln/>
         </p:spPr>
+        <p:txBody>
+          <a:bodyPr/>
+          <a:lstStyle/>
+          <a:p>
+            <a:endParaRPr lang="en-IT"/>
+          </a:p>
+        </p:txBody>
       </p:sp>
       <p:sp>
         <p:nvSpPr>
@@ -5824,6 +5928,13 @@
           </a:solidFill>
           <a:ln/>
         </p:spPr>
+        <p:txBody>
+          <a:bodyPr/>
+          <a:lstStyle/>
+          <a:p>
+            <a:endParaRPr lang="en-IT"/>
+          </a:p>
+        </p:txBody>
       </p:sp>
       <p:sp>
         <p:nvSpPr>
@@ -5846,6 +5957,13 @@
           </a:solidFill>
           <a:ln/>
         </p:spPr>
+        <p:txBody>
+          <a:bodyPr/>
+          <a:lstStyle/>
+          <a:p>
+            <a:endParaRPr lang="en-IT"/>
+          </a:p>
+        </p:txBody>
       </p:sp>
       <p:sp>
         <p:nvSpPr>
@@ -5868,6 +5986,13 @@
           </a:solidFill>
           <a:ln/>
         </p:spPr>
+        <p:txBody>
+          <a:bodyPr/>
+          <a:lstStyle/>
+          <a:p>
+            <a:endParaRPr lang="en-IT"/>
+          </a:p>
+        </p:txBody>
       </p:sp>
       <p:sp>
         <p:nvSpPr>
@@ -5890,6 +6015,13 @@
           </a:solidFill>
           <a:ln/>
         </p:spPr>
+        <p:txBody>
+          <a:bodyPr/>
+          <a:lstStyle/>
+          <a:p>
+            <a:endParaRPr lang="en-IT"/>
+          </a:p>
+        </p:txBody>
       </p:sp>
       <p:sp>
         <p:nvSpPr>
@@ -5912,6 +6044,13 @@
           </a:solidFill>
           <a:ln/>
         </p:spPr>
+        <p:txBody>
+          <a:bodyPr/>
+          <a:lstStyle/>
+          <a:p>
+            <a:endParaRPr lang="en-IT"/>
+          </a:p>
+        </p:txBody>
       </p:sp>
       <p:sp>
         <p:nvSpPr>
@@ -5934,6 +6073,13 @@
           </a:solidFill>
           <a:ln/>
         </p:spPr>
+        <p:txBody>
+          <a:bodyPr/>
+          <a:lstStyle/>
+          <a:p>
+            <a:endParaRPr lang="en-IT"/>
+          </a:p>
+        </p:txBody>
       </p:sp>
       <p:sp>
         <p:nvSpPr>
@@ -5956,6 +6102,13 @@
           </a:solidFill>
           <a:ln/>
         </p:spPr>
+        <p:txBody>
+          <a:bodyPr/>
+          <a:lstStyle/>
+          <a:p>
+            <a:endParaRPr lang="en-IT"/>
+          </a:p>
+        </p:txBody>
       </p:sp>
       <p:sp>
         <p:nvSpPr>
@@ -5978,6 +6131,13 @@
           </a:solidFill>
           <a:ln/>
         </p:spPr>
+        <p:txBody>
+          <a:bodyPr/>
+          <a:lstStyle/>
+          <a:p>
+            <a:endParaRPr lang="en-IT"/>
+          </a:p>
+        </p:txBody>
       </p:sp>
       <p:sp>
         <p:nvSpPr>
@@ -6000,6 +6160,13 @@
           </a:solidFill>
           <a:ln/>
         </p:spPr>
+        <p:txBody>
+          <a:bodyPr/>
+          <a:lstStyle/>
+          <a:p>
+            <a:endParaRPr lang="en-IT"/>
+          </a:p>
+        </p:txBody>
       </p:sp>
       <p:sp>
         <p:nvSpPr>
@@ -6022,6 +6189,13 @@
           </a:solidFill>
           <a:ln/>
         </p:spPr>
+        <p:txBody>
+          <a:bodyPr/>
+          <a:lstStyle/>
+          <a:p>
+            <a:endParaRPr lang="en-IT"/>
+          </a:p>
+        </p:txBody>
       </p:sp>
       <p:sp>
         <p:nvSpPr>
@@ -6044,6 +6218,13 @@
           </a:solidFill>
           <a:ln/>
         </p:spPr>
+        <p:txBody>
+          <a:bodyPr/>
+          <a:lstStyle/>
+          <a:p>
+            <a:endParaRPr lang="en-IT"/>
+          </a:p>
+        </p:txBody>
       </p:sp>
       <p:sp>
         <p:nvSpPr>
@@ -6066,6 +6247,13 @@
           </a:solidFill>
           <a:ln/>
         </p:spPr>
+        <p:txBody>
+          <a:bodyPr/>
+          <a:lstStyle/>
+          <a:p>
+            <a:endParaRPr lang="en-IT"/>
+          </a:p>
+        </p:txBody>
       </p:sp>
       <p:sp>
         <p:nvSpPr>
@@ -6088,6 +6276,13 @@
           </a:solidFill>
           <a:ln/>
         </p:spPr>
+        <p:txBody>
+          <a:bodyPr/>
+          <a:lstStyle/>
+          <a:p>
+            <a:endParaRPr lang="en-IT"/>
+          </a:p>
+        </p:txBody>
       </p:sp>
       <p:sp>
         <p:nvSpPr>
@@ -6110,6 +6305,13 @@
           </a:solidFill>
           <a:ln/>
         </p:spPr>
+        <p:txBody>
+          <a:bodyPr/>
+          <a:lstStyle/>
+          <a:p>
+            <a:endParaRPr lang="en-IT"/>
+          </a:p>
+        </p:txBody>
       </p:sp>
       <p:sp>
         <p:nvSpPr>
@@ -6132,6 +6334,13 @@
           </a:solidFill>
           <a:ln/>
         </p:spPr>
+        <p:txBody>
+          <a:bodyPr/>
+          <a:lstStyle/>
+          <a:p>
+            <a:endParaRPr lang="en-IT"/>
+          </a:p>
+        </p:txBody>
       </p:sp>
       <p:sp>
         <p:nvSpPr>
@@ -6154,6 +6363,13 @@
           </a:solidFill>
           <a:ln/>
         </p:spPr>
+        <p:txBody>
+          <a:bodyPr/>
+          <a:lstStyle/>
+          <a:p>
+            <a:endParaRPr lang="en-IT"/>
+          </a:p>
+        </p:txBody>
       </p:sp>
       <p:sp>
         <p:nvSpPr>
@@ -6176,6 +6392,13 @@
           </a:solidFill>
           <a:ln/>
         </p:spPr>
+        <p:txBody>
+          <a:bodyPr/>
+          <a:lstStyle/>
+          <a:p>
+            <a:endParaRPr lang="en-IT"/>
+          </a:p>
+        </p:txBody>
       </p:sp>
       <p:sp>
         <p:nvSpPr>
@@ -6198,6 +6421,13 @@
           </a:solidFill>
           <a:ln/>
         </p:spPr>
+        <p:txBody>
+          <a:bodyPr/>
+          <a:lstStyle/>
+          <a:p>
+            <a:endParaRPr lang="en-IT"/>
+          </a:p>
+        </p:txBody>
       </p:sp>
       <p:sp>
         <p:nvSpPr>
@@ -6220,6 +6450,13 @@
           </a:solidFill>
           <a:ln/>
         </p:spPr>
+        <p:txBody>
+          <a:bodyPr/>
+          <a:lstStyle/>
+          <a:p>
+            <a:endParaRPr lang="en-IT"/>
+          </a:p>
+        </p:txBody>
       </p:sp>
       <p:sp>
         <p:nvSpPr>
@@ -6242,6 +6479,13 @@
           </a:solidFill>
           <a:ln/>
         </p:spPr>
+        <p:txBody>
+          <a:bodyPr/>
+          <a:lstStyle/>
+          <a:p>
+            <a:endParaRPr lang="en-IT"/>
+          </a:p>
+        </p:txBody>
       </p:sp>
       <p:sp>
         <p:nvSpPr>
@@ -6264,6 +6508,13 @@
           </a:solidFill>
           <a:ln/>
         </p:spPr>
+        <p:txBody>
+          <a:bodyPr/>
+          <a:lstStyle/>
+          <a:p>
+            <a:endParaRPr lang="en-IT"/>
+          </a:p>
+        </p:txBody>
       </p:sp>
       <p:sp>
         <p:nvSpPr>
@@ -6286,6 +6537,13 @@
           </a:solidFill>
           <a:ln/>
         </p:spPr>
+        <p:txBody>
+          <a:bodyPr/>
+          <a:lstStyle/>
+          <a:p>
+            <a:endParaRPr lang="en-IT"/>
+          </a:p>
+        </p:txBody>
       </p:sp>
       <p:sp>
         <p:nvSpPr>
@@ -6308,6 +6566,13 @@
           </a:solidFill>
           <a:ln/>
         </p:spPr>
+        <p:txBody>
+          <a:bodyPr/>
+          <a:lstStyle/>
+          <a:p>
+            <a:endParaRPr lang="en-IT"/>
+          </a:p>
+        </p:txBody>
       </p:sp>
       <p:sp>
         <p:nvSpPr>
@@ -6330,6 +6595,13 @@
           </a:solidFill>
           <a:ln/>
         </p:spPr>
+        <p:txBody>
+          <a:bodyPr/>
+          <a:lstStyle/>
+          <a:p>
+            <a:endParaRPr lang="en-IT"/>
+          </a:p>
+        </p:txBody>
       </p:sp>
       <p:sp>
         <p:nvSpPr>
@@ -6352,6 +6624,13 @@
           </a:solidFill>
           <a:ln/>
         </p:spPr>
+        <p:txBody>
+          <a:bodyPr/>
+          <a:lstStyle/>
+          <a:p>
+            <a:endParaRPr lang="en-IT"/>
+          </a:p>
+        </p:txBody>
       </p:sp>
       <p:sp>
         <p:nvSpPr>
@@ -6374,6 +6653,13 @@
           </a:solidFill>
           <a:ln/>
         </p:spPr>
+        <p:txBody>
+          <a:bodyPr/>
+          <a:lstStyle/>
+          <a:p>
+            <a:endParaRPr lang="en-IT"/>
+          </a:p>
+        </p:txBody>
       </p:sp>
       <p:sp>
         <p:nvSpPr>
@@ -6396,6 +6682,13 @@
           </a:solidFill>
           <a:ln/>
         </p:spPr>
+        <p:txBody>
+          <a:bodyPr/>
+          <a:lstStyle/>
+          <a:p>
+            <a:endParaRPr lang="en-IT"/>
+          </a:p>
+        </p:txBody>
       </p:sp>
       <p:sp>
         <p:nvSpPr>
@@ -6418,6 +6711,13 @@
           </a:solidFill>
           <a:ln/>
         </p:spPr>
+        <p:txBody>
+          <a:bodyPr/>
+          <a:lstStyle/>
+          <a:p>
+            <a:endParaRPr lang="en-IT"/>
+          </a:p>
+        </p:txBody>
       </p:sp>
       <p:sp>
         <p:nvSpPr>
@@ -6440,6 +6740,13 @@
           </a:solidFill>
           <a:ln/>
         </p:spPr>
+        <p:txBody>
+          <a:bodyPr/>
+          <a:lstStyle/>
+          <a:p>
+            <a:endParaRPr lang="en-IT"/>
+          </a:p>
+        </p:txBody>
       </p:sp>
       <p:sp>
         <p:nvSpPr>
@@ -6462,6 +6769,13 @@
           </a:solidFill>
           <a:ln/>
         </p:spPr>
+        <p:txBody>
+          <a:bodyPr/>
+          <a:lstStyle/>
+          <a:p>
+            <a:endParaRPr lang="en-IT"/>
+          </a:p>
+        </p:txBody>
       </p:sp>
       <p:sp>
         <p:nvSpPr>
@@ -6484,6 +6798,13 @@
           </a:solidFill>
           <a:ln/>
         </p:spPr>
+        <p:txBody>
+          <a:bodyPr/>
+          <a:lstStyle/>
+          <a:p>
+            <a:endParaRPr lang="en-IT"/>
+          </a:p>
+        </p:txBody>
       </p:sp>
       <p:sp>
         <p:nvSpPr>
@@ -6506,6 +6827,13 @@
           </a:solidFill>
           <a:ln/>
         </p:spPr>
+        <p:txBody>
+          <a:bodyPr/>
+          <a:lstStyle/>
+          <a:p>
+            <a:endParaRPr lang="en-IT"/>
+          </a:p>
+        </p:txBody>
       </p:sp>
       <p:sp>
         <p:nvSpPr>
@@ -6528,6 +6856,13 @@
           </a:solidFill>
           <a:ln/>
         </p:spPr>
+        <p:txBody>
+          <a:bodyPr/>
+          <a:lstStyle/>
+          <a:p>
+            <a:endParaRPr lang="en-IT"/>
+          </a:p>
+        </p:txBody>
       </p:sp>
       <p:sp>
         <p:nvSpPr>
@@ -6550,6 +6885,13 @@
           </a:solidFill>
           <a:ln/>
         </p:spPr>
+        <p:txBody>
+          <a:bodyPr/>
+          <a:lstStyle/>
+          <a:p>
+            <a:endParaRPr lang="en-IT"/>
+          </a:p>
+        </p:txBody>
       </p:sp>
       <p:sp>
         <p:nvSpPr>
@@ -6572,6 +6914,13 @@
           </a:solidFill>
           <a:ln/>
         </p:spPr>
+        <p:txBody>
+          <a:bodyPr/>
+          <a:lstStyle/>
+          <a:p>
+            <a:endParaRPr lang="en-IT"/>
+          </a:p>
+        </p:txBody>
       </p:sp>
       <p:sp>
         <p:nvSpPr>
@@ -6594,6 +6943,13 @@
           </a:solidFill>
           <a:ln/>
         </p:spPr>
+        <p:txBody>
+          <a:bodyPr/>
+          <a:lstStyle/>
+          <a:p>
+            <a:endParaRPr lang="en-IT"/>
+          </a:p>
+        </p:txBody>
       </p:sp>
       <p:sp>
         <p:nvSpPr>
@@ -6616,6 +6972,13 @@
           </a:solidFill>
           <a:ln/>
         </p:spPr>
+        <p:txBody>
+          <a:bodyPr/>
+          <a:lstStyle/>
+          <a:p>
+            <a:endParaRPr lang="en-IT"/>
+          </a:p>
+        </p:txBody>
       </p:sp>
       <p:sp>
         <p:nvSpPr>
@@ -6638,6 +7001,13 @@
           </a:solidFill>
           <a:ln/>
         </p:spPr>
+        <p:txBody>
+          <a:bodyPr/>
+          <a:lstStyle/>
+          <a:p>
+            <a:endParaRPr lang="en-IT"/>
+          </a:p>
+        </p:txBody>
       </p:sp>
       <p:sp>
         <p:nvSpPr>
@@ -6660,6 +7030,13 @@
           </a:solidFill>
           <a:ln/>
         </p:spPr>
+        <p:txBody>
+          <a:bodyPr/>
+          <a:lstStyle/>
+          <a:p>
+            <a:endParaRPr lang="en-IT"/>
+          </a:p>
+        </p:txBody>
       </p:sp>
       <p:sp>
         <p:nvSpPr>
@@ -6682,6 +7059,13 @@
           </a:solidFill>
           <a:ln/>
         </p:spPr>
+        <p:txBody>
+          <a:bodyPr/>
+          <a:lstStyle/>
+          <a:p>
+            <a:endParaRPr lang="en-IT"/>
+          </a:p>
+        </p:txBody>
       </p:sp>
       <p:sp>
         <p:nvSpPr>
@@ -6704,6 +7088,13 @@
           </a:solidFill>
           <a:ln/>
         </p:spPr>
+        <p:txBody>
+          <a:bodyPr/>
+          <a:lstStyle/>
+          <a:p>
+            <a:endParaRPr lang="en-IT"/>
+          </a:p>
+        </p:txBody>
       </p:sp>
       <p:sp>
         <p:nvSpPr>
@@ -6726,6 +7117,13 @@
           </a:solidFill>
           <a:ln/>
         </p:spPr>
+        <p:txBody>
+          <a:bodyPr/>
+          <a:lstStyle/>
+          <a:p>
+            <a:endParaRPr lang="en-IT"/>
+          </a:p>
+        </p:txBody>
       </p:sp>
       <p:sp>
         <p:nvSpPr>
@@ -6748,6 +7146,13 @@
           </a:solidFill>
           <a:ln/>
         </p:spPr>
+        <p:txBody>
+          <a:bodyPr/>
+          <a:lstStyle/>
+          <a:p>
+            <a:endParaRPr lang="en-IT"/>
+          </a:p>
+        </p:txBody>
       </p:sp>
       <p:sp>
         <p:nvSpPr>
@@ -6770,6 +7175,13 @@
           </a:solidFill>
           <a:ln/>
         </p:spPr>
+        <p:txBody>
+          <a:bodyPr/>
+          <a:lstStyle/>
+          <a:p>
+            <a:endParaRPr lang="en-IT"/>
+          </a:p>
+        </p:txBody>
       </p:sp>
       <p:sp>
         <p:nvSpPr>
@@ -6792,6 +7204,13 @@
           </a:solidFill>
           <a:ln/>
         </p:spPr>
+        <p:txBody>
+          <a:bodyPr/>
+          <a:lstStyle/>
+          <a:p>
+            <a:endParaRPr lang="en-IT"/>
+          </a:p>
+        </p:txBody>
       </p:sp>
       <p:sp>
         <p:nvSpPr>
@@ -6814,6 +7233,13 @@
           </a:solidFill>
           <a:ln/>
         </p:spPr>
+        <p:txBody>
+          <a:bodyPr/>
+          <a:lstStyle/>
+          <a:p>
+            <a:endParaRPr lang="en-IT"/>
+          </a:p>
+        </p:txBody>
       </p:sp>
       <p:sp>
         <p:nvSpPr>
@@ -6836,6 +7262,13 @@
           </a:solidFill>
           <a:ln/>
         </p:spPr>
+        <p:txBody>
+          <a:bodyPr/>
+          <a:lstStyle/>
+          <a:p>
+            <a:endParaRPr lang="en-IT"/>
+          </a:p>
+        </p:txBody>
       </p:sp>
       <p:sp>
         <p:nvSpPr>
@@ -6858,6 +7291,13 @@
           </a:solidFill>
           <a:ln/>
         </p:spPr>
+        <p:txBody>
+          <a:bodyPr/>
+          <a:lstStyle/>
+          <a:p>
+            <a:endParaRPr lang="en-IT"/>
+          </a:p>
+        </p:txBody>
       </p:sp>
       <p:sp>
         <p:nvSpPr>
@@ -6880,6 +7320,13 @@
           </a:solidFill>
           <a:ln/>
         </p:spPr>
+        <p:txBody>
+          <a:bodyPr/>
+          <a:lstStyle/>
+          <a:p>
+            <a:endParaRPr lang="en-IT"/>
+          </a:p>
+        </p:txBody>
       </p:sp>
       <p:sp>
         <p:nvSpPr>
@@ -6902,6 +7349,13 @@
           </a:solidFill>
           <a:ln/>
         </p:spPr>
+        <p:txBody>
+          <a:bodyPr/>
+          <a:lstStyle/>
+          <a:p>
+            <a:endParaRPr lang="en-IT"/>
+          </a:p>
+        </p:txBody>
       </p:sp>
       <p:sp>
         <p:nvSpPr>
@@ -6924,6 +7378,13 @@
           </a:solidFill>
           <a:ln/>
         </p:spPr>
+        <p:txBody>
+          <a:bodyPr/>
+          <a:lstStyle/>
+          <a:p>
+            <a:endParaRPr lang="en-IT"/>
+          </a:p>
+        </p:txBody>
       </p:sp>
       <p:sp>
         <p:nvSpPr>
@@ -6946,6 +7407,13 @@
           </a:solidFill>
           <a:ln/>
         </p:spPr>
+        <p:txBody>
+          <a:bodyPr/>
+          <a:lstStyle/>
+          <a:p>
+            <a:endParaRPr lang="en-IT"/>
+          </a:p>
+        </p:txBody>
       </p:sp>
       <p:sp>
         <p:nvSpPr>
@@ -6968,6 +7436,13 @@
           </a:solidFill>
           <a:ln/>
         </p:spPr>
+        <p:txBody>
+          <a:bodyPr/>
+          <a:lstStyle/>
+          <a:p>
+            <a:endParaRPr lang="en-IT"/>
+          </a:p>
+        </p:txBody>
       </p:sp>
       <p:sp>
         <p:nvSpPr>
@@ -6990,6 +7465,13 @@
           </a:solidFill>
           <a:ln/>
         </p:spPr>
+        <p:txBody>
+          <a:bodyPr/>
+          <a:lstStyle/>
+          <a:p>
+            <a:endParaRPr lang="en-IT"/>
+          </a:p>
+        </p:txBody>
       </p:sp>
       <p:sp>
         <p:nvSpPr>
@@ -7012,6 +7494,13 @@
           </a:solidFill>
           <a:ln/>
         </p:spPr>
+        <p:txBody>
+          <a:bodyPr/>
+          <a:lstStyle/>
+          <a:p>
+            <a:endParaRPr lang="en-IT"/>
+          </a:p>
+        </p:txBody>
       </p:sp>
       <p:sp>
         <p:nvSpPr>
@@ -7034,6 +7523,13 @@
           </a:solidFill>
           <a:ln/>
         </p:spPr>
+        <p:txBody>
+          <a:bodyPr/>
+          <a:lstStyle/>
+          <a:p>
+            <a:endParaRPr lang="en-IT"/>
+          </a:p>
+        </p:txBody>
       </p:sp>
       <p:sp>
         <p:nvSpPr>
@@ -7056,6 +7552,13 @@
           </a:solidFill>
           <a:ln/>
         </p:spPr>
+        <p:txBody>
+          <a:bodyPr/>
+          <a:lstStyle/>
+          <a:p>
+            <a:endParaRPr lang="en-IT"/>
+          </a:p>
+        </p:txBody>
       </p:sp>
       <p:sp>
         <p:nvSpPr>
@@ -7078,6 +7581,13 @@
           </a:solidFill>
           <a:ln/>
         </p:spPr>
+        <p:txBody>
+          <a:bodyPr/>
+          <a:lstStyle/>
+          <a:p>
+            <a:endParaRPr lang="en-IT"/>
+          </a:p>
+        </p:txBody>
       </p:sp>
       <p:sp>
         <p:nvSpPr>
@@ -7100,6 +7610,13 @@
           </a:solidFill>
           <a:ln/>
         </p:spPr>
+        <p:txBody>
+          <a:bodyPr/>
+          <a:lstStyle/>
+          <a:p>
+            <a:endParaRPr lang="en-IT"/>
+          </a:p>
+        </p:txBody>
       </p:sp>
       <p:sp>
         <p:nvSpPr>
@@ -7122,6 +7639,13 @@
           </a:solidFill>
           <a:ln/>
         </p:spPr>
+        <p:txBody>
+          <a:bodyPr/>
+          <a:lstStyle/>
+          <a:p>
+            <a:endParaRPr lang="en-IT"/>
+          </a:p>
+        </p:txBody>
       </p:sp>
       <p:sp>
         <p:nvSpPr>
@@ -7144,6 +7668,13 @@
           </a:solidFill>
           <a:ln/>
         </p:spPr>
+        <p:txBody>
+          <a:bodyPr/>
+          <a:lstStyle/>
+          <a:p>
+            <a:endParaRPr lang="en-IT"/>
+          </a:p>
+        </p:txBody>
       </p:sp>
       <p:sp>
         <p:nvSpPr>
@@ -7166,6 +7697,13 @@
           </a:solidFill>
           <a:ln/>
         </p:spPr>
+        <p:txBody>
+          <a:bodyPr/>
+          <a:lstStyle/>
+          <a:p>
+            <a:endParaRPr lang="en-IT"/>
+          </a:p>
+        </p:txBody>
       </p:sp>
       <p:sp>
         <p:nvSpPr>
@@ -7188,6 +7726,13 @@
           </a:solidFill>
           <a:ln/>
         </p:spPr>
+        <p:txBody>
+          <a:bodyPr/>
+          <a:lstStyle/>
+          <a:p>
+            <a:endParaRPr lang="en-IT"/>
+          </a:p>
+        </p:txBody>
       </p:sp>
       <p:sp>
         <p:nvSpPr>
@@ -7210,6 +7755,13 @@
           </a:solidFill>
           <a:ln/>
         </p:spPr>
+        <p:txBody>
+          <a:bodyPr/>
+          <a:lstStyle/>
+          <a:p>
+            <a:endParaRPr lang="en-IT"/>
+          </a:p>
+        </p:txBody>
       </p:sp>
       <p:sp>
         <p:nvSpPr>
@@ -7232,6 +7784,13 @@
           </a:solidFill>
           <a:ln/>
         </p:spPr>
+        <p:txBody>
+          <a:bodyPr/>
+          <a:lstStyle/>
+          <a:p>
+            <a:endParaRPr lang="en-IT"/>
+          </a:p>
+        </p:txBody>
       </p:sp>
       <p:sp>
         <p:nvSpPr>
@@ -7254,6 +7813,13 @@
           </a:solidFill>
           <a:ln/>
         </p:spPr>
+        <p:txBody>
+          <a:bodyPr/>
+          <a:lstStyle/>
+          <a:p>
+            <a:endParaRPr lang="en-IT"/>
+          </a:p>
+        </p:txBody>
       </p:sp>
       <p:sp>
         <p:nvSpPr>
@@ -7276,6 +7842,13 @@
           </a:solidFill>
           <a:ln/>
         </p:spPr>
+        <p:txBody>
+          <a:bodyPr/>
+          <a:lstStyle/>
+          <a:p>
+            <a:endParaRPr lang="en-IT"/>
+          </a:p>
+        </p:txBody>
       </p:sp>
       <p:sp>
         <p:nvSpPr>
@@ -7298,6 +7871,13 @@
           </a:solidFill>
           <a:ln/>
         </p:spPr>
+        <p:txBody>
+          <a:bodyPr/>
+          <a:lstStyle/>
+          <a:p>
+            <a:endParaRPr lang="en-IT"/>
+          </a:p>
+        </p:txBody>
       </p:sp>
       <p:sp>
         <p:nvSpPr>
@@ -7320,6 +7900,13 @@
           </a:solidFill>
           <a:ln/>
         </p:spPr>
+        <p:txBody>
+          <a:bodyPr/>
+          <a:lstStyle/>
+          <a:p>
+            <a:endParaRPr lang="en-IT"/>
+          </a:p>
+        </p:txBody>
       </p:sp>
       <p:sp>
         <p:nvSpPr>
@@ -7342,6 +7929,13 @@
           </a:solidFill>
           <a:ln/>
         </p:spPr>
+        <p:txBody>
+          <a:bodyPr/>
+          <a:lstStyle/>
+          <a:p>
+            <a:endParaRPr lang="en-IT"/>
+          </a:p>
+        </p:txBody>
       </p:sp>
       <p:sp>
         <p:nvSpPr>
@@ -7364,6 +7958,13 @@
           </a:solidFill>
           <a:ln/>
         </p:spPr>
+        <p:txBody>
+          <a:bodyPr/>
+          <a:lstStyle/>
+          <a:p>
+            <a:endParaRPr lang="en-IT"/>
+          </a:p>
+        </p:txBody>
       </p:sp>
       <p:sp>
         <p:nvSpPr>
@@ -7386,6 +7987,13 @@
           </a:solidFill>
           <a:ln/>
         </p:spPr>
+        <p:txBody>
+          <a:bodyPr/>
+          <a:lstStyle/>
+          <a:p>
+            <a:endParaRPr lang="en-IT"/>
+          </a:p>
+        </p:txBody>
       </p:sp>
       <p:sp>
         <p:nvSpPr>
@@ -7408,6 +8016,13 @@
           </a:solidFill>
           <a:ln/>
         </p:spPr>
+        <p:txBody>
+          <a:bodyPr/>
+          <a:lstStyle/>
+          <a:p>
+            <a:endParaRPr lang="en-IT"/>
+          </a:p>
+        </p:txBody>
       </p:sp>
       <p:sp>
         <p:nvSpPr>
@@ -7430,6 +8045,13 @@
           </a:solidFill>
           <a:ln/>
         </p:spPr>
+        <p:txBody>
+          <a:bodyPr/>
+          <a:lstStyle/>
+          <a:p>
+            <a:endParaRPr lang="en-IT"/>
+          </a:p>
+        </p:txBody>
       </p:sp>
       <p:sp>
         <p:nvSpPr>
@@ -7452,6 +8074,13 @@
           </a:solidFill>
           <a:ln/>
         </p:spPr>
+        <p:txBody>
+          <a:bodyPr/>
+          <a:lstStyle/>
+          <a:p>
+            <a:endParaRPr lang="en-IT"/>
+          </a:p>
+        </p:txBody>
       </p:sp>
       <p:sp>
         <p:nvSpPr>
@@ -7474,6 +8103,13 @@
           </a:solidFill>
           <a:ln/>
         </p:spPr>
+        <p:txBody>
+          <a:bodyPr/>
+          <a:lstStyle/>
+          <a:p>
+            <a:endParaRPr lang="en-IT"/>
+          </a:p>
+        </p:txBody>
       </p:sp>
       <p:sp>
         <p:nvSpPr>
@@ -7496,6 +8132,13 @@
           </a:solidFill>
           <a:ln/>
         </p:spPr>
+        <p:txBody>
+          <a:bodyPr/>
+          <a:lstStyle/>
+          <a:p>
+            <a:endParaRPr lang="en-IT"/>
+          </a:p>
+        </p:txBody>
       </p:sp>
       <p:sp>
         <p:nvSpPr>
@@ -7518,6 +8161,13 @@
           </a:solidFill>
           <a:ln/>
         </p:spPr>
+        <p:txBody>
+          <a:bodyPr/>
+          <a:lstStyle/>
+          <a:p>
+            <a:endParaRPr lang="en-IT"/>
+          </a:p>
+        </p:txBody>
       </p:sp>
       <p:sp>
         <p:nvSpPr>
@@ -7540,6 +8190,13 @@
           </a:solidFill>
           <a:ln/>
         </p:spPr>
+        <p:txBody>
+          <a:bodyPr/>
+          <a:lstStyle/>
+          <a:p>
+            <a:endParaRPr lang="en-IT"/>
+          </a:p>
+        </p:txBody>
       </p:sp>
       <p:sp>
         <p:nvSpPr>
@@ -7562,6 +8219,13 @@
           </a:solidFill>
           <a:ln/>
         </p:spPr>
+        <p:txBody>
+          <a:bodyPr/>
+          <a:lstStyle/>
+          <a:p>
+            <a:endParaRPr lang="en-IT"/>
+          </a:p>
+        </p:txBody>
       </p:sp>
       <p:sp>
         <p:nvSpPr>
@@ -7584,6 +8248,13 @@
           </a:solidFill>
           <a:ln/>
         </p:spPr>
+        <p:txBody>
+          <a:bodyPr/>
+          <a:lstStyle/>
+          <a:p>
+            <a:endParaRPr lang="en-IT"/>
+          </a:p>
+        </p:txBody>
       </p:sp>
       <p:sp>
         <p:nvSpPr>
@@ -7606,6 +8277,13 @@
           </a:solidFill>
           <a:ln/>
         </p:spPr>
+        <p:txBody>
+          <a:bodyPr/>
+          <a:lstStyle/>
+          <a:p>
+            <a:endParaRPr lang="en-IT"/>
+          </a:p>
+        </p:txBody>
       </p:sp>
       <p:sp>
         <p:nvSpPr>
@@ -7628,6 +8306,13 @@
           </a:solidFill>
           <a:ln/>
         </p:spPr>
+        <p:txBody>
+          <a:bodyPr/>
+          <a:lstStyle/>
+          <a:p>
+            <a:endParaRPr lang="en-IT"/>
+          </a:p>
+        </p:txBody>
       </p:sp>
       <p:sp>
         <p:nvSpPr>
@@ -7650,6 +8335,13 @@
           </a:solidFill>
           <a:ln/>
         </p:spPr>
+        <p:txBody>
+          <a:bodyPr/>
+          <a:lstStyle/>
+          <a:p>
+            <a:endParaRPr lang="en-IT"/>
+          </a:p>
+        </p:txBody>
       </p:sp>
       <p:sp>
         <p:nvSpPr>
@@ -7672,6 +8364,13 @@
           </a:solidFill>
           <a:ln/>
         </p:spPr>
+        <p:txBody>
+          <a:bodyPr/>
+          <a:lstStyle/>
+          <a:p>
+            <a:endParaRPr lang="en-IT"/>
+          </a:p>
+        </p:txBody>
       </p:sp>
       <p:sp>
         <p:nvSpPr>
@@ -7694,6 +8393,13 @@
           </a:solidFill>
           <a:ln/>
         </p:spPr>
+        <p:txBody>
+          <a:bodyPr/>
+          <a:lstStyle/>
+          <a:p>
+            <a:endParaRPr lang="en-IT"/>
+          </a:p>
+        </p:txBody>
       </p:sp>
       <p:sp>
         <p:nvSpPr>
@@ -7716,6 +8422,13 @@
           </a:solidFill>
           <a:ln/>
         </p:spPr>
+        <p:txBody>
+          <a:bodyPr/>
+          <a:lstStyle/>
+          <a:p>
+            <a:endParaRPr lang="en-IT"/>
+          </a:p>
+        </p:txBody>
       </p:sp>
       <p:sp>
         <p:nvSpPr>
@@ -7738,6 +8451,13 @@
           </a:solidFill>
           <a:ln/>
         </p:spPr>
+        <p:txBody>
+          <a:bodyPr/>
+          <a:lstStyle/>
+          <a:p>
+            <a:endParaRPr lang="en-IT"/>
+          </a:p>
+        </p:txBody>
       </p:sp>
       <p:sp>
         <p:nvSpPr>
@@ -7760,6 +8480,13 @@
           </a:solidFill>
           <a:ln/>
         </p:spPr>
+        <p:txBody>
+          <a:bodyPr/>
+          <a:lstStyle/>
+          <a:p>
+            <a:endParaRPr lang="en-IT"/>
+          </a:p>
+        </p:txBody>
       </p:sp>
       <p:sp>
         <p:nvSpPr>
@@ -7782,6 +8509,13 @@
           </a:solidFill>
           <a:ln/>
         </p:spPr>
+        <p:txBody>
+          <a:bodyPr/>
+          <a:lstStyle/>
+          <a:p>
+            <a:endParaRPr lang="en-IT"/>
+          </a:p>
+        </p:txBody>
       </p:sp>
       <p:sp>
         <p:nvSpPr>
@@ -7804,6 +8538,13 @@
           </a:solidFill>
           <a:ln/>
         </p:spPr>
+        <p:txBody>
+          <a:bodyPr/>
+          <a:lstStyle/>
+          <a:p>
+            <a:endParaRPr lang="en-IT"/>
+          </a:p>
+        </p:txBody>
       </p:sp>
       <p:sp>
         <p:nvSpPr>
@@ -7826,6 +8567,13 @@
           </a:solidFill>
           <a:ln/>
         </p:spPr>
+        <p:txBody>
+          <a:bodyPr/>
+          <a:lstStyle/>
+          <a:p>
+            <a:endParaRPr lang="en-IT"/>
+          </a:p>
+        </p:txBody>
       </p:sp>
       <p:sp>
         <p:nvSpPr>
@@ -7848,6 +8596,13 @@
           </a:solidFill>
           <a:ln/>
         </p:spPr>
+        <p:txBody>
+          <a:bodyPr/>
+          <a:lstStyle/>
+          <a:p>
+            <a:endParaRPr lang="en-IT"/>
+          </a:p>
+        </p:txBody>
       </p:sp>
       <p:sp>
         <p:nvSpPr>
@@ -7870,6 +8625,13 @@
           </a:solidFill>
           <a:ln/>
         </p:spPr>
+        <p:txBody>
+          <a:bodyPr/>
+          <a:lstStyle/>
+          <a:p>
+            <a:endParaRPr lang="en-IT"/>
+          </a:p>
+        </p:txBody>
       </p:sp>
       <p:sp>
         <p:nvSpPr>
@@ -7892,6 +8654,13 @@
           </a:solidFill>
           <a:ln/>
         </p:spPr>
+        <p:txBody>
+          <a:bodyPr/>
+          <a:lstStyle/>
+          <a:p>
+            <a:endParaRPr lang="en-IT"/>
+          </a:p>
+        </p:txBody>
       </p:sp>
       <p:sp>
         <p:nvSpPr>
@@ -7914,6 +8683,13 @@
           </a:solidFill>
           <a:ln/>
         </p:spPr>
+        <p:txBody>
+          <a:bodyPr/>
+          <a:lstStyle/>
+          <a:p>
+            <a:endParaRPr lang="en-IT"/>
+          </a:p>
+        </p:txBody>
       </p:sp>
       <p:sp>
         <p:nvSpPr>
@@ -7936,6 +8712,13 @@
           </a:solidFill>
           <a:ln/>
         </p:spPr>
+        <p:txBody>
+          <a:bodyPr/>
+          <a:lstStyle/>
+          <a:p>
+            <a:endParaRPr lang="en-IT"/>
+          </a:p>
+        </p:txBody>
       </p:sp>
       <p:sp>
         <p:nvSpPr>
@@ -7958,6 +8741,13 @@
           </a:solidFill>
           <a:ln/>
         </p:spPr>
+        <p:txBody>
+          <a:bodyPr/>
+          <a:lstStyle/>
+          <a:p>
+            <a:endParaRPr lang="en-IT"/>
+          </a:p>
+        </p:txBody>
       </p:sp>
       <p:sp>
         <p:nvSpPr>
@@ -7980,6 +8770,13 @@
           </a:solidFill>
           <a:ln/>
         </p:spPr>
+        <p:txBody>
+          <a:bodyPr/>
+          <a:lstStyle/>
+          <a:p>
+            <a:endParaRPr lang="en-IT"/>
+          </a:p>
+        </p:txBody>
       </p:sp>
       <p:sp>
         <p:nvSpPr>
@@ -8002,6 +8799,13 @@
           </a:solidFill>
           <a:ln/>
         </p:spPr>
+        <p:txBody>
+          <a:bodyPr/>
+          <a:lstStyle/>
+          <a:p>
+            <a:endParaRPr lang="en-IT"/>
+          </a:p>
+        </p:txBody>
       </p:sp>
       <p:sp>
         <p:nvSpPr>
@@ -8024,6 +8828,13 @@
           </a:solidFill>
           <a:ln/>
         </p:spPr>
+        <p:txBody>
+          <a:bodyPr/>
+          <a:lstStyle/>
+          <a:p>
+            <a:endParaRPr lang="en-IT"/>
+          </a:p>
+        </p:txBody>
       </p:sp>
       <p:sp>
         <p:nvSpPr>
@@ -8046,6 +8857,13 @@
           </a:solidFill>
           <a:ln/>
         </p:spPr>
+        <p:txBody>
+          <a:bodyPr/>
+          <a:lstStyle/>
+          <a:p>
+            <a:endParaRPr lang="en-IT"/>
+          </a:p>
+        </p:txBody>
       </p:sp>
       <p:sp>
         <p:nvSpPr>
@@ -8068,6 +8886,13 @@
           </a:solidFill>
           <a:ln/>
         </p:spPr>
+        <p:txBody>
+          <a:bodyPr/>
+          <a:lstStyle/>
+          <a:p>
+            <a:endParaRPr lang="en-IT"/>
+          </a:p>
+        </p:txBody>
       </p:sp>
       <p:sp>
         <p:nvSpPr>
@@ -8090,6 +8915,13 @@
           </a:solidFill>
           <a:ln/>
         </p:spPr>
+        <p:txBody>
+          <a:bodyPr/>
+          <a:lstStyle/>
+          <a:p>
+            <a:endParaRPr lang="en-IT"/>
+          </a:p>
+        </p:txBody>
       </p:sp>
       <p:sp>
         <p:nvSpPr>
@@ -8112,6 +8944,13 @@
           </a:solidFill>
           <a:ln/>
         </p:spPr>
+        <p:txBody>
+          <a:bodyPr/>
+          <a:lstStyle/>
+          <a:p>
+            <a:endParaRPr lang="en-IT"/>
+          </a:p>
+        </p:txBody>
       </p:sp>
       <p:sp>
         <p:nvSpPr>
@@ -8134,6 +8973,13 @@
           </a:solidFill>
           <a:ln/>
         </p:spPr>
+        <p:txBody>
+          <a:bodyPr/>
+          <a:lstStyle/>
+          <a:p>
+            <a:endParaRPr lang="en-IT"/>
+          </a:p>
+        </p:txBody>
       </p:sp>
       <p:sp>
         <p:nvSpPr>
@@ -8156,6 +9002,13 @@
           </a:solidFill>
           <a:ln/>
         </p:spPr>
+        <p:txBody>
+          <a:bodyPr/>
+          <a:lstStyle/>
+          <a:p>
+            <a:endParaRPr lang="en-IT"/>
+          </a:p>
+        </p:txBody>
       </p:sp>
       <p:sp>
         <p:nvSpPr>
@@ -8178,6 +9031,13 @@
           </a:solidFill>
           <a:ln/>
         </p:spPr>
+        <p:txBody>
+          <a:bodyPr/>
+          <a:lstStyle/>
+          <a:p>
+            <a:endParaRPr lang="en-IT"/>
+          </a:p>
+        </p:txBody>
       </p:sp>
       <p:sp>
         <p:nvSpPr>
@@ -8200,6 +9060,13 @@
           </a:solidFill>
           <a:ln/>
         </p:spPr>
+        <p:txBody>
+          <a:bodyPr/>
+          <a:lstStyle/>
+          <a:p>
+            <a:endParaRPr lang="en-IT"/>
+          </a:p>
+        </p:txBody>
       </p:sp>
       <p:sp>
         <p:nvSpPr>
@@ -8222,6 +9089,13 @@
           </a:solidFill>
           <a:ln/>
         </p:spPr>
+        <p:txBody>
+          <a:bodyPr/>
+          <a:lstStyle/>
+          <a:p>
+            <a:endParaRPr lang="en-IT"/>
+          </a:p>
+        </p:txBody>
       </p:sp>
       <p:sp>
         <p:nvSpPr>
@@ -8244,6 +9118,13 @@
           </a:solidFill>
           <a:ln/>
         </p:spPr>
+        <p:txBody>
+          <a:bodyPr/>
+          <a:lstStyle/>
+          <a:p>
+            <a:endParaRPr lang="en-IT"/>
+          </a:p>
+        </p:txBody>
       </p:sp>
       <p:sp>
         <p:nvSpPr>
@@ -8266,6 +9147,13 @@
           </a:solidFill>
           <a:ln/>
         </p:spPr>
+        <p:txBody>
+          <a:bodyPr/>
+          <a:lstStyle/>
+          <a:p>
+            <a:endParaRPr lang="en-IT"/>
+          </a:p>
+        </p:txBody>
       </p:sp>
       <p:sp>
         <p:nvSpPr>
@@ -8288,6 +9176,13 @@
           </a:solidFill>
           <a:ln/>
         </p:spPr>
+        <p:txBody>
+          <a:bodyPr/>
+          <a:lstStyle/>
+          <a:p>
+            <a:endParaRPr lang="en-IT"/>
+          </a:p>
+        </p:txBody>
       </p:sp>
       <p:sp>
         <p:nvSpPr>
@@ -8310,6 +9205,13 @@
           </a:solidFill>
           <a:ln/>
         </p:spPr>
+        <p:txBody>
+          <a:bodyPr/>
+          <a:lstStyle/>
+          <a:p>
+            <a:endParaRPr lang="en-IT"/>
+          </a:p>
+        </p:txBody>
       </p:sp>
       <p:sp>
         <p:nvSpPr>
@@ -8332,6 +9234,13 @@
           </a:solidFill>
           <a:ln/>
         </p:spPr>
+        <p:txBody>
+          <a:bodyPr/>
+          <a:lstStyle/>
+          <a:p>
+            <a:endParaRPr lang="en-IT"/>
+          </a:p>
+        </p:txBody>
       </p:sp>
       <p:sp>
         <p:nvSpPr>
@@ -8354,6 +9263,13 @@
           </a:solidFill>
           <a:ln/>
         </p:spPr>
+        <p:txBody>
+          <a:bodyPr/>
+          <a:lstStyle/>
+          <a:p>
+            <a:endParaRPr lang="en-IT"/>
+          </a:p>
+        </p:txBody>
       </p:sp>
       <p:sp>
         <p:nvSpPr>
@@ -8376,6 +9292,13 @@
           </a:solidFill>
           <a:ln/>
         </p:spPr>
+        <p:txBody>
+          <a:bodyPr/>
+          <a:lstStyle/>
+          <a:p>
+            <a:endParaRPr lang="en-IT"/>
+          </a:p>
+        </p:txBody>
       </p:sp>
       <p:sp>
         <p:nvSpPr>
@@ -8398,6 +9321,13 @@
           </a:solidFill>
           <a:ln/>
         </p:spPr>
+        <p:txBody>
+          <a:bodyPr/>
+          <a:lstStyle/>
+          <a:p>
+            <a:endParaRPr lang="en-IT"/>
+          </a:p>
+        </p:txBody>
       </p:sp>
       <p:sp>
         <p:nvSpPr>
@@ -8420,6 +9350,13 @@
           </a:solidFill>
           <a:ln/>
         </p:spPr>
+        <p:txBody>
+          <a:bodyPr/>
+          <a:lstStyle/>
+          <a:p>
+            <a:endParaRPr lang="en-IT"/>
+          </a:p>
+        </p:txBody>
       </p:sp>
       <p:sp>
         <p:nvSpPr>
@@ -8442,6 +9379,13 @@
           </a:solidFill>
           <a:ln/>
         </p:spPr>
+        <p:txBody>
+          <a:bodyPr/>
+          <a:lstStyle/>
+          <a:p>
+            <a:endParaRPr lang="en-IT"/>
+          </a:p>
+        </p:txBody>
       </p:sp>
       <p:sp>
         <p:nvSpPr>
@@ -8464,6 +9408,13 @@
           </a:solidFill>
           <a:ln/>
         </p:spPr>
+        <p:txBody>
+          <a:bodyPr/>
+          <a:lstStyle/>
+          <a:p>
+            <a:endParaRPr lang="en-IT"/>
+          </a:p>
+        </p:txBody>
       </p:sp>
       <p:sp>
         <p:nvSpPr>
@@ -8486,6 +9437,13 @@
           </a:solidFill>
           <a:ln/>
         </p:spPr>
+        <p:txBody>
+          <a:bodyPr/>
+          <a:lstStyle/>
+          <a:p>
+            <a:endParaRPr lang="en-IT"/>
+          </a:p>
+        </p:txBody>
       </p:sp>
       <p:sp>
         <p:nvSpPr>
@@ -8508,6 +9466,13 @@
           </a:solidFill>
           <a:ln/>
         </p:spPr>
+        <p:txBody>
+          <a:bodyPr/>
+          <a:lstStyle/>
+          <a:p>
+            <a:endParaRPr lang="en-IT"/>
+          </a:p>
+        </p:txBody>
       </p:sp>
       <p:sp>
         <p:nvSpPr>
@@ -8530,6 +9495,13 @@
           </a:solidFill>
           <a:ln/>
         </p:spPr>
+        <p:txBody>
+          <a:bodyPr/>
+          <a:lstStyle/>
+          <a:p>
+            <a:endParaRPr lang="en-IT"/>
+          </a:p>
+        </p:txBody>
       </p:sp>
       <p:sp>
         <p:nvSpPr>
@@ -8552,6 +9524,13 @@
           </a:solidFill>
           <a:ln/>
         </p:spPr>
+        <p:txBody>
+          <a:bodyPr/>
+          <a:lstStyle/>
+          <a:p>
+            <a:endParaRPr lang="en-IT"/>
+          </a:p>
+        </p:txBody>
       </p:sp>
       <p:sp>
         <p:nvSpPr>
@@ -8574,6 +9553,13 @@
           </a:solidFill>
           <a:ln/>
         </p:spPr>
+        <p:txBody>
+          <a:bodyPr/>
+          <a:lstStyle/>
+          <a:p>
+            <a:endParaRPr lang="en-IT"/>
+          </a:p>
+        </p:txBody>
       </p:sp>
       <p:sp>
         <p:nvSpPr>
@@ -8596,6 +9582,13 @@
           </a:solidFill>
           <a:ln/>
         </p:spPr>
+        <p:txBody>
+          <a:bodyPr/>
+          <a:lstStyle/>
+          <a:p>
+            <a:endParaRPr lang="en-IT"/>
+          </a:p>
+        </p:txBody>
       </p:sp>
       <p:sp>
         <p:nvSpPr>
@@ -8618,6 +9611,13 @@
           </a:solidFill>
           <a:ln/>
         </p:spPr>
+        <p:txBody>
+          <a:bodyPr/>
+          <a:lstStyle/>
+          <a:p>
+            <a:endParaRPr lang="en-IT"/>
+          </a:p>
+        </p:txBody>
       </p:sp>
       <p:sp>
         <p:nvSpPr>
@@ -8640,6 +9640,13 @@
           </a:solidFill>
           <a:ln/>
         </p:spPr>
+        <p:txBody>
+          <a:bodyPr/>
+          <a:lstStyle/>
+          <a:p>
+            <a:endParaRPr lang="en-IT"/>
+          </a:p>
+        </p:txBody>
       </p:sp>
       <p:sp>
         <p:nvSpPr>
@@ -8662,6 +9669,13 @@
           </a:solidFill>
           <a:ln/>
         </p:spPr>
+        <p:txBody>
+          <a:bodyPr/>
+          <a:lstStyle/>
+          <a:p>
+            <a:endParaRPr lang="en-IT"/>
+          </a:p>
+        </p:txBody>
       </p:sp>
       <p:sp>
         <p:nvSpPr>
@@ -8684,6 +9698,13 @@
           </a:solidFill>
           <a:ln/>
         </p:spPr>
+        <p:txBody>
+          <a:bodyPr/>
+          <a:lstStyle/>
+          <a:p>
+            <a:endParaRPr lang="en-IT"/>
+          </a:p>
+        </p:txBody>
       </p:sp>
       <p:sp>
         <p:nvSpPr>
@@ -8706,6 +9727,13 @@
           </a:solidFill>
           <a:ln/>
         </p:spPr>
+        <p:txBody>
+          <a:bodyPr/>
+          <a:lstStyle/>
+          <a:p>
+            <a:endParaRPr lang="en-IT"/>
+          </a:p>
+        </p:txBody>
       </p:sp>
       <p:sp>
         <p:nvSpPr>
@@ -8728,6 +9756,13 @@
           </a:solidFill>
           <a:ln/>
         </p:spPr>
+        <p:txBody>
+          <a:bodyPr/>
+          <a:lstStyle/>
+          <a:p>
+            <a:endParaRPr lang="en-IT"/>
+          </a:p>
+        </p:txBody>
       </p:sp>
       <p:sp>
         <p:nvSpPr>
@@ -8750,6 +9785,13 @@
           </a:solidFill>
           <a:ln/>
         </p:spPr>
+        <p:txBody>
+          <a:bodyPr/>
+          <a:lstStyle/>
+          <a:p>
+            <a:endParaRPr lang="en-IT"/>
+          </a:p>
+        </p:txBody>
       </p:sp>
       <p:sp>
         <p:nvSpPr>
@@ -8772,6 +9814,13 @@
           </a:solidFill>
           <a:ln/>
         </p:spPr>
+        <p:txBody>
+          <a:bodyPr/>
+          <a:lstStyle/>
+          <a:p>
+            <a:endParaRPr lang="en-IT"/>
+          </a:p>
+        </p:txBody>
       </p:sp>
       <p:sp>
         <p:nvSpPr>
@@ -8794,6 +9843,13 @@
           </a:solidFill>
           <a:ln/>
         </p:spPr>
+        <p:txBody>
+          <a:bodyPr/>
+          <a:lstStyle/>
+          <a:p>
+            <a:endParaRPr lang="en-IT"/>
+          </a:p>
+        </p:txBody>
       </p:sp>
       <p:sp>
         <p:nvSpPr>
@@ -8816,6 +9872,13 @@
           </a:solidFill>
           <a:ln/>
         </p:spPr>
+        <p:txBody>
+          <a:bodyPr/>
+          <a:lstStyle/>
+          <a:p>
+            <a:endParaRPr lang="en-IT"/>
+          </a:p>
+        </p:txBody>
       </p:sp>
       <p:sp>
         <p:nvSpPr>
@@ -8838,6 +9901,13 @@
           </a:solidFill>
           <a:ln/>
         </p:spPr>
+        <p:txBody>
+          <a:bodyPr/>
+          <a:lstStyle/>
+          <a:p>
+            <a:endParaRPr lang="en-IT"/>
+          </a:p>
+        </p:txBody>
       </p:sp>
       <p:sp>
         <p:nvSpPr>
@@ -8860,6 +9930,13 @@
           </a:solidFill>
           <a:ln/>
         </p:spPr>
+        <p:txBody>
+          <a:bodyPr/>
+          <a:lstStyle/>
+          <a:p>
+            <a:endParaRPr lang="en-IT"/>
+          </a:p>
+        </p:txBody>
       </p:sp>
       <p:sp>
         <p:nvSpPr>
@@ -8882,6 +9959,13 @@
           </a:solidFill>
           <a:ln/>
         </p:spPr>
+        <p:txBody>
+          <a:bodyPr/>
+          <a:lstStyle/>
+          <a:p>
+            <a:endParaRPr lang="en-IT"/>
+          </a:p>
+        </p:txBody>
       </p:sp>
       <p:sp>
         <p:nvSpPr>
@@ -8904,6 +9988,13 @@
           </a:solidFill>
           <a:ln/>
         </p:spPr>
+        <p:txBody>
+          <a:bodyPr/>
+          <a:lstStyle/>
+          <a:p>
+            <a:endParaRPr lang="en-IT"/>
+          </a:p>
+        </p:txBody>
       </p:sp>
       <p:sp>
         <p:nvSpPr>
@@ -8926,6 +10017,13 @@
           </a:solidFill>
           <a:ln/>
         </p:spPr>
+        <p:txBody>
+          <a:bodyPr/>
+          <a:lstStyle/>
+          <a:p>
+            <a:endParaRPr lang="en-IT"/>
+          </a:p>
+        </p:txBody>
       </p:sp>
       <p:sp>
         <p:nvSpPr>
@@ -8948,6 +10046,13 @@
           </a:solidFill>
           <a:ln/>
         </p:spPr>
+        <p:txBody>
+          <a:bodyPr/>
+          <a:lstStyle/>
+          <a:p>
+            <a:endParaRPr lang="en-IT"/>
+          </a:p>
+        </p:txBody>
       </p:sp>
       <p:sp>
         <p:nvSpPr>
@@ -8970,6 +10075,13 @@
           </a:solidFill>
           <a:ln/>
         </p:spPr>
+        <p:txBody>
+          <a:bodyPr/>
+          <a:lstStyle/>
+          <a:p>
+            <a:endParaRPr lang="en-IT"/>
+          </a:p>
+        </p:txBody>
       </p:sp>
       <p:sp>
         <p:nvSpPr>
@@ -8992,6 +10104,13 @@
           </a:solidFill>
           <a:ln/>
         </p:spPr>
+        <p:txBody>
+          <a:bodyPr/>
+          <a:lstStyle/>
+          <a:p>
+            <a:endParaRPr lang="en-IT"/>
+          </a:p>
+        </p:txBody>
       </p:sp>
       <p:sp>
         <p:nvSpPr>
@@ -9014,6 +10133,13 @@
           </a:solidFill>
           <a:ln/>
         </p:spPr>
+        <p:txBody>
+          <a:bodyPr/>
+          <a:lstStyle/>
+          <a:p>
+            <a:endParaRPr lang="en-IT"/>
+          </a:p>
+        </p:txBody>
       </p:sp>
       <p:sp>
         <p:nvSpPr>
@@ -9036,6 +10162,13 @@
           </a:solidFill>
           <a:ln/>
         </p:spPr>
+        <p:txBody>
+          <a:bodyPr/>
+          <a:lstStyle/>
+          <a:p>
+            <a:endParaRPr lang="en-IT"/>
+          </a:p>
+        </p:txBody>
       </p:sp>
       <p:sp>
         <p:nvSpPr>
@@ -9058,6 +10191,13 @@
           </a:solidFill>
           <a:ln/>
         </p:spPr>
+        <p:txBody>
+          <a:bodyPr/>
+          <a:lstStyle/>
+          <a:p>
+            <a:endParaRPr lang="en-IT"/>
+          </a:p>
+        </p:txBody>
       </p:sp>
       <p:sp>
         <p:nvSpPr>
@@ -9080,6 +10220,13 @@
           </a:solidFill>
           <a:ln/>
         </p:spPr>
+        <p:txBody>
+          <a:bodyPr/>
+          <a:lstStyle/>
+          <a:p>
+            <a:endParaRPr lang="en-IT"/>
+          </a:p>
+        </p:txBody>
       </p:sp>
       <p:sp>
         <p:nvSpPr>
@@ -9102,6 +10249,13 @@
           </a:solidFill>
           <a:ln/>
         </p:spPr>
+        <p:txBody>
+          <a:bodyPr/>
+          <a:lstStyle/>
+          <a:p>
+            <a:endParaRPr lang="en-IT"/>
+          </a:p>
+        </p:txBody>
       </p:sp>
       <p:sp>
         <p:nvSpPr>
@@ -9124,6 +10278,13 @@
           </a:solidFill>
           <a:ln/>
         </p:spPr>
+        <p:txBody>
+          <a:bodyPr/>
+          <a:lstStyle/>
+          <a:p>
+            <a:endParaRPr lang="en-IT"/>
+          </a:p>
+        </p:txBody>
       </p:sp>
       <p:sp>
         <p:nvSpPr>
@@ -9146,6 +10307,13 @@
           </a:solidFill>
           <a:ln/>
         </p:spPr>
+        <p:txBody>
+          <a:bodyPr/>
+          <a:lstStyle/>
+          <a:p>
+            <a:endParaRPr lang="en-IT"/>
+          </a:p>
+        </p:txBody>
       </p:sp>
       <p:sp>
         <p:nvSpPr>
@@ -9168,6 +10336,13 @@
           </a:solidFill>
           <a:ln/>
         </p:spPr>
+        <p:txBody>
+          <a:bodyPr/>
+          <a:lstStyle/>
+          <a:p>
+            <a:endParaRPr lang="en-IT"/>
+          </a:p>
+        </p:txBody>
       </p:sp>
       <p:sp>
         <p:nvSpPr>
@@ -9190,6 +10365,13 @@
           </a:solidFill>
           <a:ln/>
         </p:spPr>
+        <p:txBody>
+          <a:bodyPr/>
+          <a:lstStyle/>
+          <a:p>
+            <a:endParaRPr lang="en-IT"/>
+          </a:p>
+        </p:txBody>
       </p:sp>
       <p:sp>
         <p:nvSpPr>
@@ -9212,6 +10394,13 @@
           </a:solidFill>
           <a:ln/>
         </p:spPr>
+        <p:txBody>
+          <a:bodyPr/>
+          <a:lstStyle/>
+          <a:p>
+            <a:endParaRPr lang="en-IT"/>
+          </a:p>
+        </p:txBody>
       </p:sp>
       <p:sp>
         <p:nvSpPr>
@@ -9234,6 +10423,13 @@
           </a:solidFill>
           <a:ln/>
         </p:spPr>
+        <p:txBody>
+          <a:bodyPr/>
+          <a:lstStyle/>
+          <a:p>
+            <a:endParaRPr lang="en-IT"/>
+          </a:p>
+        </p:txBody>
       </p:sp>
       <p:sp>
         <p:nvSpPr>
@@ -9256,6 +10452,13 @@
           </a:solidFill>
           <a:ln/>
         </p:spPr>
+        <p:txBody>
+          <a:bodyPr/>
+          <a:lstStyle/>
+          <a:p>
+            <a:endParaRPr lang="en-IT"/>
+          </a:p>
+        </p:txBody>
       </p:sp>
       <p:sp>
         <p:nvSpPr>
@@ -9278,6 +10481,13 @@
           </a:solidFill>
           <a:ln/>
         </p:spPr>
+        <p:txBody>
+          <a:bodyPr/>
+          <a:lstStyle/>
+          <a:p>
+            <a:endParaRPr lang="en-IT"/>
+          </a:p>
+        </p:txBody>
       </p:sp>
       <p:sp>
         <p:nvSpPr>
@@ -9300,6 +10510,13 @@
           </a:solidFill>
           <a:ln/>
         </p:spPr>
+        <p:txBody>
+          <a:bodyPr/>
+          <a:lstStyle/>
+          <a:p>
+            <a:endParaRPr lang="en-IT"/>
+          </a:p>
+        </p:txBody>
       </p:sp>
       <p:sp>
         <p:nvSpPr>
@@ -9322,6 +10539,13 @@
           </a:solidFill>
           <a:ln/>
         </p:spPr>
+        <p:txBody>
+          <a:bodyPr/>
+          <a:lstStyle/>
+          <a:p>
+            <a:endParaRPr lang="en-IT"/>
+          </a:p>
+        </p:txBody>
       </p:sp>
       <p:sp>
         <p:nvSpPr>
@@ -9344,6 +10568,13 @@
           </a:solidFill>
           <a:ln/>
         </p:spPr>
+        <p:txBody>
+          <a:bodyPr/>
+          <a:lstStyle/>
+          <a:p>
+            <a:endParaRPr lang="en-IT"/>
+          </a:p>
+        </p:txBody>
       </p:sp>
       <p:sp>
         <p:nvSpPr>
@@ -9366,6 +10597,13 @@
           </a:solidFill>
           <a:ln/>
         </p:spPr>
+        <p:txBody>
+          <a:bodyPr/>
+          <a:lstStyle/>
+          <a:p>
+            <a:endParaRPr lang="en-IT"/>
+          </a:p>
+        </p:txBody>
       </p:sp>
       <p:sp>
         <p:nvSpPr>
@@ -9388,6 +10626,13 @@
           </a:solidFill>
           <a:ln/>
         </p:spPr>
+        <p:txBody>
+          <a:bodyPr/>
+          <a:lstStyle/>
+          <a:p>
+            <a:endParaRPr lang="en-IT"/>
+          </a:p>
+        </p:txBody>
       </p:sp>
       <p:sp>
         <p:nvSpPr>
@@ -9410,6 +10655,13 @@
           </a:solidFill>
           <a:ln/>
         </p:spPr>
+        <p:txBody>
+          <a:bodyPr/>
+          <a:lstStyle/>
+          <a:p>
+            <a:endParaRPr lang="en-IT"/>
+          </a:p>
+        </p:txBody>
       </p:sp>
       <p:sp>
         <p:nvSpPr>
@@ -9432,6 +10684,13 @@
           </a:solidFill>
           <a:ln/>
         </p:spPr>
+        <p:txBody>
+          <a:bodyPr/>
+          <a:lstStyle/>
+          <a:p>
+            <a:endParaRPr lang="en-IT"/>
+          </a:p>
+        </p:txBody>
       </p:sp>
       <p:sp>
         <p:nvSpPr>
@@ -9454,6 +10713,13 @@
           </a:solidFill>
           <a:ln/>
         </p:spPr>
+        <p:txBody>
+          <a:bodyPr/>
+          <a:lstStyle/>
+          <a:p>
+            <a:endParaRPr lang="en-IT"/>
+          </a:p>
+        </p:txBody>
       </p:sp>
       <p:sp>
         <p:nvSpPr>
@@ -9476,6 +10742,13 @@
           </a:solidFill>
           <a:ln/>
         </p:spPr>
+        <p:txBody>
+          <a:bodyPr/>
+          <a:lstStyle/>
+          <a:p>
+            <a:endParaRPr lang="en-IT"/>
+          </a:p>
+        </p:txBody>
       </p:sp>
       <p:sp>
         <p:nvSpPr>
@@ -9498,6 +10771,13 @@
           </a:solidFill>
           <a:ln/>
         </p:spPr>
+        <p:txBody>
+          <a:bodyPr/>
+          <a:lstStyle/>
+          <a:p>
+            <a:endParaRPr lang="en-IT"/>
+          </a:p>
+        </p:txBody>
       </p:sp>
       <p:sp>
         <p:nvSpPr>
@@ -9520,6 +10800,13 @@
           </a:solidFill>
           <a:ln/>
         </p:spPr>
+        <p:txBody>
+          <a:bodyPr/>
+          <a:lstStyle/>
+          <a:p>
+            <a:endParaRPr lang="en-IT"/>
+          </a:p>
+        </p:txBody>
       </p:sp>
       <p:sp>
         <p:nvSpPr>
@@ -9542,6 +10829,13 @@
           </a:solidFill>
           <a:ln/>
         </p:spPr>
+        <p:txBody>
+          <a:bodyPr/>
+          <a:lstStyle/>
+          <a:p>
+            <a:endParaRPr lang="en-IT"/>
+          </a:p>
+        </p:txBody>
       </p:sp>
       <p:sp>
         <p:nvSpPr>
@@ -9564,6 +10858,13 @@
           </a:solidFill>
           <a:ln/>
         </p:spPr>
+        <p:txBody>
+          <a:bodyPr/>
+          <a:lstStyle/>
+          <a:p>
+            <a:endParaRPr lang="en-IT"/>
+          </a:p>
+        </p:txBody>
       </p:sp>
       <p:sp>
         <p:nvSpPr>
@@ -9586,6 +10887,13 @@
           </a:solidFill>
           <a:ln/>
         </p:spPr>
+        <p:txBody>
+          <a:bodyPr/>
+          <a:lstStyle/>
+          <a:p>
+            <a:endParaRPr lang="en-IT"/>
+          </a:p>
+        </p:txBody>
       </p:sp>
       <p:sp>
         <p:nvSpPr>
@@ -9608,6 +10916,13 @@
           </a:solidFill>
           <a:ln/>
         </p:spPr>
+        <p:txBody>
+          <a:bodyPr/>
+          <a:lstStyle/>
+          <a:p>
+            <a:endParaRPr lang="en-IT"/>
+          </a:p>
+        </p:txBody>
       </p:sp>
       <p:sp>
         <p:nvSpPr>
@@ -9630,6 +10945,13 @@
           </a:solidFill>
           <a:ln/>
         </p:spPr>
+        <p:txBody>
+          <a:bodyPr/>
+          <a:lstStyle/>
+          <a:p>
+            <a:endParaRPr lang="en-IT"/>
+          </a:p>
+        </p:txBody>
       </p:sp>
       <p:sp>
         <p:nvSpPr>
@@ -9652,6 +10974,13 @@
           </a:solidFill>
           <a:ln/>
         </p:spPr>
+        <p:txBody>
+          <a:bodyPr/>
+          <a:lstStyle/>
+          <a:p>
+            <a:endParaRPr lang="en-IT"/>
+          </a:p>
+        </p:txBody>
       </p:sp>
       <p:sp>
         <p:nvSpPr>
@@ -9674,6 +11003,13 @@
           </a:solidFill>
           <a:ln/>
         </p:spPr>
+        <p:txBody>
+          <a:bodyPr/>
+          <a:lstStyle/>
+          <a:p>
+            <a:endParaRPr lang="en-IT"/>
+          </a:p>
+        </p:txBody>
       </p:sp>
       <p:sp>
         <p:nvSpPr>
@@ -9696,6 +11032,13 @@
           </a:solidFill>
           <a:ln/>
         </p:spPr>
+        <p:txBody>
+          <a:bodyPr/>
+          <a:lstStyle/>
+          <a:p>
+            <a:endParaRPr lang="en-IT"/>
+          </a:p>
+        </p:txBody>
       </p:sp>
       <p:sp>
         <p:nvSpPr>
@@ -9718,6 +11061,13 @@
           </a:solidFill>
           <a:ln/>
         </p:spPr>
+        <p:txBody>
+          <a:bodyPr/>
+          <a:lstStyle/>
+          <a:p>
+            <a:endParaRPr lang="en-IT"/>
+          </a:p>
+        </p:txBody>
       </p:sp>
       <p:sp>
         <p:nvSpPr>
@@ -9740,6 +11090,13 @@
           </a:solidFill>
           <a:ln/>
         </p:spPr>
+        <p:txBody>
+          <a:bodyPr/>
+          <a:lstStyle/>
+          <a:p>
+            <a:endParaRPr lang="en-IT"/>
+          </a:p>
+        </p:txBody>
       </p:sp>
       <p:sp>
         <p:nvSpPr>
@@ -9762,6 +11119,13 @@
           </a:solidFill>
           <a:ln/>
         </p:spPr>
+        <p:txBody>
+          <a:bodyPr/>
+          <a:lstStyle/>
+          <a:p>
+            <a:endParaRPr lang="en-IT"/>
+          </a:p>
+        </p:txBody>
       </p:sp>
       <p:sp>
         <p:nvSpPr>
@@ -9784,6 +11148,13 @@
           </a:solidFill>
           <a:ln/>
         </p:spPr>
+        <p:txBody>
+          <a:bodyPr/>
+          <a:lstStyle/>
+          <a:p>
+            <a:endParaRPr lang="en-IT"/>
+          </a:p>
+        </p:txBody>
       </p:sp>
       <p:sp>
         <p:nvSpPr>
@@ -9806,6 +11177,13 @@
           </a:solidFill>
           <a:ln/>
         </p:spPr>
+        <p:txBody>
+          <a:bodyPr/>
+          <a:lstStyle/>
+          <a:p>
+            <a:endParaRPr lang="en-IT"/>
+          </a:p>
+        </p:txBody>
       </p:sp>
       <p:sp>
         <p:nvSpPr>
@@ -9828,6 +11206,13 @@
           </a:solidFill>
           <a:ln/>
         </p:spPr>
+        <p:txBody>
+          <a:bodyPr/>
+          <a:lstStyle/>
+          <a:p>
+            <a:endParaRPr lang="en-IT"/>
+          </a:p>
+        </p:txBody>
       </p:sp>
       <p:sp>
         <p:nvSpPr>
@@ -9850,6 +11235,13 @@
           </a:solidFill>
           <a:ln/>
         </p:spPr>
+        <p:txBody>
+          <a:bodyPr/>
+          <a:lstStyle/>
+          <a:p>
+            <a:endParaRPr lang="en-IT"/>
+          </a:p>
+        </p:txBody>
       </p:sp>
       <p:sp>
         <p:nvSpPr>
@@ -9872,6 +11264,13 @@
           </a:solidFill>
           <a:ln/>
         </p:spPr>
+        <p:txBody>
+          <a:bodyPr/>
+          <a:lstStyle/>
+          <a:p>
+            <a:endParaRPr lang="en-IT"/>
+          </a:p>
+        </p:txBody>
       </p:sp>
       <p:sp>
         <p:nvSpPr>
@@ -9894,6 +11293,13 @@
           </a:solidFill>
           <a:ln/>
         </p:spPr>
+        <p:txBody>
+          <a:bodyPr/>
+          <a:lstStyle/>
+          <a:p>
+            <a:endParaRPr lang="en-IT"/>
+          </a:p>
+        </p:txBody>
       </p:sp>
       <p:sp>
         <p:nvSpPr>
@@ -9916,6 +11322,13 @@
           </a:solidFill>
           <a:ln/>
         </p:spPr>
+        <p:txBody>
+          <a:bodyPr/>
+          <a:lstStyle/>
+          <a:p>
+            <a:endParaRPr lang="en-IT"/>
+          </a:p>
+        </p:txBody>
       </p:sp>
       <p:sp>
         <p:nvSpPr>
@@ -9938,6 +11351,13 @@
           </a:solidFill>
           <a:ln/>
         </p:spPr>
+        <p:txBody>
+          <a:bodyPr/>
+          <a:lstStyle/>
+          <a:p>
+            <a:endParaRPr lang="en-IT"/>
+          </a:p>
+        </p:txBody>
       </p:sp>
       <p:sp>
         <p:nvSpPr>
@@ -9960,6 +11380,13 @@
           </a:solidFill>
           <a:ln/>
         </p:spPr>
+        <p:txBody>
+          <a:bodyPr/>
+          <a:lstStyle/>
+          <a:p>
+            <a:endParaRPr lang="en-IT"/>
+          </a:p>
+        </p:txBody>
       </p:sp>
       <p:sp>
         <p:nvSpPr>
@@ -9982,6 +11409,13 @@
           </a:solidFill>
           <a:ln/>
         </p:spPr>
+        <p:txBody>
+          <a:bodyPr/>
+          <a:lstStyle/>
+          <a:p>
+            <a:endParaRPr lang="en-IT"/>
+          </a:p>
+        </p:txBody>
       </p:sp>
       <p:sp>
         <p:nvSpPr>
@@ -10004,6 +11438,13 @@
           </a:solidFill>
           <a:ln/>
         </p:spPr>
+        <p:txBody>
+          <a:bodyPr/>
+          <a:lstStyle/>
+          <a:p>
+            <a:endParaRPr lang="en-IT"/>
+          </a:p>
+        </p:txBody>
       </p:sp>
       <p:sp>
         <p:nvSpPr>
@@ -10026,6 +11467,13 @@
           </a:solidFill>
           <a:ln/>
         </p:spPr>
+        <p:txBody>
+          <a:bodyPr/>
+          <a:lstStyle/>
+          <a:p>
+            <a:endParaRPr lang="en-IT"/>
+          </a:p>
+        </p:txBody>
       </p:sp>
       <p:sp>
         <p:nvSpPr>
@@ -10048,6 +11496,13 @@
           </a:solidFill>
           <a:ln/>
         </p:spPr>
+        <p:txBody>
+          <a:bodyPr/>
+          <a:lstStyle/>
+          <a:p>
+            <a:endParaRPr lang="en-IT"/>
+          </a:p>
+        </p:txBody>
       </p:sp>
       <p:sp>
         <p:nvSpPr>
@@ -10070,6 +11525,13 @@
           </a:solidFill>
           <a:ln/>
         </p:spPr>
+        <p:txBody>
+          <a:bodyPr/>
+          <a:lstStyle/>
+          <a:p>
+            <a:endParaRPr lang="en-IT"/>
+          </a:p>
+        </p:txBody>
       </p:sp>
       <p:sp>
         <p:nvSpPr>
@@ -10092,6 +11554,13 @@
           </a:solidFill>
           <a:ln/>
         </p:spPr>
+        <p:txBody>
+          <a:bodyPr/>
+          <a:lstStyle/>
+          <a:p>
+            <a:endParaRPr lang="en-IT"/>
+          </a:p>
+        </p:txBody>
       </p:sp>
       <p:sp>
         <p:nvSpPr>
@@ -10114,6 +11583,13 @@
           </a:solidFill>
           <a:ln/>
         </p:spPr>
+        <p:txBody>
+          <a:bodyPr/>
+          <a:lstStyle/>
+          <a:p>
+            <a:endParaRPr lang="en-IT"/>
+          </a:p>
+        </p:txBody>
       </p:sp>
       <p:sp>
         <p:nvSpPr>
@@ -10449,7 +11925,7 @@
                 <a:ea typeface="Cambria" pitchFamily="34" charset="-122"/>
                 <a:cs typeface="Cambria" pitchFamily="34" charset="-120"/>
               </a:rPr>
-              <a:t>Logistic Regression, conceptually</a:t>
+              <a:t>Logistic Regression</a:t>
             </a:r>
             <a:endParaRPr lang="en-US" sz="3000" dirty="0"/>
           </a:p>
@@ -11087,6 +12563,13 @@
             <a:prstDash val="solid"/>
           </a:ln>
         </p:spPr>
+        <p:txBody>
+          <a:bodyPr/>
+          <a:lstStyle/>
+          <a:p>
+            <a:endParaRPr lang="en-IT"/>
+          </a:p>
+        </p:txBody>
       </p:sp>
       <p:sp>
         <p:nvSpPr>
@@ -11110,6 +12593,13 @@
             <a:prstDash val="solid"/>
           </a:ln>
         </p:spPr>
+        <p:txBody>
+          <a:bodyPr/>
+          <a:lstStyle/>
+          <a:p>
+            <a:endParaRPr lang="en-IT"/>
+          </a:p>
+        </p:txBody>
       </p:sp>
       <p:sp>
         <p:nvSpPr>
@@ -11130,6 +12620,13 @@
           </a:solidFill>
           <a:ln/>
         </p:spPr>
+        <p:txBody>
+          <a:bodyPr/>
+          <a:lstStyle/>
+          <a:p>
+            <a:endParaRPr lang="en-IT"/>
+          </a:p>
+        </p:txBody>
       </p:sp>
       <p:sp>
         <p:nvSpPr>
@@ -11150,6 +12647,13 @@
           </a:solidFill>
           <a:ln/>
         </p:spPr>
+        <p:txBody>
+          <a:bodyPr/>
+          <a:lstStyle/>
+          <a:p>
+            <a:endParaRPr lang="en-IT"/>
+          </a:p>
+        </p:txBody>
       </p:sp>
       <p:sp>
         <p:nvSpPr>
@@ -11170,6 +12674,13 @@
           </a:solidFill>
           <a:ln/>
         </p:spPr>
+        <p:txBody>
+          <a:bodyPr/>
+          <a:lstStyle/>
+          <a:p>
+            <a:endParaRPr lang="en-IT"/>
+          </a:p>
+        </p:txBody>
       </p:sp>
       <p:sp>
         <p:nvSpPr>
@@ -11190,6 +12701,13 @@
           </a:solidFill>
           <a:ln/>
         </p:spPr>
+        <p:txBody>
+          <a:bodyPr/>
+          <a:lstStyle/>
+          <a:p>
+            <a:endParaRPr lang="en-IT"/>
+          </a:p>
+        </p:txBody>
       </p:sp>
       <p:sp>
         <p:nvSpPr>
@@ -11210,6 +12728,13 @@
           </a:solidFill>
           <a:ln/>
         </p:spPr>
+        <p:txBody>
+          <a:bodyPr/>
+          <a:lstStyle/>
+          <a:p>
+            <a:endParaRPr lang="en-IT"/>
+          </a:p>
+        </p:txBody>
       </p:sp>
       <p:sp>
         <p:nvSpPr>
@@ -11230,6 +12755,13 @@
           </a:solidFill>
           <a:ln/>
         </p:spPr>
+        <p:txBody>
+          <a:bodyPr/>
+          <a:lstStyle/>
+          <a:p>
+            <a:endParaRPr lang="en-IT"/>
+          </a:p>
+        </p:txBody>
       </p:sp>
       <p:sp>
         <p:nvSpPr>
@@ -11250,6 +12782,13 @@
           </a:solidFill>
           <a:ln/>
         </p:spPr>
+        <p:txBody>
+          <a:bodyPr/>
+          <a:lstStyle/>
+          <a:p>
+            <a:endParaRPr lang="en-IT"/>
+          </a:p>
+        </p:txBody>
       </p:sp>
       <p:sp>
         <p:nvSpPr>
@@ -11270,6 +12809,13 @@
           </a:solidFill>
           <a:ln/>
         </p:spPr>
+        <p:txBody>
+          <a:bodyPr/>
+          <a:lstStyle/>
+          <a:p>
+            <a:endParaRPr lang="en-IT"/>
+          </a:p>
+        </p:txBody>
       </p:sp>
       <p:sp>
         <p:nvSpPr>
@@ -11290,6 +12836,13 @@
           </a:solidFill>
           <a:ln/>
         </p:spPr>
+        <p:txBody>
+          <a:bodyPr/>
+          <a:lstStyle/>
+          <a:p>
+            <a:endParaRPr lang="en-IT"/>
+          </a:p>
+        </p:txBody>
       </p:sp>
       <p:sp>
         <p:nvSpPr>
@@ -11310,6 +12863,13 @@
           </a:solidFill>
           <a:ln/>
         </p:spPr>
+        <p:txBody>
+          <a:bodyPr/>
+          <a:lstStyle/>
+          <a:p>
+            <a:endParaRPr lang="en-IT"/>
+          </a:p>
+        </p:txBody>
       </p:sp>
       <p:sp>
         <p:nvSpPr>
@@ -11330,6 +12890,13 @@
           </a:solidFill>
           <a:ln/>
         </p:spPr>
+        <p:txBody>
+          <a:bodyPr/>
+          <a:lstStyle/>
+          <a:p>
+            <a:endParaRPr lang="en-IT"/>
+          </a:p>
+        </p:txBody>
       </p:sp>
       <p:sp>
         <p:nvSpPr>
@@ -11350,6 +12917,13 @@
           </a:solidFill>
           <a:ln/>
         </p:spPr>
+        <p:txBody>
+          <a:bodyPr/>
+          <a:lstStyle/>
+          <a:p>
+            <a:endParaRPr lang="en-IT"/>
+          </a:p>
+        </p:txBody>
       </p:sp>
       <p:sp>
         <p:nvSpPr>
@@ -11370,6 +12944,13 @@
           </a:solidFill>
           <a:ln/>
         </p:spPr>
+        <p:txBody>
+          <a:bodyPr/>
+          <a:lstStyle/>
+          <a:p>
+            <a:endParaRPr lang="en-IT"/>
+          </a:p>
+        </p:txBody>
       </p:sp>
       <p:sp>
         <p:nvSpPr>
@@ -11390,6 +12971,13 @@
           </a:solidFill>
           <a:ln/>
         </p:spPr>
+        <p:txBody>
+          <a:bodyPr/>
+          <a:lstStyle/>
+          <a:p>
+            <a:endParaRPr lang="en-IT"/>
+          </a:p>
+        </p:txBody>
       </p:sp>
       <p:sp>
         <p:nvSpPr>
@@ -11410,6 +12998,13 @@
           </a:solidFill>
           <a:ln/>
         </p:spPr>
+        <p:txBody>
+          <a:bodyPr/>
+          <a:lstStyle/>
+          <a:p>
+            <a:endParaRPr lang="en-IT"/>
+          </a:p>
+        </p:txBody>
       </p:sp>
       <p:sp>
         <p:nvSpPr>
@@ -11430,6 +13025,13 @@
           </a:solidFill>
           <a:ln/>
         </p:spPr>
+        <p:txBody>
+          <a:bodyPr/>
+          <a:lstStyle/>
+          <a:p>
+            <a:endParaRPr lang="en-IT"/>
+          </a:p>
+        </p:txBody>
       </p:sp>
       <p:sp>
         <p:nvSpPr>
@@ -11450,6 +13052,13 @@
           </a:solidFill>
           <a:ln/>
         </p:spPr>
+        <p:txBody>
+          <a:bodyPr/>
+          <a:lstStyle/>
+          <a:p>
+            <a:endParaRPr lang="en-IT"/>
+          </a:p>
+        </p:txBody>
       </p:sp>
       <p:sp>
         <p:nvSpPr>
@@ -11470,6 +13079,13 @@
           </a:solidFill>
           <a:ln/>
         </p:spPr>
+        <p:txBody>
+          <a:bodyPr/>
+          <a:lstStyle/>
+          <a:p>
+            <a:endParaRPr lang="en-IT"/>
+          </a:p>
+        </p:txBody>
       </p:sp>
       <p:sp>
         <p:nvSpPr>
@@ -11490,6 +13106,13 @@
           </a:solidFill>
           <a:ln/>
         </p:spPr>
+        <p:txBody>
+          <a:bodyPr/>
+          <a:lstStyle/>
+          <a:p>
+            <a:endParaRPr lang="en-IT"/>
+          </a:p>
+        </p:txBody>
       </p:sp>
       <p:sp>
         <p:nvSpPr>
@@ -11510,6 +13133,13 @@
           </a:solidFill>
           <a:ln/>
         </p:spPr>
+        <p:txBody>
+          <a:bodyPr/>
+          <a:lstStyle/>
+          <a:p>
+            <a:endParaRPr lang="en-IT"/>
+          </a:p>
+        </p:txBody>
       </p:sp>
       <p:sp>
         <p:nvSpPr>
@@ -11530,6 +13160,13 @@
           </a:solidFill>
           <a:ln/>
         </p:spPr>
+        <p:txBody>
+          <a:bodyPr/>
+          <a:lstStyle/>
+          <a:p>
+            <a:endParaRPr lang="en-IT"/>
+          </a:p>
+        </p:txBody>
       </p:sp>
       <p:sp>
         <p:nvSpPr>
@@ -11550,6 +13187,13 @@
           </a:solidFill>
           <a:ln/>
         </p:spPr>
+        <p:txBody>
+          <a:bodyPr/>
+          <a:lstStyle/>
+          <a:p>
+            <a:endParaRPr lang="en-IT"/>
+          </a:p>
+        </p:txBody>
       </p:sp>
       <p:sp>
         <p:nvSpPr>
@@ -11570,6 +13214,13 @@
           </a:solidFill>
           <a:ln/>
         </p:spPr>
+        <p:txBody>
+          <a:bodyPr/>
+          <a:lstStyle/>
+          <a:p>
+            <a:endParaRPr lang="en-IT"/>
+          </a:p>
+        </p:txBody>
       </p:sp>
       <p:sp>
         <p:nvSpPr>
@@ -11590,6 +13241,13 @@
           </a:solidFill>
           <a:ln/>
         </p:spPr>
+        <p:txBody>
+          <a:bodyPr/>
+          <a:lstStyle/>
+          <a:p>
+            <a:endParaRPr lang="en-IT"/>
+          </a:p>
+        </p:txBody>
       </p:sp>
       <p:sp>
         <p:nvSpPr>
@@ -11610,6 +13268,13 @@
           </a:solidFill>
           <a:ln/>
         </p:spPr>
+        <p:txBody>
+          <a:bodyPr/>
+          <a:lstStyle/>
+          <a:p>
+            <a:endParaRPr lang="en-IT"/>
+          </a:p>
+        </p:txBody>
       </p:sp>
       <p:sp>
         <p:nvSpPr>
@@ -11630,6 +13295,13 @@
           </a:solidFill>
           <a:ln/>
         </p:spPr>
+        <p:txBody>
+          <a:bodyPr/>
+          <a:lstStyle/>
+          <a:p>
+            <a:endParaRPr lang="en-IT"/>
+          </a:p>
+        </p:txBody>
       </p:sp>
       <p:sp>
         <p:nvSpPr>
@@ -11650,6 +13322,13 @@
           </a:solidFill>
           <a:ln/>
         </p:spPr>
+        <p:txBody>
+          <a:bodyPr/>
+          <a:lstStyle/>
+          <a:p>
+            <a:endParaRPr lang="en-IT"/>
+          </a:p>
+        </p:txBody>
       </p:sp>
       <p:sp>
         <p:nvSpPr>
@@ -11670,6 +13349,13 @@
           </a:solidFill>
           <a:ln/>
         </p:spPr>
+        <p:txBody>
+          <a:bodyPr/>
+          <a:lstStyle/>
+          <a:p>
+            <a:endParaRPr lang="en-IT"/>
+          </a:p>
+        </p:txBody>
       </p:sp>
       <p:sp>
         <p:nvSpPr>
@@ -11690,6 +13376,13 @@
           </a:solidFill>
           <a:ln/>
         </p:spPr>
+        <p:txBody>
+          <a:bodyPr/>
+          <a:lstStyle/>
+          <a:p>
+            <a:endParaRPr lang="en-IT"/>
+          </a:p>
+        </p:txBody>
       </p:sp>
       <p:sp>
         <p:nvSpPr>
@@ -11710,6 +13403,13 @@
           </a:solidFill>
           <a:ln/>
         </p:spPr>
+        <p:txBody>
+          <a:bodyPr/>
+          <a:lstStyle/>
+          <a:p>
+            <a:endParaRPr lang="en-IT"/>
+          </a:p>
+        </p:txBody>
       </p:sp>
       <p:sp>
         <p:nvSpPr>
@@ -11730,6 +13430,13 @@
           </a:solidFill>
           <a:ln/>
         </p:spPr>
+        <p:txBody>
+          <a:bodyPr/>
+          <a:lstStyle/>
+          <a:p>
+            <a:endParaRPr lang="en-IT"/>
+          </a:p>
+        </p:txBody>
       </p:sp>
       <p:sp>
         <p:nvSpPr>
@@ -11750,6 +13457,13 @@
           </a:solidFill>
           <a:ln/>
         </p:spPr>
+        <p:txBody>
+          <a:bodyPr/>
+          <a:lstStyle/>
+          <a:p>
+            <a:endParaRPr lang="en-IT"/>
+          </a:p>
+        </p:txBody>
       </p:sp>
       <p:sp>
         <p:nvSpPr>
@@ -11770,6 +13484,13 @@
           </a:solidFill>
           <a:ln/>
         </p:spPr>
+        <p:txBody>
+          <a:bodyPr/>
+          <a:lstStyle/>
+          <a:p>
+            <a:endParaRPr lang="en-IT"/>
+          </a:p>
+        </p:txBody>
       </p:sp>
       <p:sp>
         <p:nvSpPr>
@@ -11790,6 +13511,13 @@
           </a:solidFill>
           <a:ln/>
         </p:spPr>
+        <p:txBody>
+          <a:bodyPr/>
+          <a:lstStyle/>
+          <a:p>
+            <a:endParaRPr lang="en-IT"/>
+          </a:p>
+        </p:txBody>
       </p:sp>
       <p:sp>
         <p:nvSpPr>
@@ -11810,6 +13538,13 @@
           </a:solidFill>
           <a:ln/>
         </p:spPr>
+        <p:txBody>
+          <a:bodyPr/>
+          <a:lstStyle/>
+          <a:p>
+            <a:endParaRPr lang="en-IT"/>
+          </a:p>
+        </p:txBody>
       </p:sp>
       <p:sp>
         <p:nvSpPr>
@@ -11830,6 +13565,13 @@
           </a:solidFill>
           <a:ln/>
         </p:spPr>
+        <p:txBody>
+          <a:bodyPr/>
+          <a:lstStyle/>
+          <a:p>
+            <a:endParaRPr lang="en-IT"/>
+          </a:p>
+        </p:txBody>
       </p:sp>
       <p:sp>
         <p:nvSpPr>
@@ -11850,6 +13592,13 @@
           </a:solidFill>
           <a:ln/>
         </p:spPr>
+        <p:txBody>
+          <a:bodyPr/>
+          <a:lstStyle/>
+          <a:p>
+            <a:endParaRPr lang="en-IT"/>
+          </a:p>
+        </p:txBody>
       </p:sp>
       <p:sp>
         <p:nvSpPr>
@@ -11870,6 +13619,13 @@
           </a:solidFill>
           <a:ln/>
         </p:spPr>
+        <p:txBody>
+          <a:bodyPr/>
+          <a:lstStyle/>
+          <a:p>
+            <a:endParaRPr lang="en-IT"/>
+          </a:p>
+        </p:txBody>
       </p:sp>
       <p:sp>
         <p:nvSpPr>
@@ -11890,6 +13646,13 @@
           </a:solidFill>
           <a:ln/>
         </p:spPr>
+        <p:txBody>
+          <a:bodyPr/>
+          <a:lstStyle/>
+          <a:p>
+            <a:endParaRPr lang="en-IT"/>
+          </a:p>
+        </p:txBody>
       </p:sp>
       <p:sp>
         <p:nvSpPr>
@@ -11910,6 +13673,13 @@
           </a:solidFill>
           <a:ln/>
         </p:spPr>
+        <p:txBody>
+          <a:bodyPr/>
+          <a:lstStyle/>
+          <a:p>
+            <a:endParaRPr lang="en-IT"/>
+          </a:p>
+        </p:txBody>
       </p:sp>
       <p:sp>
         <p:nvSpPr>
@@ -11930,6 +13700,13 @@
           </a:solidFill>
           <a:ln/>
         </p:spPr>
+        <p:txBody>
+          <a:bodyPr/>
+          <a:lstStyle/>
+          <a:p>
+            <a:endParaRPr lang="en-IT"/>
+          </a:p>
+        </p:txBody>
       </p:sp>
       <p:sp>
         <p:nvSpPr>
@@ -11950,6 +13727,13 @@
           </a:solidFill>
           <a:ln/>
         </p:spPr>
+        <p:txBody>
+          <a:bodyPr/>
+          <a:lstStyle/>
+          <a:p>
+            <a:endParaRPr lang="en-IT"/>
+          </a:p>
+        </p:txBody>
       </p:sp>
       <p:sp>
         <p:nvSpPr>
@@ -11970,6 +13754,13 @@
           </a:solidFill>
           <a:ln/>
         </p:spPr>
+        <p:txBody>
+          <a:bodyPr/>
+          <a:lstStyle/>
+          <a:p>
+            <a:endParaRPr lang="en-IT"/>
+          </a:p>
+        </p:txBody>
       </p:sp>
       <p:sp>
         <p:nvSpPr>
@@ -11990,6 +13781,13 @@
           </a:solidFill>
           <a:ln/>
         </p:spPr>
+        <p:txBody>
+          <a:bodyPr/>
+          <a:lstStyle/>
+          <a:p>
+            <a:endParaRPr lang="en-IT"/>
+          </a:p>
+        </p:txBody>
       </p:sp>
       <p:sp>
         <p:nvSpPr>
@@ -12010,6 +13808,13 @@
           </a:solidFill>
           <a:ln/>
         </p:spPr>
+        <p:txBody>
+          <a:bodyPr/>
+          <a:lstStyle/>
+          <a:p>
+            <a:endParaRPr lang="en-IT"/>
+          </a:p>
+        </p:txBody>
       </p:sp>
       <p:sp>
         <p:nvSpPr>
@@ -12030,6 +13835,13 @@
           </a:solidFill>
           <a:ln/>
         </p:spPr>
+        <p:txBody>
+          <a:bodyPr/>
+          <a:lstStyle/>
+          <a:p>
+            <a:endParaRPr lang="en-IT"/>
+          </a:p>
+        </p:txBody>
       </p:sp>
       <p:sp>
         <p:nvSpPr>
@@ -12050,6 +13862,13 @@
           </a:solidFill>
           <a:ln/>
         </p:spPr>
+        <p:txBody>
+          <a:bodyPr/>
+          <a:lstStyle/>
+          <a:p>
+            <a:endParaRPr lang="en-IT"/>
+          </a:p>
+        </p:txBody>
       </p:sp>
       <p:sp>
         <p:nvSpPr>
@@ -12070,6 +13889,13 @@
           </a:solidFill>
           <a:ln/>
         </p:spPr>
+        <p:txBody>
+          <a:bodyPr/>
+          <a:lstStyle/>
+          <a:p>
+            <a:endParaRPr lang="en-IT"/>
+          </a:p>
+        </p:txBody>
       </p:sp>
       <p:sp>
         <p:nvSpPr>
@@ -12090,6 +13916,13 @@
           </a:solidFill>
           <a:ln/>
         </p:spPr>
+        <p:txBody>
+          <a:bodyPr/>
+          <a:lstStyle/>
+          <a:p>
+            <a:endParaRPr lang="en-IT"/>
+          </a:p>
+        </p:txBody>
       </p:sp>
       <p:sp>
         <p:nvSpPr>
@@ -12110,6 +13943,13 @@
           </a:solidFill>
           <a:ln/>
         </p:spPr>
+        <p:txBody>
+          <a:bodyPr/>
+          <a:lstStyle/>
+          <a:p>
+            <a:endParaRPr lang="en-IT"/>
+          </a:p>
+        </p:txBody>
       </p:sp>
       <p:sp>
         <p:nvSpPr>
@@ -12130,6 +13970,13 @@
           </a:solidFill>
           <a:ln/>
         </p:spPr>
+        <p:txBody>
+          <a:bodyPr/>
+          <a:lstStyle/>
+          <a:p>
+            <a:endParaRPr lang="en-IT"/>
+          </a:p>
+        </p:txBody>
       </p:sp>
       <p:sp>
         <p:nvSpPr>
@@ -12150,6 +13997,13 @@
           </a:solidFill>
           <a:ln/>
         </p:spPr>
+        <p:txBody>
+          <a:bodyPr/>
+          <a:lstStyle/>
+          <a:p>
+            <a:endParaRPr lang="en-IT"/>
+          </a:p>
+        </p:txBody>
       </p:sp>
       <p:sp>
         <p:nvSpPr>
@@ -12170,6 +14024,13 @@
           </a:solidFill>
           <a:ln/>
         </p:spPr>
+        <p:txBody>
+          <a:bodyPr/>
+          <a:lstStyle/>
+          <a:p>
+            <a:endParaRPr lang="en-IT"/>
+          </a:p>
+        </p:txBody>
       </p:sp>
       <p:sp>
         <p:nvSpPr>
@@ -12190,6 +14051,13 @@
           </a:solidFill>
           <a:ln/>
         </p:spPr>
+        <p:txBody>
+          <a:bodyPr/>
+          <a:lstStyle/>
+          <a:p>
+            <a:endParaRPr lang="en-IT"/>
+          </a:p>
+        </p:txBody>
       </p:sp>
       <p:sp>
         <p:nvSpPr>
@@ -12210,6 +14078,13 @@
           </a:solidFill>
           <a:ln/>
         </p:spPr>
+        <p:txBody>
+          <a:bodyPr/>
+          <a:lstStyle/>
+          <a:p>
+            <a:endParaRPr lang="en-IT"/>
+          </a:p>
+        </p:txBody>
       </p:sp>
       <p:sp>
         <p:nvSpPr>
@@ -12230,6 +14105,13 @@
           </a:solidFill>
           <a:ln/>
         </p:spPr>
+        <p:txBody>
+          <a:bodyPr/>
+          <a:lstStyle/>
+          <a:p>
+            <a:endParaRPr lang="en-IT"/>
+          </a:p>
+        </p:txBody>
       </p:sp>
       <p:sp>
         <p:nvSpPr>
@@ -12250,6 +14132,13 @@
           </a:solidFill>
           <a:ln/>
         </p:spPr>
+        <p:txBody>
+          <a:bodyPr/>
+          <a:lstStyle/>
+          <a:p>
+            <a:endParaRPr lang="en-IT"/>
+          </a:p>
+        </p:txBody>
       </p:sp>
       <p:sp>
         <p:nvSpPr>
@@ -12270,6 +14159,13 @@
           </a:solidFill>
           <a:ln/>
         </p:spPr>
+        <p:txBody>
+          <a:bodyPr/>
+          <a:lstStyle/>
+          <a:p>
+            <a:endParaRPr lang="en-IT"/>
+          </a:p>
+        </p:txBody>
       </p:sp>
       <p:sp>
         <p:nvSpPr>
@@ -12290,6 +14186,13 @@
           </a:solidFill>
           <a:ln/>
         </p:spPr>
+        <p:txBody>
+          <a:bodyPr/>
+          <a:lstStyle/>
+          <a:p>
+            <a:endParaRPr lang="en-IT"/>
+          </a:p>
+        </p:txBody>
       </p:sp>
       <p:sp>
         <p:nvSpPr>
@@ -12310,6 +14213,13 @@
           </a:solidFill>
           <a:ln/>
         </p:spPr>
+        <p:txBody>
+          <a:bodyPr/>
+          <a:lstStyle/>
+          <a:p>
+            <a:endParaRPr lang="en-IT"/>
+          </a:p>
+        </p:txBody>
       </p:sp>
       <p:sp>
         <p:nvSpPr>
@@ -12787,6 +14697,13 @@
             </a:outerShdw>
           </a:effectLst>
         </p:spPr>
+        <p:txBody>
+          <a:bodyPr/>
+          <a:lstStyle/>
+          <a:p>
+            <a:endParaRPr lang="en-IT"/>
+          </a:p>
+        </p:txBody>
       </p:sp>
       <p:sp>
         <p:nvSpPr>
@@ -12853,6 +14770,13 @@
             <a:prstDash val="solid"/>
           </a:ln>
         </p:spPr>
+        <p:txBody>
+          <a:bodyPr/>
+          <a:lstStyle/>
+          <a:p>
+            <a:endParaRPr lang="en-IT"/>
+          </a:p>
+        </p:txBody>
       </p:sp>
       <p:sp>
         <p:nvSpPr>
@@ -12919,6 +14843,13 @@
             <a:prstDash val="solid"/>
           </a:ln>
         </p:spPr>
+        <p:txBody>
+          <a:bodyPr/>
+          <a:lstStyle/>
+          <a:p>
+            <a:endParaRPr lang="en-IT"/>
+          </a:p>
+        </p:txBody>
       </p:sp>
       <p:sp>
         <p:nvSpPr>
@@ -13245,7 +15176,7 @@
                 <a:ea typeface="Calibri" pitchFamily="34" charset="-122"/>
                 <a:cs typeface="Calibri" pitchFamily="34" charset="-120"/>
               </a:rPr>
-              <a:t>Regularisation adds a penalty for large / numerous coefficients: it reins in the model’s freedom.</a:t>
+              <a:t>Regularisation adds a penalty for large / numerous coefficients: it limits the model’s freedom.</a:t>
             </a:r>
             <a:endParaRPr lang="en-US" sz="1600" dirty="0"/>
           </a:p>
@@ -13422,6 +15353,13 @@
           </a:solidFill>
           <a:ln/>
         </p:spPr>
+        <p:txBody>
+          <a:bodyPr/>
+          <a:lstStyle/>
+          <a:p>
+            <a:endParaRPr lang="en-IT"/>
+          </a:p>
+        </p:txBody>
       </p:sp>
       <p:sp>
         <p:nvSpPr>
@@ -13442,6 +15380,13 @@
           </a:solidFill>
           <a:ln/>
         </p:spPr>
+        <p:txBody>
+          <a:bodyPr/>
+          <a:lstStyle/>
+          <a:p>
+            <a:endParaRPr lang="en-IT"/>
+          </a:p>
+        </p:txBody>
       </p:sp>
       <p:sp>
         <p:nvSpPr>
@@ -13462,6 +15407,13 @@
           </a:solidFill>
           <a:ln/>
         </p:spPr>
+        <p:txBody>
+          <a:bodyPr/>
+          <a:lstStyle/>
+          <a:p>
+            <a:endParaRPr lang="en-IT"/>
+          </a:p>
+        </p:txBody>
       </p:sp>
       <p:sp>
         <p:nvSpPr>
@@ -13482,6 +15434,13 @@
           </a:solidFill>
           <a:ln/>
         </p:spPr>
+        <p:txBody>
+          <a:bodyPr/>
+          <a:lstStyle/>
+          <a:p>
+            <a:endParaRPr lang="en-IT"/>
+          </a:p>
+        </p:txBody>
       </p:sp>
       <p:sp>
         <p:nvSpPr>
@@ -13502,6 +15461,13 @@
           </a:solidFill>
           <a:ln/>
         </p:spPr>
+        <p:txBody>
+          <a:bodyPr/>
+          <a:lstStyle/>
+          <a:p>
+            <a:endParaRPr lang="en-IT"/>
+          </a:p>
+        </p:txBody>
       </p:sp>
       <p:sp>
         <p:nvSpPr>
@@ -13522,6 +15488,13 @@
           </a:solidFill>
           <a:ln/>
         </p:spPr>
+        <p:txBody>
+          <a:bodyPr/>
+          <a:lstStyle/>
+          <a:p>
+            <a:endParaRPr lang="en-IT"/>
+          </a:p>
+        </p:txBody>
       </p:sp>
       <p:sp>
         <p:nvSpPr>
@@ -13542,6 +15515,13 @@
           </a:solidFill>
           <a:ln/>
         </p:spPr>
+        <p:txBody>
+          <a:bodyPr/>
+          <a:lstStyle/>
+          <a:p>
+            <a:endParaRPr lang="en-IT"/>
+          </a:p>
+        </p:txBody>
       </p:sp>
       <p:sp>
         <p:nvSpPr>
@@ -13562,6 +15542,13 @@
           </a:solidFill>
           <a:ln/>
         </p:spPr>
+        <p:txBody>
+          <a:bodyPr/>
+          <a:lstStyle/>
+          <a:p>
+            <a:endParaRPr lang="en-IT"/>
+          </a:p>
+        </p:txBody>
       </p:sp>
       <p:sp>
         <p:nvSpPr>
@@ -13582,6 +15569,13 @@
           </a:solidFill>
           <a:ln/>
         </p:spPr>
+        <p:txBody>
+          <a:bodyPr/>
+          <a:lstStyle/>
+          <a:p>
+            <a:endParaRPr lang="en-IT"/>
+          </a:p>
+        </p:txBody>
       </p:sp>
       <p:sp>
         <p:nvSpPr>
@@ -13602,6 +15596,13 @@
           </a:solidFill>
           <a:ln/>
         </p:spPr>
+        <p:txBody>
+          <a:bodyPr/>
+          <a:lstStyle/>
+          <a:p>
+            <a:endParaRPr lang="en-IT"/>
+          </a:p>
+        </p:txBody>
       </p:sp>
       <p:sp>
         <p:nvSpPr>
@@ -13622,6 +15623,13 @@
           </a:solidFill>
           <a:ln/>
         </p:spPr>
+        <p:txBody>
+          <a:bodyPr/>
+          <a:lstStyle/>
+          <a:p>
+            <a:endParaRPr lang="en-IT"/>
+          </a:p>
+        </p:txBody>
       </p:sp>
       <p:sp>
         <p:nvSpPr>
@@ -13642,6 +15650,13 @@
           </a:solidFill>
           <a:ln/>
         </p:spPr>
+        <p:txBody>
+          <a:bodyPr/>
+          <a:lstStyle/>
+          <a:p>
+            <a:endParaRPr lang="en-IT"/>
+          </a:p>
+        </p:txBody>
       </p:sp>
       <p:sp>
         <p:nvSpPr>
@@ -13662,6 +15677,13 @@
           </a:solidFill>
           <a:ln/>
         </p:spPr>
+        <p:txBody>
+          <a:bodyPr/>
+          <a:lstStyle/>
+          <a:p>
+            <a:endParaRPr lang="en-IT"/>
+          </a:p>
+        </p:txBody>
       </p:sp>
       <p:sp>
         <p:nvSpPr>
@@ -13682,6 +15704,13 @@
           </a:solidFill>
           <a:ln/>
         </p:spPr>
+        <p:txBody>
+          <a:bodyPr/>
+          <a:lstStyle/>
+          <a:p>
+            <a:endParaRPr lang="en-IT"/>
+          </a:p>
+        </p:txBody>
       </p:sp>
       <p:sp>
         <p:nvSpPr>
@@ -13702,6 +15731,13 @@
           </a:solidFill>
           <a:ln/>
         </p:spPr>
+        <p:txBody>
+          <a:bodyPr/>
+          <a:lstStyle/>
+          <a:p>
+            <a:endParaRPr lang="en-IT"/>
+          </a:p>
+        </p:txBody>
       </p:sp>
       <p:sp>
         <p:nvSpPr>
@@ -13722,6 +15758,13 @@
           </a:solidFill>
           <a:ln/>
         </p:spPr>
+        <p:txBody>
+          <a:bodyPr/>
+          <a:lstStyle/>
+          <a:p>
+            <a:endParaRPr lang="en-IT"/>
+          </a:p>
+        </p:txBody>
       </p:sp>
       <p:sp>
         <p:nvSpPr>
@@ -13742,6 +15785,13 @@
           </a:solidFill>
           <a:ln/>
         </p:spPr>
+        <p:txBody>
+          <a:bodyPr/>
+          <a:lstStyle/>
+          <a:p>
+            <a:endParaRPr lang="en-IT"/>
+          </a:p>
+        </p:txBody>
       </p:sp>
       <p:sp>
         <p:nvSpPr>
@@ -13762,6 +15812,13 @@
           </a:solidFill>
           <a:ln/>
         </p:spPr>
+        <p:txBody>
+          <a:bodyPr/>
+          <a:lstStyle/>
+          <a:p>
+            <a:endParaRPr lang="en-IT"/>
+          </a:p>
+        </p:txBody>
       </p:sp>
       <p:sp>
         <p:nvSpPr>
@@ -13782,6 +15839,13 @@
           </a:solidFill>
           <a:ln/>
         </p:spPr>
+        <p:txBody>
+          <a:bodyPr/>
+          <a:lstStyle/>
+          <a:p>
+            <a:endParaRPr lang="en-IT"/>
+          </a:p>
+        </p:txBody>
       </p:sp>
       <p:sp>
         <p:nvSpPr>
@@ -13802,6 +15866,13 @@
           </a:solidFill>
           <a:ln/>
         </p:spPr>
+        <p:txBody>
+          <a:bodyPr/>
+          <a:lstStyle/>
+          <a:p>
+            <a:endParaRPr lang="en-IT"/>
+          </a:p>
+        </p:txBody>
       </p:sp>
       <p:sp>
         <p:nvSpPr>
@@ -13822,6 +15893,13 @@
           </a:solidFill>
           <a:ln/>
         </p:spPr>
+        <p:txBody>
+          <a:bodyPr/>
+          <a:lstStyle/>
+          <a:p>
+            <a:endParaRPr lang="en-IT"/>
+          </a:p>
+        </p:txBody>
       </p:sp>
       <p:sp>
         <p:nvSpPr>
@@ -13842,6 +15920,13 @@
           </a:solidFill>
           <a:ln/>
         </p:spPr>
+        <p:txBody>
+          <a:bodyPr/>
+          <a:lstStyle/>
+          <a:p>
+            <a:endParaRPr lang="en-IT"/>
+          </a:p>
+        </p:txBody>
       </p:sp>
       <p:sp>
         <p:nvSpPr>
@@ -13867,6 +15952,13 @@
             <a:prstDash val="solid"/>
           </a:ln>
         </p:spPr>
+        <p:txBody>
+          <a:bodyPr/>
+          <a:lstStyle/>
+          <a:p>
+            <a:endParaRPr lang="en-IT"/>
+          </a:p>
+        </p:txBody>
       </p:sp>
       <p:sp>
         <p:nvSpPr>
@@ -13926,6 +16018,13 @@
           </a:solidFill>
           <a:ln/>
         </p:spPr>
+        <p:txBody>
+          <a:bodyPr/>
+          <a:lstStyle/>
+          <a:p>
+            <a:endParaRPr lang="en-IT"/>
+          </a:p>
+        </p:txBody>
       </p:sp>
       <p:sp>
         <p:nvSpPr>
@@ -13946,6 +16045,13 @@
           </a:solidFill>
           <a:ln/>
         </p:spPr>
+        <p:txBody>
+          <a:bodyPr/>
+          <a:lstStyle/>
+          <a:p>
+            <a:endParaRPr lang="en-IT"/>
+          </a:p>
+        </p:txBody>
       </p:sp>
       <p:sp>
         <p:nvSpPr>
@@ -13966,6 +16072,13 @@
           </a:solidFill>
           <a:ln/>
         </p:spPr>
+        <p:txBody>
+          <a:bodyPr/>
+          <a:lstStyle/>
+          <a:p>
+            <a:endParaRPr lang="en-IT"/>
+          </a:p>
+        </p:txBody>
       </p:sp>
       <p:sp>
         <p:nvSpPr>
@@ -13986,6 +16099,13 @@
           </a:solidFill>
           <a:ln/>
         </p:spPr>
+        <p:txBody>
+          <a:bodyPr/>
+          <a:lstStyle/>
+          <a:p>
+            <a:endParaRPr lang="en-IT"/>
+          </a:p>
+        </p:txBody>
       </p:sp>
       <p:sp>
         <p:nvSpPr>
@@ -14006,6 +16126,13 @@
           </a:solidFill>
           <a:ln/>
         </p:spPr>
+        <p:txBody>
+          <a:bodyPr/>
+          <a:lstStyle/>
+          <a:p>
+            <a:endParaRPr lang="en-IT"/>
+          </a:p>
+        </p:txBody>
       </p:sp>
       <p:sp>
         <p:nvSpPr>
@@ -14026,6 +16153,13 @@
           </a:solidFill>
           <a:ln/>
         </p:spPr>
+        <p:txBody>
+          <a:bodyPr/>
+          <a:lstStyle/>
+          <a:p>
+            <a:endParaRPr lang="en-IT"/>
+          </a:p>
+        </p:txBody>
       </p:sp>
       <p:sp>
         <p:nvSpPr>
@@ -14046,6 +16180,13 @@
           </a:solidFill>
           <a:ln/>
         </p:spPr>
+        <p:txBody>
+          <a:bodyPr/>
+          <a:lstStyle/>
+          <a:p>
+            <a:endParaRPr lang="en-IT"/>
+          </a:p>
+        </p:txBody>
       </p:sp>
       <p:sp>
         <p:nvSpPr>
@@ -14066,6 +16207,13 @@
           </a:solidFill>
           <a:ln/>
         </p:spPr>
+        <p:txBody>
+          <a:bodyPr/>
+          <a:lstStyle/>
+          <a:p>
+            <a:endParaRPr lang="en-IT"/>
+          </a:p>
+        </p:txBody>
       </p:sp>
       <p:sp>
         <p:nvSpPr>
@@ -14086,6 +16234,13 @@
           </a:solidFill>
           <a:ln/>
         </p:spPr>
+        <p:txBody>
+          <a:bodyPr/>
+          <a:lstStyle/>
+          <a:p>
+            <a:endParaRPr lang="en-IT"/>
+          </a:p>
+        </p:txBody>
       </p:sp>
       <p:sp>
         <p:nvSpPr>
@@ -14106,6 +16261,13 @@
           </a:solidFill>
           <a:ln/>
         </p:spPr>
+        <p:txBody>
+          <a:bodyPr/>
+          <a:lstStyle/>
+          <a:p>
+            <a:endParaRPr lang="en-IT"/>
+          </a:p>
+        </p:txBody>
       </p:sp>
       <p:sp>
         <p:nvSpPr>
@@ -14126,6 +16288,13 @@
           </a:solidFill>
           <a:ln/>
         </p:spPr>
+        <p:txBody>
+          <a:bodyPr/>
+          <a:lstStyle/>
+          <a:p>
+            <a:endParaRPr lang="en-IT"/>
+          </a:p>
+        </p:txBody>
       </p:sp>
       <p:sp>
         <p:nvSpPr>
@@ -14146,6 +16315,13 @@
           </a:solidFill>
           <a:ln/>
         </p:spPr>
+        <p:txBody>
+          <a:bodyPr/>
+          <a:lstStyle/>
+          <a:p>
+            <a:endParaRPr lang="en-IT"/>
+          </a:p>
+        </p:txBody>
       </p:sp>
       <p:sp>
         <p:nvSpPr>
@@ -14166,6 +16342,13 @@
           </a:solidFill>
           <a:ln/>
         </p:spPr>
+        <p:txBody>
+          <a:bodyPr/>
+          <a:lstStyle/>
+          <a:p>
+            <a:endParaRPr lang="en-IT"/>
+          </a:p>
+        </p:txBody>
       </p:sp>
       <p:sp>
         <p:nvSpPr>
@@ -14186,6 +16369,13 @@
           </a:solidFill>
           <a:ln/>
         </p:spPr>
+        <p:txBody>
+          <a:bodyPr/>
+          <a:lstStyle/>
+          <a:p>
+            <a:endParaRPr lang="en-IT"/>
+          </a:p>
+        </p:txBody>
       </p:sp>
       <p:sp>
         <p:nvSpPr>
@@ -14206,6 +16396,13 @@
           </a:solidFill>
           <a:ln/>
         </p:spPr>
+        <p:txBody>
+          <a:bodyPr/>
+          <a:lstStyle/>
+          <a:p>
+            <a:endParaRPr lang="en-IT"/>
+          </a:p>
+        </p:txBody>
       </p:sp>
       <p:sp>
         <p:nvSpPr>
@@ -14226,6 +16423,13 @@
           </a:solidFill>
           <a:ln/>
         </p:spPr>
+        <p:txBody>
+          <a:bodyPr/>
+          <a:lstStyle/>
+          <a:p>
+            <a:endParaRPr lang="en-IT"/>
+          </a:p>
+        </p:txBody>
       </p:sp>
       <p:sp>
         <p:nvSpPr>
@@ -14246,6 +16450,13 @@
           </a:solidFill>
           <a:ln/>
         </p:spPr>
+        <p:txBody>
+          <a:bodyPr/>
+          <a:lstStyle/>
+          <a:p>
+            <a:endParaRPr lang="en-IT"/>
+          </a:p>
+        </p:txBody>
       </p:sp>
       <p:sp>
         <p:nvSpPr>
@@ -14266,6 +16477,13 @@
           </a:solidFill>
           <a:ln/>
         </p:spPr>
+        <p:txBody>
+          <a:bodyPr/>
+          <a:lstStyle/>
+          <a:p>
+            <a:endParaRPr lang="en-IT"/>
+          </a:p>
+        </p:txBody>
       </p:sp>
       <p:sp>
         <p:nvSpPr>
@@ -14286,6 +16504,13 @@
           </a:solidFill>
           <a:ln/>
         </p:spPr>
+        <p:txBody>
+          <a:bodyPr/>
+          <a:lstStyle/>
+          <a:p>
+            <a:endParaRPr lang="en-IT"/>
+          </a:p>
+        </p:txBody>
       </p:sp>
       <p:sp>
         <p:nvSpPr>
@@ -14306,6 +16531,13 @@
           </a:solidFill>
           <a:ln/>
         </p:spPr>
+        <p:txBody>
+          <a:bodyPr/>
+          <a:lstStyle/>
+          <a:p>
+            <a:endParaRPr lang="en-IT"/>
+          </a:p>
+        </p:txBody>
       </p:sp>
       <p:sp>
         <p:nvSpPr>
@@ -14326,6 +16558,13 @@
           </a:solidFill>
           <a:ln/>
         </p:spPr>
+        <p:txBody>
+          <a:bodyPr/>
+          <a:lstStyle/>
+          <a:p>
+            <a:endParaRPr lang="en-IT"/>
+          </a:p>
+        </p:txBody>
       </p:sp>
       <p:sp>
         <p:nvSpPr>
@@ -14346,6 +16585,13 @@
           </a:solidFill>
           <a:ln/>
         </p:spPr>
+        <p:txBody>
+          <a:bodyPr/>
+          <a:lstStyle/>
+          <a:p>
+            <a:endParaRPr lang="en-IT"/>
+          </a:p>
+        </p:txBody>
       </p:sp>
       <p:sp>
         <p:nvSpPr>
@@ -14369,6 +16615,13 @@
             <a:prstDash val="solid"/>
           </a:ln>
         </p:spPr>
+        <p:txBody>
+          <a:bodyPr/>
+          <a:lstStyle/>
+          <a:p>
+            <a:endParaRPr lang="en-IT"/>
+          </a:p>
+        </p:txBody>
       </p:sp>
       <p:sp>
         <p:nvSpPr>
@@ -17015,6 +19268,13 @@
             <a:prstDash val="solid"/>
           </a:ln>
         </p:spPr>
+        <p:txBody>
+          <a:bodyPr/>
+          <a:lstStyle/>
+          <a:p>
+            <a:endParaRPr lang="en-IT"/>
+          </a:p>
+        </p:txBody>
       </p:sp>
       <p:sp>
         <p:nvSpPr>
@@ -17079,6 +19339,13 @@
             <a:prstDash val="solid"/>
           </a:ln>
         </p:spPr>
+        <p:txBody>
+          <a:bodyPr/>
+          <a:lstStyle/>
+          <a:p>
+            <a:endParaRPr lang="en-IT"/>
+          </a:p>
+        </p:txBody>
       </p:sp>
       <p:sp>
         <p:nvSpPr>
@@ -17104,6 +19371,13 @@
             <a:prstDash val="solid"/>
           </a:ln>
         </p:spPr>
+        <p:txBody>
+          <a:bodyPr/>
+          <a:lstStyle/>
+          <a:p>
+            <a:endParaRPr lang="en-IT"/>
+          </a:p>
+        </p:txBody>
       </p:sp>
       <p:sp>
         <p:nvSpPr>
@@ -17129,6 +19403,13 @@
             <a:prstDash val="solid"/>
           </a:ln>
         </p:spPr>
+        <p:txBody>
+          <a:bodyPr/>
+          <a:lstStyle/>
+          <a:p>
+            <a:endParaRPr lang="en-IT"/>
+          </a:p>
+        </p:txBody>
       </p:sp>
       <p:sp>
         <p:nvSpPr>
@@ -17154,6 +19435,13 @@
             <a:prstDash val="solid"/>
           </a:ln>
         </p:spPr>
+        <p:txBody>
+          <a:bodyPr/>
+          <a:lstStyle/>
+          <a:p>
+            <a:endParaRPr lang="en-IT"/>
+          </a:p>
+        </p:txBody>
       </p:sp>
       <p:sp>
         <p:nvSpPr>
@@ -17179,6 +19467,13 @@
             <a:prstDash val="solid"/>
           </a:ln>
         </p:spPr>
+        <p:txBody>
+          <a:bodyPr/>
+          <a:lstStyle/>
+          <a:p>
+            <a:endParaRPr lang="en-IT"/>
+          </a:p>
+        </p:txBody>
       </p:sp>
       <p:sp>
         <p:nvSpPr>
@@ -17243,6 +19538,13 @@
             <a:prstDash val="solid"/>
           </a:ln>
         </p:spPr>
+        <p:txBody>
+          <a:bodyPr/>
+          <a:lstStyle/>
+          <a:p>
+            <a:endParaRPr lang="en-IT"/>
+          </a:p>
+        </p:txBody>
       </p:sp>
       <p:sp>
         <p:nvSpPr>
@@ -17307,6 +19609,13 @@
             <a:prstDash val="solid"/>
           </a:ln>
         </p:spPr>
+        <p:txBody>
+          <a:bodyPr/>
+          <a:lstStyle/>
+          <a:p>
+            <a:endParaRPr lang="en-IT"/>
+          </a:p>
+        </p:txBody>
       </p:sp>
       <p:sp>
         <p:nvSpPr>
@@ -17332,6 +19641,13 @@
             <a:prstDash val="solid"/>
           </a:ln>
         </p:spPr>
+        <p:txBody>
+          <a:bodyPr/>
+          <a:lstStyle/>
+          <a:p>
+            <a:endParaRPr lang="en-IT"/>
+          </a:p>
+        </p:txBody>
       </p:sp>
       <p:sp>
         <p:nvSpPr>
@@ -17357,6 +19673,13 @@
             <a:prstDash val="solid"/>
           </a:ln>
         </p:spPr>
+        <p:txBody>
+          <a:bodyPr/>
+          <a:lstStyle/>
+          <a:p>
+            <a:endParaRPr lang="en-IT"/>
+          </a:p>
+        </p:txBody>
       </p:sp>
       <p:sp>
         <p:nvSpPr>
@@ -17382,6 +19705,13 @@
             <a:prstDash val="solid"/>
           </a:ln>
         </p:spPr>
+        <p:txBody>
+          <a:bodyPr/>
+          <a:lstStyle/>
+          <a:p>
+            <a:endParaRPr lang="en-IT"/>
+          </a:p>
+        </p:txBody>
       </p:sp>
       <p:sp>
         <p:nvSpPr>
@@ -17407,6 +19737,13 @@
             <a:prstDash val="solid"/>
           </a:ln>
         </p:spPr>
+        <p:txBody>
+          <a:bodyPr/>
+          <a:lstStyle/>
+          <a:p>
+            <a:endParaRPr lang="en-IT"/>
+          </a:p>
+        </p:txBody>
       </p:sp>
       <p:sp>
         <p:nvSpPr>
@@ -18256,6 +20593,13 @@
             <a:prstDash val="solid"/>
           </a:ln>
         </p:spPr>
+        <p:txBody>
+          <a:bodyPr/>
+          <a:lstStyle/>
+          <a:p>
+            <a:endParaRPr lang="en-IT"/>
+          </a:p>
+        </p:txBody>
       </p:sp>
       <p:sp>
         <p:nvSpPr>
@@ -18359,6 +20703,13 @@
             <a:prstDash val="solid"/>
           </a:ln>
         </p:spPr>
+        <p:txBody>
+          <a:bodyPr/>
+          <a:lstStyle/>
+          <a:p>
+            <a:endParaRPr lang="en-IT"/>
+          </a:p>
+        </p:txBody>
       </p:sp>
       <p:sp>
         <p:nvSpPr>
@@ -18462,6 +20813,13 @@
             <a:prstDash val="solid"/>
           </a:ln>
         </p:spPr>
+        <p:txBody>
+          <a:bodyPr/>
+          <a:lstStyle/>
+          <a:p>
+            <a:endParaRPr lang="en-IT"/>
+          </a:p>
+        </p:txBody>
       </p:sp>
       <p:sp>
         <p:nvSpPr>
@@ -18565,6 +20923,13 @@
             <a:prstDash val="solid"/>
           </a:ln>
         </p:spPr>
+        <p:txBody>
+          <a:bodyPr/>
+          <a:lstStyle/>
+          <a:p>
+            <a:endParaRPr lang="en-IT"/>
+          </a:p>
+        </p:txBody>
       </p:sp>
       <p:sp>
         <p:nvSpPr>
@@ -19081,6 +21446,25 @@
                 <a:cs typeface="Calibri" pitchFamily="34" charset="-120"/>
               </a:rPr>
               <a:t>Report both; choose the operating threshold deliberately, not by default.</a:t>
+            </a:r>
+          </a:p>
+          <a:p>
+            <a:pPr marL="203200" indent="-203200">
+              <a:spcAft>
+                <a:spcPts val="800"/>
+              </a:spcAft>
+              <a:buSzPct val="100000"/>
+              <a:buChar char="•"/>
+            </a:pPr>
+            <a:r>
+              <a:rPr lang="en-US" sz="1500" dirty="0">
+                <a:solidFill>
+                  <a:srgbClr val="12262B"/>
+                </a:solidFill>
+                <a:latin typeface="Calibri" pitchFamily="34" charset="0"/>
+                <a:cs typeface="Calibri" pitchFamily="34" charset="-120"/>
+              </a:rPr>
+              <a:t>Which to use depends on the trade-off between errors on false positive or negative</a:t>
             </a:r>
             <a:endParaRPr lang="en-US" sz="1500" dirty="0"/>
           </a:p>
@@ -19456,6 +21840,13 @@
             <a:prstDash val="solid"/>
           </a:ln>
         </p:spPr>
+        <p:txBody>
+          <a:bodyPr/>
+          <a:lstStyle/>
+          <a:p>
+            <a:endParaRPr lang="en-IT"/>
+          </a:p>
+        </p:txBody>
       </p:sp>
       <p:sp>
         <p:nvSpPr>
@@ -19481,6 +21872,13 @@
             <a:prstDash val="solid"/>
           </a:ln>
         </p:spPr>
+        <p:txBody>
+          <a:bodyPr/>
+          <a:lstStyle/>
+          <a:p>
+            <a:endParaRPr lang="en-IT"/>
+          </a:p>
+        </p:txBody>
       </p:sp>
       <p:sp>
         <p:nvSpPr>
@@ -19506,6 +21904,13 @@
             <a:prstDash val="solid"/>
           </a:ln>
         </p:spPr>
+        <p:txBody>
+          <a:bodyPr/>
+          <a:lstStyle/>
+          <a:p>
+            <a:endParaRPr lang="en-IT"/>
+          </a:p>
+        </p:txBody>
       </p:sp>
       <p:sp>
         <p:nvSpPr>
@@ -19531,6 +21936,13 @@
             <a:prstDash val="solid"/>
           </a:ln>
         </p:spPr>
+        <p:txBody>
+          <a:bodyPr/>
+          <a:lstStyle/>
+          <a:p>
+            <a:endParaRPr lang="en-IT"/>
+          </a:p>
+        </p:txBody>
       </p:sp>
       <p:sp>
         <p:nvSpPr>
@@ -19556,6 +21968,13 @@
             <a:prstDash val="solid"/>
           </a:ln>
         </p:spPr>
+        <p:txBody>
+          <a:bodyPr/>
+          <a:lstStyle/>
+          <a:p>
+            <a:endParaRPr lang="en-IT"/>
+          </a:p>
+        </p:txBody>
       </p:sp>
       <p:sp>
         <p:nvSpPr>
@@ -19620,6 +22039,13 @@
             <a:prstDash val="solid"/>
           </a:ln>
         </p:spPr>
+        <p:txBody>
+          <a:bodyPr/>
+          <a:lstStyle/>
+          <a:p>
+            <a:endParaRPr lang="en-IT"/>
+          </a:p>
+        </p:txBody>
       </p:sp>
       <p:sp>
         <p:nvSpPr>
@@ -19645,6 +22071,13 @@
             <a:prstDash val="solid"/>
           </a:ln>
         </p:spPr>
+        <p:txBody>
+          <a:bodyPr/>
+          <a:lstStyle/>
+          <a:p>
+            <a:endParaRPr lang="en-IT"/>
+          </a:p>
+        </p:txBody>
       </p:sp>
       <p:sp>
         <p:nvSpPr>
@@ -19670,6 +22103,13 @@
             <a:prstDash val="solid"/>
           </a:ln>
         </p:spPr>
+        <p:txBody>
+          <a:bodyPr/>
+          <a:lstStyle/>
+          <a:p>
+            <a:endParaRPr lang="en-IT"/>
+          </a:p>
+        </p:txBody>
       </p:sp>
       <p:sp>
         <p:nvSpPr>
@@ -19695,6 +22135,13 @@
             <a:prstDash val="solid"/>
           </a:ln>
         </p:spPr>
+        <p:txBody>
+          <a:bodyPr/>
+          <a:lstStyle/>
+          <a:p>
+            <a:endParaRPr lang="en-IT"/>
+          </a:p>
+        </p:txBody>
       </p:sp>
       <p:sp>
         <p:nvSpPr>
@@ -19720,6 +22167,13 @@
             <a:prstDash val="solid"/>
           </a:ln>
         </p:spPr>
+        <p:txBody>
+          <a:bodyPr/>
+          <a:lstStyle/>
+          <a:p>
+            <a:endParaRPr lang="en-IT"/>
+          </a:p>
+        </p:txBody>
       </p:sp>
       <p:sp>
         <p:nvSpPr>
@@ -19784,6 +22238,13 @@
             <a:prstDash val="solid"/>
           </a:ln>
         </p:spPr>
+        <p:txBody>
+          <a:bodyPr/>
+          <a:lstStyle/>
+          <a:p>
+            <a:endParaRPr lang="en-IT"/>
+          </a:p>
+        </p:txBody>
       </p:sp>
       <p:sp>
         <p:nvSpPr>
@@ -19809,6 +22270,13 @@
             <a:prstDash val="solid"/>
           </a:ln>
         </p:spPr>
+        <p:txBody>
+          <a:bodyPr/>
+          <a:lstStyle/>
+          <a:p>
+            <a:endParaRPr lang="en-IT"/>
+          </a:p>
+        </p:txBody>
       </p:sp>
       <p:sp>
         <p:nvSpPr>
@@ -19834,6 +22302,13 @@
             <a:prstDash val="solid"/>
           </a:ln>
         </p:spPr>
+        <p:txBody>
+          <a:bodyPr/>
+          <a:lstStyle/>
+          <a:p>
+            <a:endParaRPr lang="en-IT"/>
+          </a:p>
+        </p:txBody>
       </p:sp>
       <p:sp>
         <p:nvSpPr>
@@ -19859,6 +22334,13 @@
             <a:prstDash val="solid"/>
           </a:ln>
         </p:spPr>
+        <p:txBody>
+          <a:bodyPr/>
+          <a:lstStyle/>
+          <a:p>
+            <a:endParaRPr lang="en-IT"/>
+          </a:p>
+        </p:txBody>
       </p:sp>
       <p:sp>
         <p:nvSpPr>
@@ -19884,6 +22366,13 @@
             <a:prstDash val="solid"/>
           </a:ln>
         </p:spPr>
+        <p:txBody>
+          <a:bodyPr/>
+          <a:lstStyle/>
+          <a:p>
+            <a:endParaRPr lang="en-IT"/>
+          </a:p>
+        </p:txBody>
       </p:sp>
       <p:sp>
         <p:nvSpPr>
@@ -19948,6 +22437,13 @@
             <a:prstDash val="solid"/>
           </a:ln>
         </p:spPr>
+        <p:txBody>
+          <a:bodyPr/>
+          <a:lstStyle/>
+          <a:p>
+            <a:endParaRPr lang="en-IT"/>
+          </a:p>
+        </p:txBody>
       </p:sp>
       <p:sp>
         <p:nvSpPr>
@@ -19973,6 +22469,13 @@
             <a:prstDash val="solid"/>
           </a:ln>
         </p:spPr>
+        <p:txBody>
+          <a:bodyPr/>
+          <a:lstStyle/>
+          <a:p>
+            <a:endParaRPr lang="en-IT"/>
+          </a:p>
+        </p:txBody>
       </p:sp>
       <p:sp>
         <p:nvSpPr>
@@ -19998,6 +22501,13 @@
             <a:prstDash val="solid"/>
           </a:ln>
         </p:spPr>
+        <p:txBody>
+          <a:bodyPr/>
+          <a:lstStyle/>
+          <a:p>
+            <a:endParaRPr lang="en-IT"/>
+          </a:p>
+        </p:txBody>
       </p:sp>
       <p:sp>
         <p:nvSpPr>
@@ -20023,6 +22533,13 @@
             <a:prstDash val="solid"/>
           </a:ln>
         </p:spPr>
+        <p:txBody>
+          <a:bodyPr/>
+          <a:lstStyle/>
+          <a:p>
+            <a:endParaRPr lang="en-IT"/>
+          </a:p>
+        </p:txBody>
       </p:sp>
       <p:sp>
         <p:nvSpPr>
@@ -20048,6 +22565,13 @@
             <a:prstDash val="solid"/>
           </a:ln>
         </p:spPr>
+        <p:txBody>
+          <a:bodyPr/>
+          <a:lstStyle/>
+          <a:p>
+            <a:endParaRPr lang="en-IT"/>
+          </a:p>
+        </p:txBody>
       </p:sp>
       <p:sp>
         <p:nvSpPr>
@@ -20112,6 +22636,13 @@
             <a:prstDash val="solid"/>
           </a:ln>
         </p:spPr>
+        <p:txBody>
+          <a:bodyPr/>
+          <a:lstStyle/>
+          <a:p>
+            <a:endParaRPr lang="en-IT"/>
+          </a:p>
+        </p:txBody>
       </p:sp>
       <p:sp>
         <p:nvSpPr>
@@ -20137,6 +22668,13 @@
             <a:prstDash val="solid"/>
           </a:ln>
         </p:spPr>
+        <p:txBody>
+          <a:bodyPr/>
+          <a:lstStyle/>
+          <a:p>
+            <a:endParaRPr lang="en-IT"/>
+          </a:p>
+        </p:txBody>
       </p:sp>
       <p:sp>
         <p:nvSpPr>
@@ -20162,6 +22700,13 @@
             <a:prstDash val="solid"/>
           </a:ln>
         </p:spPr>
+        <p:txBody>
+          <a:bodyPr/>
+          <a:lstStyle/>
+          <a:p>
+            <a:endParaRPr lang="en-IT"/>
+          </a:p>
+        </p:txBody>
       </p:sp>
       <p:sp>
         <p:nvSpPr>
@@ -20187,6 +22732,13 @@
             <a:prstDash val="solid"/>
           </a:ln>
         </p:spPr>
+        <p:txBody>
+          <a:bodyPr/>
+          <a:lstStyle/>
+          <a:p>
+            <a:endParaRPr lang="en-IT"/>
+          </a:p>
+        </p:txBody>
       </p:sp>
       <p:sp>
         <p:nvSpPr>
@@ -20212,6 +22764,13 @@
             <a:prstDash val="solid"/>
           </a:ln>
         </p:spPr>
+        <p:txBody>
+          <a:bodyPr/>
+          <a:lstStyle/>
+          <a:p>
+            <a:endParaRPr lang="en-IT"/>
+          </a:p>
+        </p:txBody>
       </p:sp>
       <p:sp>
         <p:nvSpPr>
@@ -20577,7 +23136,7 @@
                 <a:ea typeface="Calibri" pitchFamily="34" charset="-122"/>
                 <a:cs typeface="Calibri" pitchFamily="34" charset="-120"/>
               </a:rPr>
-              <a:t>We left with a clean, split, leak-aware METABRIC dataset — and deliberately built no model.</a:t>
+              <a:t>We left with a clean, split, leak-aware METABRIC dataset and deliberately built no model.</a:t>
             </a:r>
             <a:endParaRPr lang="en-US" sz="1600" dirty="0"/>
           </a:p>
@@ -20619,7 +23178,7 @@
                 <a:ea typeface="Calibri" pitchFamily="34" charset="-122"/>
                 <a:cs typeface="Calibri" pitchFamily="34" charset="-120"/>
               </a:rPr>
-              <a:t>Through-line: a trustworthy biomarker matters more than a sophisticated algorithm.</a:t>
+              <a:t>Through-line: a trustworthy biomarker (our aim for today) matters more than a sophisticated algorithm.</a:t>
             </a:r>
             <a:endParaRPr lang="en-US" sz="1600" dirty="0"/>
           </a:p>
@@ -20651,6 +23210,13 @@
             <a:prstDash val="solid"/>
           </a:ln>
         </p:spPr>
+        <p:txBody>
+          <a:bodyPr/>
+          <a:lstStyle/>
+          <a:p>
+            <a:endParaRPr lang="en-IT"/>
+          </a:p>
+        </p:txBody>
       </p:sp>
       <p:sp>
         <p:nvSpPr>
@@ -20671,6 +23237,13 @@
           </a:solidFill>
           <a:ln/>
         </p:spPr>
+        <p:txBody>
+          <a:bodyPr/>
+          <a:lstStyle/>
+          <a:p>
+            <a:endParaRPr lang="en-IT"/>
+          </a:p>
+        </p:txBody>
       </p:sp>
       <p:sp>
         <p:nvSpPr>
@@ -20778,6 +23351,13 @@
             </a:outerShdw>
           </a:effectLst>
         </p:spPr>
+        <p:txBody>
+          <a:bodyPr/>
+          <a:lstStyle/>
+          <a:p>
+            <a:endParaRPr lang="en-IT"/>
+          </a:p>
+        </p:txBody>
       </p:sp>
       <p:sp>
         <p:nvSpPr>
@@ -20798,6 +23378,13 @@
           </a:solidFill>
           <a:ln/>
         </p:spPr>
+        <p:txBody>
+          <a:bodyPr/>
+          <a:lstStyle/>
+          <a:p>
+            <a:endParaRPr lang="en-IT"/>
+          </a:p>
+        </p:txBody>
       </p:sp>
       <p:sp>
         <p:nvSpPr>
@@ -20903,6 +23490,13 @@
             <a:prstDash val="solid"/>
           </a:ln>
         </p:spPr>
+        <p:txBody>
+          <a:bodyPr/>
+          <a:lstStyle/>
+          <a:p>
+            <a:endParaRPr lang="en-IT"/>
+          </a:p>
+        </p:txBody>
       </p:sp>
       <p:sp>
         <p:nvSpPr>
@@ -20923,6 +23517,13 @@
           </a:solidFill>
           <a:ln/>
         </p:spPr>
+        <p:txBody>
+          <a:bodyPr/>
+          <a:lstStyle/>
+          <a:p>
+            <a:endParaRPr lang="en-IT"/>
+          </a:p>
+        </p:txBody>
       </p:sp>
       <p:sp>
         <p:nvSpPr>
@@ -21028,6 +23629,13 @@
             <a:prstDash val="solid"/>
           </a:ln>
         </p:spPr>
+        <p:txBody>
+          <a:bodyPr/>
+          <a:lstStyle/>
+          <a:p>
+            <a:endParaRPr lang="en-IT"/>
+          </a:p>
+        </p:txBody>
       </p:sp>
       <p:sp>
         <p:nvSpPr>
@@ -21048,6 +23656,13 @@
           </a:solidFill>
           <a:ln/>
         </p:spPr>
+        <p:txBody>
+          <a:bodyPr/>
+          <a:lstStyle/>
+          <a:p>
+            <a:endParaRPr lang="en-IT"/>
+          </a:p>
+        </p:txBody>
       </p:sp>
       <p:sp>
         <p:nvSpPr>
@@ -21153,6 +23768,13 @@
             <a:prstDash val="solid"/>
           </a:ln>
         </p:spPr>
+        <p:txBody>
+          <a:bodyPr/>
+          <a:lstStyle/>
+          <a:p>
+            <a:endParaRPr lang="en-IT"/>
+          </a:p>
+        </p:txBody>
       </p:sp>
       <p:sp>
         <p:nvSpPr>
@@ -21173,6 +23795,13 @@
           </a:solidFill>
           <a:ln/>
         </p:spPr>
+        <p:txBody>
+          <a:bodyPr/>
+          <a:lstStyle/>
+          <a:p>
+            <a:endParaRPr lang="en-IT"/>
+          </a:p>
+        </p:txBody>
       </p:sp>
       <p:sp>
         <p:nvSpPr>
@@ -21597,6 +24226,13 @@
             </a:outerShdw>
           </a:effectLst>
         </p:spPr>
+        <p:txBody>
+          <a:bodyPr/>
+          <a:lstStyle/>
+          <a:p>
+            <a:endParaRPr lang="en-IT"/>
+          </a:p>
+        </p:txBody>
       </p:sp>
       <p:sp>
         <p:nvSpPr>
@@ -21704,6 +24340,13 @@
             </a:outerShdw>
           </a:effectLst>
         </p:spPr>
+        <p:txBody>
+          <a:bodyPr/>
+          <a:lstStyle/>
+          <a:p>
+            <a:endParaRPr lang="en-IT"/>
+          </a:p>
+        </p:txBody>
       </p:sp>
       <p:sp>
         <p:nvSpPr>
@@ -22009,7 +24652,29 @@
                 <a:ea typeface="Calibri" pitchFamily="34" charset="-122"/>
                 <a:cs typeface="Calibri" pitchFamily="34" charset="-120"/>
               </a:rPr>
-              <a:t>Overfitting = great on training, poor on new data — memorising patients, not biology (Lecture 1).</a:t>
+              <a:t>Overfitting = great on training, poor on new data: </a:t>
+            </a:r>
+            <a:r>
+              <a:rPr lang="en-US" sz="1600" dirty="0" err="1">
+                <a:solidFill>
+                  <a:srgbClr val="12262B"/>
+                </a:solidFill>
+                <a:latin typeface="Calibri" pitchFamily="34" charset="0"/>
+                <a:ea typeface="Calibri" pitchFamily="34" charset="-122"/>
+                <a:cs typeface="Calibri" pitchFamily="34" charset="-120"/>
+              </a:rPr>
+              <a:t>memorising</a:t>
+            </a:r>
+            <a:r>
+              <a:rPr lang="en-US" sz="1600" dirty="0">
+                <a:solidFill>
+                  <a:srgbClr val="12262B"/>
+                </a:solidFill>
+                <a:latin typeface="Calibri" pitchFamily="34" charset="0"/>
+                <a:ea typeface="Calibri" pitchFamily="34" charset="-122"/>
+                <a:cs typeface="Calibri" pitchFamily="34" charset="-120"/>
+              </a:rPr>
+              <a:t> patients, not biology (Lecture 1).</a:t>
             </a:r>
             <a:endParaRPr lang="en-US" sz="1600" dirty="0"/>
           </a:p>
@@ -22083,7 +24748,13 @@
         <p:nvGraphicFramePr>
           <p:cNvPr id="8" name="Chart 0"/>
           <p:cNvGraphicFramePr/>
-          <p:nvPr/>
+          <p:nvPr>
+            <p:extLst>
+              <p:ext uri="{D42A27DB-BD31-4B8C-83A1-F6EECF244321}">
+                <p14:modId xmlns:p14="http://schemas.microsoft.com/office/powerpoint/2010/main" val="1415930925"/>
+              </p:ext>
+            </p:extLst>
+          </p:nvPr>
         </p:nvGraphicFramePr>
         <p:xfrm>
           <a:off x="6400800" y="2194560"/>
@@ -22363,7 +25034,7 @@
                 <a:ea typeface="Calibri" pitchFamily="34" charset="-122"/>
                 <a:cs typeface="Calibri" pitchFamily="34" charset="-120"/>
               </a:rPr>
-              <a:t>This is the bias–variance trade-off — taught by intuition, not equations.</a:t>
+              <a:t>This is the bias-variance trade-off.</a:t>
             </a:r>
             <a:endParaRPr lang="en-US" sz="1600" dirty="0"/>
           </a:p>
@@ -22632,7 +25303,7 @@
                 <a:ea typeface="Calibri" pitchFamily="34" charset="-122"/>
                 <a:cs typeface="Calibri" pitchFamily="34" charset="-120"/>
               </a:rPr>
-              <a:t>But (Lecture 1): predictive ≠ causal, and regularised coefficients are selected — read them as hypotheses.</a:t>
+              <a:t>But (Lecture 1): predictive ≠ causal, and regularised coefficients are selected, read them as hypotheses.</a:t>
             </a:r>
             <a:endParaRPr lang="en-US" sz="1550" dirty="0"/>
           </a:p>
@@ -22674,7 +25345,7 @@
                 <a:ea typeface="Calibri" pitchFamily="34" charset="-122"/>
                 <a:cs typeface="Calibri" pitchFamily="34" charset="-120"/>
               </a:rPr>
-              <a:t>Interpretation is where ML meets biology — and where overclaiming does the most damage.</a:t>
+              <a:t>Interpretation is where ML meets biology and where overclaiming does the most damage.</a:t>
             </a:r>
             <a:endParaRPr lang="en-US" sz="1550" dirty="0"/>
           </a:p>
@@ -22961,7 +25632,7 @@
                 <a:ea typeface="Calibri" pitchFamily="34" charset="-122"/>
                 <a:cs typeface="Calibri" pitchFamily="34" charset="-120"/>
               </a:rPr>
-              <a:t>A baseline is not a throwaway — it is the standard every later model is judged against.</a:t>
+              <a:t>A baseline is not a throwaway, it is the standard every later model is judged against.</a:t>
             </a:r>
             <a:endParaRPr lang="en-US" sz="1600" dirty="0"/>
           </a:p>
@@ -23003,7 +25674,7 @@
                 <a:ea typeface="Calibri" pitchFamily="34" charset="-122"/>
                 <a:cs typeface="Calibri" pitchFamily="34" charset="-120"/>
               </a:rPr>
-              <a:t>If a simple, well-validated model already works, that is a result — not a disappointment.</a:t>
+              <a:t>If a simple, well-validated model already works, that is a result, not a disappointment.</a:t>
             </a:r>
             <a:endParaRPr lang="en-US" sz="1600" dirty="0"/>
           </a:p>
@@ -23037,6 +25708,13 @@
             </a:outerShdw>
           </a:effectLst>
         </p:spPr>
+        <p:txBody>
+          <a:bodyPr/>
+          <a:lstStyle/>
+          <a:p>
+            <a:endParaRPr lang="en-IT"/>
+          </a:p>
+        </p:txBody>
       </p:sp>
       <p:sp>
         <p:nvSpPr>
@@ -23100,6 +25778,13 @@
             <a:tailEnd type="triangle"/>
           </a:ln>
         </p:spPr>
+        <p:txBody>
+          <a:bodyPr/>
+          <a:lstStyle/>
+          <a:p>
+            <a:endParaRPr lang="en-IT"/>
+          </a:p>
+        </p:txBody>
       </p:sp>
       <p:sp>
         <p:nvSpPr>
@@ -23129,6 +25814,13 @@
             </a:outerShdw>
           </a:effectLst>
         </p:spPr>
+        <p:txBody>
+          <a:bodyPr/>
+          <a:lstStyle/>
+          <a:p>
+            <a:endParaRPr lang="en-IT"/>
+          </a:p>
+        </p:txBody>
       </p:sp>
       <p:sp>
         <p:nvSpPr>
@@ -23192,6 +25884,13 @@
             <a:tailEnd type="triangle"/>
           </a:ln>
         </p:spPr>
+        <p:txBody>
+          <a:bodyPr/>
+          <a:lstStyle/>
+          <a:p>
+            <a:endParaRPr lang="en-IT"/>
+          </a:p>
+        </p:txBody>
       </p:sp>
       <p:sp>
         <p:nvSpPr>
@@ -23221,6 +25920,13 @@
             </a:outerShdw>
           </a:effectLst>
         </p:spPr>
+        <p:txBody>
+          <a:bodyPr/>
+          <a:lstStyle/>
+          <a:p>
+            <a:endParaRPr lang="en-IT"/>
+          </a:p>
+        </p:txBody>
       </p:sp>
       <p:sp>
         <p:nvSpPr>
@@ -23248,6 +25954,13 @@
             <a:prstDash val="solid"/>
           </a:ln>
         </p:spPr>
+        <p:txBody>
+          <a:bodyPr/>
+          <a:lstStyle/>
+          <a:p>
+            <a:endParaRPr lang="en-IT"/>
+          </a:p>
+        </p:txBody>
       </p:sp>
       <p:sp>
         <p:nvSpPr>
@@ -23311,6 +26024,13 @@
             <a:tailEnd type="triangle"/>
           </a:ln>
         </p:spPr>
+        <p:txBody>
+          <a:bodyPr/>
+          <a:lstStyle/>
+          <a:p>
+            <a:endParaRPr lang="en-IT"/>
+          </a:p>
+        </p:txBody>
       </p:sp>
       <p:sp>
         <p:nvSpPr>
@@ -23340,6 +26060,13 @@
             </a:outerShdw>
           </a:effectLst>
         </p:spPr>
+        <p:txBody>
+          <a:bodyPr/>
+          <a:lstStyle/>
+          <a:p>
+            <a:endParaRPr lang="en-IT"/>
+          </a:p>
+        </p:txBody>
       </p:sp>
       <p:sp>
         <p:nvSpPr>
@@ -23999,6 +26726,13 @@
             </a:outerShdw>
           </a:effectLst>
         </p:spPr>
+        <p:txBody>
+          <a:bodyPr/>
+          <a:lstStyle/>
+          <a:p>
+            <a:endParaRPr lang="en-IT"/>
+          </a:p>
+        </p:txBody>
       </p:sp>
       <p:sp>
         <p:nvSpPr>
@@ -24441,6 +27175,13 @@
             <a:prstDash val="solid"/>
           </a:ln>
         </p:spPr>
+        <p:txBody>
+          <a:bodyPr/>
+          <a:lstStyle/>
+          <a:p>
+            <a:endParaRPr lang="en-IT"/>
+          </a:p>
+        </p:txBody>
       </p:sp>
       <p:sp>
         <p:nvSpPr>
@@ -24461,6 +27202,13 @@
           </a:solidFill>
           <a:ln/>
         </p:spPr>
+        <p:txBody>
+          <a:bodyPr/>
+          <a:lstStyle/>
+          <a:p>
+            <a:endParaRPr lang="en-IT"/>
+          </a:p>
+        </p:txBody>
       </p:sp>
       <p:sp>
         <p:nvSpPr>
@@ -24566,6 +27314,13 @@
             <a:prstDash val="solid"/>
           </a:ln>
         </p:spPr>
+        <p:txBody>
+          <a:bodyPr/>
+          <a:lstStyle/>
+          <a:p>
+            <a:endParaRPr lang="en-IT"/>
+          </a:p>
+        </p:txBody>
       </p:sp>
       <p:sp>
         <p:nvSpPr>
@@ -24586,6 +27341,13 @@
           </a:solidFill>
           <a:ln/>
         </p:spPr>
+        <p:txBody>
+          <a:bodyPr/>
+          <a:lstStyle/>
+          <a:p>
+            <a:endParaRPr lang="en-IT"/>
+          </a:p>
+        </p:txBody>
       </p:sp>
       <p:sp>
         <p:nvSpPr>
@@ -24691,6 +27453,13 @@
             <a:prstDash val="solid"/>
           </a:ln>
         </p:spPr>
+        <p:txBody>
+          <a:bodyPr/>
+          <a:lstStyle/>
+          <a:p>
+            <a:endParaRPr lang="en-IT"/>
+          </a:p>
+        </p:txBody>
       </p:sp>
       <p:sp>
         <p:nvSpPr>
@@ -24711,6 +27480,13 @@
           </a:solidFill>
           <a:ln/>
         </p:spPr>
+        <p:txBody>
+          <a:bodyPr/>
+          <a:lstStyle/>
+          <a:p>
+            <a:endParaRPr lang="en-IT"/>
+          </a:p>
+        </p:txBody>
       </p:sp>
       <p:sp>
         <p:nvSpPr>
@@ -24816,6 +27592,13 @@
             <a:prstDash val="solid"/>
           </a:ln>
         </p:spPr>
+        <p:txBody>
+          <a:bodyPr/>
+          <a:lstStyle/>
+          <a:p>
+            <a:endParaRPr lang="en-IT"/>
+          </a:p>
+        </p:txBody>
       </p:sp>
       <p:sp>
         <p:nvSpPr>
@@ -24836,6 +27619,13 @@
           </a:solidFill>
           <a:ln/>
         </p:spPr>
+        <p:txBody>
+          <a:bodyPr/>
+          <a:lstStyle/>
+          <a:p>
+            <a:endParaRPr lang="en-IT"/>
+          </a:p>
+        </p:txBody>
       </p:sp>
       <p:sp>
         <p:nvSpPr>
@@ -24941,6 +27731,13 @@
             <a:prstDash val="solid"/>
           </a:ln>
         </p:spPr>
+        <p:txBody>
+          <a:bodyPr/>
+          <a:lstStyle/>
+          <a:p>
+            <a:endParaRPr lang="en-IT"/>
+          </a:p>
+        </p:txBody>
       </p:sp>
       <p:sp>
         <p:nvSpPr>
@@ -24961,6 +27758,13 @@
           </a:solidFill>
           <a:ln/>
         </p:spPr>
+        <p:txBody>
+          <a:bodyPr/>
+          <a:lstStyle/>
+          <a:p>
+            <a:endParaRPr lang="en-IT"/>
+          </a:p>
+        </p:txBody>
       </p:sp>
       <p:sp>
         <p:nvSpPr>
@@ -25066,6 +27870,13 @@
             <a:prstDash val="solid"/>
           </a:ln>
         </p:spPr>
+        <p:txBody>
+          <a:bodyPr/>
+          <a:lstStyle/>
+          <a:p>
+            <a:endParaRPr lang="en-IT" dirty="0"/>
+          </a:p>
+        </p:txBody>
       </p:sp>
       <p:sp>
         <p:nvSpPr>
@@ -25086,6 +27897,13 @@
           </a:solidFill>
           <a:ln/>
         </p:spPr>
+        <p:txBody>
+          <a:bodyPr/>
+          <a:lstStyle/>
+          <a:p>
+            <a:endParaRPr lang="en-IT"/>
+          </a:p>
+        </p:txBody>
       </p:sp>
       <p:sp>
         <p:nvSpPr>
@@ -25151,7 +27969,7 @@
               <a:buNone/>
             </a:pPr>
             <a:r>
-              <a:rPr lang="en-US" sz="1300" dirty="0">
+              <a:rPr lang="en-US" sz="1300" b="1" dirty="0">
                 <a:solidFill>
                   <a:srgbClr val="12262B"/>
                 </a:solidFill>
@@ -25161,7 +27979,7 @@
               </a:rPr>
               <a:t>Evaluate with the right classification metrics</a:t>
             </a:r>
-            <a:endParaRPr lang="en-US" sz="1300" dirty="0"/>
+            <a:endParaRPr lang="en-US" sz="1300" b="1" dirty="0"/>
           </a:p>
         </p:txBody>
       </p:sp>
@@ -25191,6 +28009,13 @@
             <a:prstDash val="solid"/>
           </a:ln>
         </p:spPr>
+        <p:txBody>
+          <a:bodyPr/>
+          <a:lstStyle/>
+          <a:p>
+            <a:endParaRPr lang="en-IT"/>
+          </a:p>
+        </p:txBody>
       </p:sp>
       <p:sp>
         <p:nvSpPr>
@@ -25211,6 +28036,13 @@
           </a:solidFill>
           <a:ln/>
         </p:spPr>
+        <p:txBody>
+          <a:bodyPr/>
+          <a:lstStyle/>
+          <a:p>
+            <a:endParaRPr lang="en-IT"/>
+          </a:p>
+        </p:txBody>
       </p:sp>
       <p:sp>
         <p:nvSpPr>
@@ -25327,6 +28159,13 @@
             <a:prstDash val="solid"/>
           </a:ln>
         </p:spPr>
+        <p:txBody>
+          <a:bodyPr/>
+          <a:lstStyle/>
+          <a:p>
+            <a:endParaRPr lang="en-IT"/>
+          </a:p>
+        </p:txBody>
       </p:sp>
       <p:sp>
         <p:nvSpPr>
@@ -25347,6 +28186,13 @@
           </a:solidFill>
           <a:ln/>
         </p:spPr>
+        <p:txBody>
+          <a:bodyPr/>
+          <a:lstStyle/>
+          <a:p>
+            <a:endParaRPr lang="en-IT"/>
+          </a:p>
+        </p:txBody>
       </p:sp>
       <p:sp>
         <p:nvSpPr>
@@ -25648,6 +28494,13 @@
             </a:outerShdw>
           </a:effectLst>
         </p:spPr>
+        <p:txBody>
+          <a:bodyPr/>
+          <a:lstStyle/>
+          <a:p>
+            <a:endParaRPr lang="en-IT"/>
+          </a:p>
+        </p:txBody>
       </p:sp>
       <p:sp>
         <p:nvSpPr>
@@ -25711,6 +28564,13 @@
             <a:tailEnd type="triangle"/>
           </a:ln>
         </p:spPr>
+        <p:txBody>
+          <a:bodyPr/>
+          <a:lstStyle/>
+          <a:p>
+            <a:endParaRPr lang="en-IT"/>
+          </a:p>
+        </p:txBody>
       </p:sp>
       <p:sp>
         <p:nvSpPr>
@@ -25745,6 +28605,13 @@
             </a:outerShdw>
           </a:effectLst>
         </p:spPr>
+        <p:txBody>
+          <a:bodyPr/>
+          <a:lstStyle/>
+          <a:p>
+            <a:endParaRPr lang="en-IT"/>
+          </a:p>
+        </p:txBody>
       </p:sp>
       <p:sp>
         <p:nvSpPr>
@@ -25808,6 +28675,13 @@
             <a:tailEnd type="triangle"/>
           </a:ln>
         </p:spPr>
+        <p:txBody>
+          <a:bodyPr/>
+          <a:lstStyle/>
+          <a:p>
+            <a:endParaRPr lang="en-IT"/>
+          </a:p>
+        </p:txBody>
       </p:sp>
       <p:sp>
         <p:nvSpPr>
@@ -25842,6 +28716,13 @@
             </a:outerShdw>
           </a:effectLst>
         </p:spPr>
+        <p:txBody>
+          <a:bodyPr/>
+          <a:lstStyle/>
+          <a:p>
+            <a:endParaRPr lang="en-IT"/>
+          </a:p>
+        </p:txBody>
       </p:sp>
       <p:sp>
         <p:nvSpPr>
@@ -25905,6 +28786,13 @@
             <a:tailEnd type="triangle"/>
           </a:ln>
         </p:spPr>
+        <p:txBody>
+          <a:bodyPr/>
+          <a:lstStyle/>
+          <a:p>
+            <a:endParaRPr lang="en-IT"/>
+          </a:p>
+        </p:txBody>
       </p:sp>
       <p:sp>
         <p:nvSpPr>
@@ -25939,6 +28827,13 @@
             </a:outerShdw>
           </a:effectLst>
         </p:spPr>
+        <p:txBody>
+          <a:bodyPr/>
+          <a:lstStyle/>
+          <a:p>
+            <a:endParaRPr lang="en-IT"/>
+          </a:p>
+        </p:txBody>
       </p:sp>
       <p:sp>
         <p:nvSpPr>
@@ -26002,6 +28897,13 @@
             <a:tailEnd type="triangle"/>
           </a:ln>
         </p:spPr>
+        <p:txBody>
+          <a:bodyPr/>
+          <a:lstStyle/>
+          <a:p>
+            <a:endParaRPr lang="en-IT"/>
+          </a:p>
+        </p:txBody>
       </p:sp>
       <p:sp>
         <p:nvSpPr>
@@ -26036,6 +28938,13 @@
             </a:outerShdw>
           </a:effectLst>
         </p:spPr>
+        <p:txBody>
+          <a:bodyPr/>
+          <a:lstStyle/>
+          <a:p>
+            <a:endParaRPr lang="en-IT"/>
+          </a:p>
+        </p:txBody>
       </p:sp>
       <p:sp>
         <p:nvSpPr>
@@ -26531,7 +29440,7 @@
                 <a:ea typeface="Calibri" pitchFamily="34" charset="-122"/>
                 <a:cs typeface="Calibri" pitchFamily="34" charset="-120"/>
               </a:rPr>
-              <a:t>How to prevent overfitting: simple function, validation, </a:t>
+              <a:t>How to prevent overfitting: simpler function, validation, </a:t>
             </a:r>
             <a:r>
               <a:rPr lang="en-US" sz="1600" b="1" dirty="0" err="1">
@@ -26586,6 +29495,13 @@
             </a:outerShdw>
           </a:effectLst>
         </p:spPr>
+        <p:txBody>
+          <a:bodyPr/>
+          <a:lstStyle/>
+          <a:p>
+            <a:endParaRPr lang="en-IT"/>
+          </a:p>
+        </p:txBody>
       </p:sp>
       <p:sp>
         <p:nvSpPr>
@@ -26666,6 +29582,13 @@
             <a:tailEnd type="triangle"/>
           </a:ln>
         </p:spPr>
+        <p:txBody>
+          <a:bodyPr/>
+          <a:lstStyle/>
+          <a:p>
+            <a:endParaRPr lang="en-IT"/>
+          </a:p>
+        </p:txBody>
       </p:sp>
       <p:sp>
         <p:nvSpPr>
@@ -26695,6 +29618,13 @@
             </a:outerShdw>
           </a:effectLst>
         </p:spPr>
+        <p:txBody>
+          <a:bodyPr/>
+          <a:lstStyle/>
+          <a:p>
+            <a:endParaRPr lang="en-IT"/>
+          </a:p>
+        </p:txBody>
       </p:sp>
       <p:sp>
         <p:nvSpPr>
@@ -26758,6 +29688,13 @@
             <a:tailEnd type="triangle"/>
           </a:ln>
         </p:spPr>
+        <p:txBody>
+          <a:bodyPr/>
+          <a:lstStyle/>
+          <a:p>
+            <a:endParaRPr lang="en-IT"/>
+          </a:p>
+        </p:txBody>
       </p:sp>
       <p:sp>
         <p:nvSpPr>
@@ -27139,6 +30076,13 @@
             </a:outerShdw>
           </a:effectLst>
         </p:spPr>
+        <p:txBody>
+          <a:bodyPr/>
+          <a:lstStyle/>
+          <a:p>
+            <a:endParaRPr lang="en-IT"/>
+          </a:p>
+        </p:txBody>
       </p:sp>
       <p:sp>
         <p:nvSpPr>
@@ -27610,6 +30554,13 @@
           </a:solidFill>
           <a:ln/>
         </p:spPr>
+        <p:txBody>
+          <a:bodyPr/>
+          <a:lstStyle/>
+          <a:p>
+            <a:endParaRPr lang="en-IT"/>
+          </a:p>
+        </p:txBody>
       </p:sp>
       <p:sp>
         <p:nvSpPr>
@@ -27630,6 +30581,13 @@
           </a:solidFill>
           <a:ln/>
         </p:spPr>
+        <p:txBody>
+          <a:bodyPr/>
+          <a:lstStyle/>
+          <a:p>
+            <a:endParaRPr lang="en-IT"/>
+          </a:p>
+        </p:txBody>
       </p:sp>
       <p:sp>
         <p:nvSpPr>
@@ -27650,6 +30608,13 @@
           </a:solidFill>
           <a:ln/>
         </p:spPr>
+        <p:txBody>
+          <a:bodyPr/>
+          <a:lstStyle/>
+          <a:p>
+            <a:endParaRPr lang="en-IT"/>
+          </a:p>
+        </p:txBody>
       </p:sp>
       <p:sp>
         <p:nvSpPr>
@@ -27670,6 +30635,13 @@
           </a:solidFill>
           <a:ln/>
         </p:spPr>
+        <p:txBody>
+          <a:bodyPr/>
+          <a:lstStyle/>
+          <a:p>
+            <a:endParaRPr lang="en-IT"/>
+          </a:p>
+        </p:txBody>
       </p:sp>
       <p:sp>
         <p:nvSpPr>
@@ -27690,6 +30662,13 @@
           </a:solidFill>
           <a:ln/>
         </p:spPr>
+        <p:txBody>
+          <a:bodyPr/>
+          <a:lstStyle/>
+          <a:p>
+            <a:endParaRPr lang="en-IT"/>
+          </a:p>
+        </p:txBody>
       </p:sp>
       <p:sp>
         <p:nvSpPr>
@@ -27749,6 +30728,13 @@
           </a:solidFill>
           <a:ln/>
         </p:spPr>
+        <p:txBody>
+          <a:bodyPr/>
+          <a:lstStyle/>
+          <a:p>
+            <a:endParaRPr lang="en-IT"/>
+          </a:p>
+        </p:txBody>
       </p:sp>
       <p:sp>
         <p:nvSpPr>
@@ -27769,6 +30755,13 @@
           </a:solidFill>
           <a:ln/>
         </p:spPr>
+        <p:txBody>
+          <a:bodyPr/>
+          <a:lstStyle/>
+          <a:p>
+            <a:endParaRPr lang="en-IT"/>
+          </a:p>
+        </p:txBody>
       </p:sp>
       <p:sp>
         <p:nvSpPr>
@@ -27789,6 +30782,13 @@
           </a:solidFill>
           <a:ln/>
         </p:spPr>
+        <p:txBody>
+          <a:bodyPr/>
+          <a:lstStyle/>
+          <a:p>
+            <a:endParaRPr lang="en-IT"/>
+          </a:p>
+        </p:txBody>
       </p:sp>
       <p:sp>
         <p:nvSpPr>
@@ -27809,6 +30809,13 @@
           </a:solidFill>
           <a:ln/>
         </p:spPr>
+        <p:txBody>
+          <a:bodyPr/>
+          <a:lstStyle/>
+          <a:p>
+            <a:endParaRPr lang="en-IT"/>
+          </a:p>
+        </p:txBody>
       </p:sp>
       <p:sp>
         <p:nvSpPr>
@@ -27829,6 +30836,13 @@
           </a:solidFill>
           <a:ln/>
         </p:spPr>
+        <p:txBody>
+          <a:bodyPr/>
+          <a:lstStyle/>
+          <a:p>
+            <a:endParaRPr lang="en-IT"/>
+          </a:p>
+        </p:txBody>
       </p:sp>
       <p:sp>
         <p:nvSpPr>
@@ -27852,6 +30866,13 @@
             <a:prstDash val="solid"/>
           </a:ln>
         </p:spPr>
+        <p:txBody>
+          <a:bodyPr/>
+          <a:lstStyle/>
+          <a:p>
+            <a:endParaRPr lang="en-IT"/>
+          </a:p>
+        </p:txBody>
       </p:sp>
       <p:sp>
         <p:nvSpPr>
@@ -27875,6 +30896,13 @@
             <a:prstDash val="solid"/>
           </a:ln>
         </p:spPr>
+        <p:txBody>
+          <a:bodyPr/>
+          <a:lstStyle/>
+          <a:p>
+            <a:endParaRPr lang="en-IT"/>
+          </a:p>
+        </p:txBody>
       </p:sp>
       <p:sp>
         <p:nvSpPr>
@@ -28137,6 +31165,13 @@
             </a:outerShdw>
           </a:effectLst>
         </p:spPr>
+        <p:txBody>
+          <a:bodyPr/>
+          <a:lstStyle/>
+          <a:p>
+            <a:endParaRPr lang="en-IT"/>
+          </a:p>
+        </p:txBody>
       </p:sp>
       <p:sp>
         <p:nvSpPr>
@@ -28157,6 +31192,13 @@
           </a:solidFill>
           <a:ln/>
         </p:spPr>
+        <p:txBody>
+          <a:bodyPr/>
+          <a:lstStyle/>
+          <a:p>
+            <a:endParaRPr lang="en-IT"/>
+          </a:p>
+        </p:txBody>
       </p:sp>
       <p:sp>
         <p:nvSpPr>
@@ -28308,6 +31350,13 @@
             </a:outerShdw>
           </a:effectLst>
         </p:spPr>
+        <p:txBody>
+          <a:bodyPr/>
+          <a:lstStyle/>
+          <a:p>
+            <a:endParaRPr lang="en-IT"/>
+          </a:p>
+        </p:txBody>
       </p:sp>
       <p:sp>
         <p:nvSpPr>
@@ -28328,6 +31377,13 @@
           </a:solidFill>
           <a:ln/>
         </p:spPr>
+        <p:txBody>
+          <a:bodyPr/>
+          <a:lstStyle/>
+          <a:p>
+            <a:endParaRPr lang="en-IT"/>
+          </a:p>
+        </p:txBody>
       </p:sp>
       <p:sp>
         <p:nvSpPr>
@@ -28479,6 +31535,13 @@
             </a:outerShdw>
           </a:effectLst>
         </p:spPr>
+        <p:txBody>
+          <a:bodyPr/>
+          <a:lstStyle/>
+          <a:p>
+            <a:endParaRPr lang="en-IT"/>
+          </a:p>
+        </p:txBody>
       </p:sp>
       <p:sp>
         <p:nvSpPr>
@@ -28499,6 +31562,13 @@
           </a:solidFill>
           <a:ln/>
         </p:spPr>
+        <p:txBody>
+          <a:bodyPr/>
+          <a:lstStyle/>
+          <a:p>
+            <a:endParaRPr lang="en-IT"/>
+          </a:p>
+        </p:txBody>
       </p:sp>
       <p:sp>
         <p:nvSpPr>
@@ -28650,6 +31720,13 @@
             </a:outerShdw>
           </a:effectLst>
         </p:spPr>
+        <p:txBody>
+          <a:bodyPr/>
+          <a:lstStyle/>
+          <a:p>
+            <a:endParaRPr lang="en-IT"/>
+          </a:p>
+        </p:txBody>
       </p:sp>
       <p:sp>
         <p:nvSpPr>
@@ -28670,6 +31747,13 @@
           </a:solidFill>
           <a:ln/>
         </p:spPr>
+        <p:txBody>
+          <a:bodyPr/>
+          <a:lstStyle/>
+          <a:p>
+            <a:endParaRPr lang="en-IT"/>
+          </a:p>
+        </p:txBody>
       </p:sp>
       <p:sp>
         <p:nvSpPr>
@@ -29077,7 +32161,7 @@
                 <a:ea typeface="Calibri" pitchFamily="34" charset="-122"/>
                 <a:cs typeface="Calibri" pitchFamily="34" charset="-120"/>
               </a:rPr>
-              <a:t>A “pipeline” object enforces this for you — a habit, not an afterthought.</a:t>
+              <a:t>A “pipeline” object enforces this for you.</a:t>
             </a:r>
           </a:p>
           <a:p>
@@ -29130,6 +32214,13 @@
             </a:outerShdw>
           </a:effectLst>
         </p:spPr>
+        <p:txBody>
+          <a:bodyPr/>
+          <a:lstStyle/>
+          <a:p>
+            <a:endParaRPr lang="en-IT"/>
+          </a:p>
+        </p:txBody>
       </p:sp>
       <p:sp>
         <p:nvSpPr>
@@ -29237,6 +32328,13 @@
             </a:outerShdw>
           </a:effectLst>
         </p:spPr>
+        <p:txBody>
+          <a:bodyPr/>
+          <a:lstStyle/>
+          <a:p>
+            <a:endParaRPr lang="en-IT"/>
+          </a:p>
+        </p:txBody>
       </p:sp>
       <p:sp>
         <p:nvSpPr>
